--- a/tues_aug_4_morning/single-cell-bioinformatics-overview.pptx
+++ b/tues_aug_4_morning/single-cell-bioinformatics-overview.pptx
@@ -38,8 +38,8 @@
 </file>
 
 <file path=ppt/slideLayouts/slideLayout1.xml><?xml version="1.0" encoding="utf-8"?>
-<p:sldLayout xmlns:a="http://schemas.openxmlformats.org/drawingml/2006/main" xmlns:p="http://schemas.openxmlformats.org/presentationml/2006/main" xmlns:r="http://schemas.openxmlformats.org/officeDocument/2006/relationships" xmlns:p14="http://schemas.microsoft.com/office/powerpoint/2010/main" xmlns:p15="http://schemas.microsoft.com/office/powerpoint/2012/main" xmlns:mc="http://schemas.openxmlformats.org/markup-compatibility/2006" type="blank" preserve="1">
-  <p:cSld name="Picture with Caption">
+<p:sldLayout xmlns:a="http://schemas.openxmlformats.org/drawingml/2006/main" xmlns:p="http://schemas.openxmlformats.org/presentationml/2006/main" xmlns:r="http://schemas.openxmlformats.org/officeDocument/2006/relationships" xmlns:p14="http://schemas.microsoft.com/office/powerpoint/2010/main" xmlns:p15="http://schemas.microsoft.com/office/powerpoint/2012/main" xmlns:mc="http://schemas.openxmlformats.org/markup-compatibility/2006" type="titleOnly" preserve="1">
+  <p:cSld name="Title Only">
     <p:bg>
       <p:bgPr>
         <a:solidFill>
@@ -73,8 +73,1396 @@
         </p:nvSpPr>
         <p:spPr>
           <a:xfrm>
-            <a:off x="1792440" y="4800600"/>
-            <a:ext cx="5484600" cy="564840"/>
+            <a:off x="457200" y="274680"/>
+            <a:ext cx="8227440" cy="1140840"/>
+          </a:xfrm>
+          <a:prstGeom prst="rect">
+            <a:avLst/>
+          </a:prstGeom>
+          <a:noFill/>
+          <a:ln w="0">
+            <a:noFill/>
+          </a:ln>
+        </p:spPr>
+        <p:txBody>
+          <a:bodyPr lIns="91440" tIns="45720" rIns="91440" bIns="45720" anchor="ctr">
+            <a:noAutofit/>
+          </a:bodyPr>
+          <a:lstStyle>
+            <a:lvl1pPr indent="0" algn="ctr" defTabSz="457200">
+              <a:lnSpc>
+                <a:spcPct val="100000"/>
+              </a:lnSpc>
+              <a:buNone/>
+              <a:tabLst>
+                <a:tab pos="0" algn="l"/>
+              </a:tabLst>
+              <a:defRPr lang="en-US" sz="4400" b="0" u="none" strike="noStrike">
+                <a:solidFill>
+                  <a:schemeClr val="dk1"/>
+                </a:solidFill>
+                <a:effectLst/>
+                <a:uFillTx/>
+                <a:latin typeface="Calibri"/>
+              </a:defRPr>
+            </a:lvl1pPr>
+          </a:lstStyle>
+          <a:p>
+            <a:pPr indent="0" algn="ctr" defTabSz="457200">
+              <a:lnSpc>
+                <a:spcPct val="100000"/>
+              </a:lnSpc>
+              <a:buNone/>
+              <a:tabLst>
+                <a:tab pos="0" algn="l"/>
+              </a:tabLst>
+            </a:pPr>
+            <a:r>
+              <a:rPr lang="en-US" sz="4400" b="0" u="none" strike="noStrike">
+                <a:solidFill>
+                  <a:schemeClr val="dk1"/>
+                </a:solidFill>
+                <a:effectLst/>
+                <a:uFillTx/>
+                <a:latin typeface="Calibri"/>
+              </a:rPr>
+              <a:t>Click to edit Master title style</a:t>
+            </a:r>
+            <a:endParaRPr lang="en-US" sz="4400" b="0" u="none" strike="noStrike">
+              <a:solidFill>
+                <a:schemeClr val="dk1"/>
+              </a:solidFill>
+              <a:effectLst/>
+              <a:uFillTx/>
+              <a:latin typeface="Calibri"/>
+            </a:endParaRPr>
+          </a:p>
+        </p:txBody>
+      </p:sp>
+      <p:sp>
+        <p:nvSpPr>
+          <p:cNvPr id="3" name="PlaceHolder 2"/>
+          <p:cNvSpPr>
+            <a:spLocks noGrp="1"/>
+          </p:cNvSpPr>
+          <p:nvPr>
+            <p:ph type="dt" idx="1"/>
+          </p:nvPr>
+        </p:nvSpPr>
+        <p:spPr>
+          <a:xfrm>
+            <a:off x="457200" y="6356520"/>
+            <a:ext cx="2131560" cy="362880"/>
+          </a:xfrm>
+          <a:prstGeom prst="rect">
+            <a:avLst/>
+          </a:prstGeom>
+          <a:noFill/>
+          <a:ln w="0">
+            <a:noFill/>
+          </a:ln>
+        </p:spPr>
+        <p:txBody>
+          <a:bodyPr lIns="91440" tIns="45720" rIns="91440" bIns="45720" anchor="ctr">
+            <a:noAutofit/>
+          </a:bodyPr>
+          <a:lstStyle>
+            <a:lvl1pPr indent="0" algn="l" defTabSz="457200">
+              <a:lnSpc>
+                <a:spcPct val="100000"/>
+              </a:lnSpc>
+              <a:buNone/>
+              <a:tabLst>
+                <a:tab pos="0" algn="l"/>
+              </a:tabLst>
+              <a:defRPr lang="en-US" sz="1200" b="0" u="none" strike="noStrike">
+                <a:solidFill>
+                  <a:schemeClr val="dk1">
+                    <a:tint val="75000"/>
+                  </a:schemeClr>
+                </a:solidFill>
+                <a:effectLst/>
+                <a:uFillTx/>
+                <a:latin typeface="Calibri"/>
+              </a:defRPr>
+            </a:lvl1pPr>
+          </a:lstStyle>
+          <a:p>
+            <a:pPr indent="0" algn="l" defTabSz="457200">
+              <a:lnSpc>
+                <a:spcPct val="100000"/>
+              </a:lnSpc>
+              <a:buNone/>
+              <a:tabLst>
+                <a:tab pos="0" algn="l"/>
+              </a:tabLst>
+            </a:pPr>
+            <a:r>
+              <a:rPr lang="en-US" sz="1200" b="0" u="none" strike="noStrike">
+                <a:solidFill>
+                  <a:schemeClr val="dk1">
+                    <a:tint val="75000"/>
+                  </a:schemeClr>
+                </a:solidFill>
+                <a:effectLst/>
+                <a:uFillTx/>
+                <a:latin typeface="Calibri"/>
+              </a:rPr>
+              <a:t> </a:t>
+            </a:r>
+            <a:endParaRPr lang="en-US" sz="1200" b="0" u="none" strike="noStrike">
+              <a:solidFill>
+                <a:srgbClr val="000000"/>
+              </a:solidFill>
+              <a:effectLst/>
+              <a:uFillTx/>
+              <a:latin typeface="Times New Roman"/>
+            </a:endParaRPr>
+          </a:p>
+        </p:txBody>
+      </p:sp>
+      <p:sp>
+        <p:nvSpPr>
+          <p:cNvPr id="4" name="PlaceHolder 3"/>
+          <p:cNvSpPr>
+            <a:spLocks noGrp="1"/>
+          </p:cNvSpPr>
+          <p:nvPr>
+            <p:ph type="ftr" idx="2"/>
+          </p:nvPr>
+        </p:nvSpPr>
+        <p:spPr>
+          <a:xfrm>
+            <a:off x="3124080" y="6356520"/>
+            <a:ext cx="2893320" cy="362880"/>
+          </a:xfrm>
+          <a:prstGeom prst="rect">
+            <a:avLst/>
+          </a:prstGeom>
+          <a:noFill/>
+          <a:ln w="0">
+            <a:noFill/>
+          </a:ln>
+        </p:spPr>
+        <p:txBody>
+          <a:bodyPr lIns="91440" tIns="45720" rIns="91440" bIns="45720" anchor="ctr">
+            <a:noAutofit/>
+          </a:bodyPr>
+          <a:lstStyle>
+            <a:lvl1pPr indent="0" algn="ctr">
+              <a:lnSpc>
+                <a:spcPct val="100000"/>
+              </a:lnSpc>
+              <a:buNone/>
+              <a:tabLst>
+                <a:tab pos="0" algn="l"/>
+              </a:tabLst>
+              <a:defRPr lang="en-US" sz="1400" b="0" u="none" strike="noStrike">
+                <a:solidFill>
+                  <a:srgbClr val="000000"/>
+                </a:solidFill>
+                <a:effectLst/>
+                <a:uFillTx/>
+                <a:latin typeface="Times New Roman"/>
+              </a:defRPr>
+            </a:lvl1pPr>
+          </a:lstStyle>
+          <a:p>
+            <a:pPr indent="0" algn="ctr">
+              <a:lnSpc>
+                <a:spcPct val="100000"/>
+              </a:lnSpc>
+              <a:buNone/>
+              <a:tabLst>
+                <a:tab pos="0" algn="l"/>
+              </a:tabLst>
+            </a:pPr>
+            <a:r>
+              <a:rPr lang="en-US" sz="1400" b="0" u="none" strike="noStrike">
+                <a:solidFill>
+                  <a:srgbClr val="000000"/>
+                </a:solidFill>
+                <a:effectLst/>
+                <a:uFillTx/>
+                <a:latin typeface="Times New Roman"/>
+              </a:rPr>
+              <a:t> </a:t>
+            </a:r>
+            <a:endParaRPr lang="en-US" sz="1400" b="0" u="none" strike="noStrike">
+              <a:solidFill>
+                <a:srgbClr val="000000"/>
+              </a:solidFill>
+              <a:effectLst/>
+              <a:uFillTx/>
+              <a:latin typeface="Times New Roman"/>
+            </a:endParaRPr>
+          </a:p>
+        </p:txBody>
+      </p:sp>
+      <p:sp>
+        <p:nvSpPr>
+          <p:cNvPr id="5" name="PlaceHolder 4"/>
+          <p:cNvSpPr>
+            <a:spLocks noGrp="1"/>
+          </p:cNvSpPr>
+          <p:nvPr>
+            <p:ph type="sldNum" idx="3"/>
+          </p:nvPr>
+        </p:nvSpPr>
+        <p:spPr>
+          <a:xfrm>
+            <a:off x="6553080" y="6356520"/>
+            <a:ext cx="2131560" cy="362880"/>
+          </a:xfrm>
+          <a:prstGeom prst="rect">
+            <a:avLst/>
+          </a:prstGeom>
+          <a:noFill/>
+          <a:ln w="0">
+            <a:noFill/>
+          </a:ln>
+        </p:spPr>
+        <p:txBody>
+          <a:bodyPr lIns="91440" tIns="45720" rIns="91440" bIns="45720" anchor="ctr">
+            <a:noAutofit/>
+          </a:bodyPr>
+          <a:lstStyle>
+            <a:lvl1pPr indent="0" algn="r" defTabSz="457200">
+              <a:lnSpc>
+                <a:spcPct val="100000"/>
+              </a:lnSpc>
+              <a:buNone/>
+              <a:tabLst>
+                <a:tab pos="0" algn="l"/>
+              </a:tabLst>
+              <a:defRPr lang="en-US" sz="1200" b="0" u="none" strike="noStrike">
+                <a:solidFill>
+                  <a:schemeClr val="dk1">
+                    <a:tint val="75000"/>
+                  </a:schemeClr>
+                </a:solidFill>
+                <a:effectLst/>
+                <a:uFillTx/>
+                <a:latin typeface="Calibri"/>
+              </a:defRPr>
+            </a:lvl1pPr>
+          </a:lstStyle>
+          <a:p>
+            <a:pPr indent="0" algn="r" defTabSz="457200">
+              <a:lnSpc>
+                <a:spcPct val="100000"/>
+              </a:lnSpc>
+              <a:buNone/>
+              <a:tabLst>
+                <a:tab pos="0" algn="l"/>
+              </a:tabLst>
+            </a:pPr>
+            <a:fld id="{4A1AE8AB-B5A6-45F5-9D2A-E2196C9EC8C1}" type="slidenum">
+              <a:rPr lang="en-US" sz="1200" b="0" u="none" strike="noStrike">
+                <a:solidFill>
+                  <a:schemeClr val="dk1">
+                    <a:tint val="75000"/>
+                  </a:schemeClr>
+                </a:solidFill>
+                <a:effectLst/>
+                <a:uFillTx/>
+                <a:latin typeface="Calibri"/>
+              </a:rPr>
+              <a:t>1</a:t>
+            </a:fld>
+            <a:endParaRPr lang="en-US" sz="1200" b="0" u="none" strike="noStrike">
+              <a:solidFill>
+                <a:srgbClr val="000000"/>
+              </a:solidFill>
+              <a:effectLst/>
+              <a:uFillTx/>
+              <a:latin typeface="Times New Roman"/>
+            </a:endParaRPr>
+          </a:p>
+        </p:txBody>
+      </p:sp>
+    </p:spTree>
+  </p:cSld>
+</p:sldLayout>
+</file>
+
+<file path=ppt/slideLayouts/slideLayout10.xml><?xml version="1.0" encoding="utf-8"?>
+<p:sldLayout xmlns:a="http://schemas.openxmlformats.org/drawingml/2006/main" xmlns:p="http://schemas.openxmlformats.org/presentationml/2006/main" xmlns:r="http://schemas.openxmlformats.org/officeDocument/2006/relationships" xmlns:p14="http://schemas.microsoft.com/office/powerpoint/2010/main" xmlns:p15="http://schemas.microsoft.com/office/powerpoint/2012/main" xmlns:mc="http://schemas.openxmlformats.org/markup-compatibility/2006" type="twoObj" preserve="1">
+  <p:cSld name="Two Content">
+    <p:bg>
+      <p:bgPr>
+        <a:solidFill>
+          <a:srgbClr val="FFFFFF"/>
+        </a:solidFill>
+      </p:bgPr>
+    </p:bg>
+    <p:spTree>
+      <p:nvGrpSpPr>
+        <p:cNvPr id="1" name=""/>
+        <p:cNvGrpSpPr/>
+        <p:nvPr/>
+      </p:nvGrpSpPr>
+      <p:grpSpPr>
+        <a:xfrm>
+          <a:off x="0" y="0"/>
+          <a:ext cx="0" cy="0"/>
+          <a:chOff x="0" y="0"/>
+          <a:chExt cx="0" cy="0"/>
+        </a:xfrm>
+      </p:grpSpPr>
+      <p:sp>
+        <p:nvSpPr>
+          <p:cNvPr id="47" name="PlaceHolder 1"/>
+          <p:cNvSpPr>
+            <a:spLocks noGrp="1"/>
+          </p:cNvSpPr>
+          <p:nvPr>
+            <p:ph type="title"/>
+          </p:nvPr>
+        </p:nvSpPr>
+        <p:spPr>
+          <a:xfrm>
+            <a:off x="457200" y="274680"/>
+            <a:ext cx="8227440" cy="1140840"/>
+          </a:xfrm>
+          <a:prstGeom prst="rect">
+            <a:avLst/>
+          </a:prstGeom>
+          <a:noFill/>
+          <a:ln w="0">
+            <a:noFill/>
+          </a:ln>
+        </p:spPr>
+        <p:txBody>
+          <a:bodyPr lIns="91440" tIns="45720" rIns="91440" bIns="45720" anchor="ctr">
+            <a:noAutofit/>
+          </a:bodyPr>
+          <a:lstStyle>
+            <a:lvl1pPr indent="0" algn="ctr" defTabSz="457200">
+              <a:lnSpc>
+                <a:spcPct val="100000"/>
+              </a:lnSpc>
+              <a:buNone/>
+              <a:tabLst>
+                <a:tab pos="0" algn="l"/>
+              </a:tabLst>
+              <a:defRPr lang="en-US" sz="4400" b="0" u="none" strike="noStrike">
+                <a:solidFill>
+                  <a:schemeClr val="dk1"/>
+                </a:solidFill>
+                <a:effectLst/>
+                <a:uFillTx/>
+                <a:latin typeface="Calibri"/>
+              </a:defRPr>
+            </a:lvl1pPr>
+          </a:lstStyle>
+          <a:p>
+            <a:pPr indent="0" algn="ctr" defTabSz="457200">
+              <a:lnSpc>
+                <a:spcPct val="100000"/>
+              </a:lnSpc>
+              <a:buNone/>
+              <a:tabLst>
+                <a:tab pos="0" algn="l"/>
+              </a:tabLst>
+            </a:pPr>
+            <a:r>
+              <a:rPr lang="en-US" sz="4400" b="0" u="none" strike="noStrike">
+                <a:solidFill>
+                  <a:schemeClr val="dk1"/>
+                </a:solidFill>
+                <a:effectLst/>
+                <a:uFillTx/>
+                <a:latin typeface="Calibri"/>
+              </a:rPr>
+              <a:t>Click to edit Master title style</a:t>
+            </a:r>
+            <a:endParaRPr lang="en-US" sz="4400" b="0" u="none" strike="noStrike">
+              <a:solidFill>
+                <a:schemeClr val="dk1"/>
+              </a:solidFill>
+              <a:effectLst/>
+              <a:uFillTx/>
+              <a:latin typeface="Calibri"/>
+            </a:endParaRPr>
+          </a:p>
+        </p:txBody>
+      </p:sp>
+      <p:sp>
+        <p:nvSpPr>
+          <p:cNvPr id="48" name="PlaceHolder 2"/>
+          <p:cNvSpPr>
+            <a:spLocks noGrp="1"/>
+          </p:cNvSpPr>
+          <p:nvPr>
+            <p:ph type="body"/>
+          </p:nvPr>
+        </p:nvSpPr>
+        <p:spPr>
+          <a:xfrm>
+            <a:off x="457200" y="1600200"/>
+            <a:ext cx="4036320" cy="4523760"/>
+          </a:xfrm>
+          <a:prstGeom prst="rect">
+            <a:avLst/>
+          </a:prstGeom>
+          <a:noFill/>
+          <a:ln w="0">
+            <a:noFill/>
+          </a:ln>
+        </p:spPr>
+        <p:txBody>
+          <a:bodyPr lIns="91440" tIns="45720" rIns="91440" bIns="45720" anchor="t">
+            <a:noAutofit/>
+          </a:bodyPr>
+          <a:lstStyle>
+            <a:lvl1pPr algn="l" defTabSz="457200">
+              <a:lnSpc>
+                <a:spcPct val="100000"/>
+              </a:lnSpc>
+              <a:spcBef>
+                <a:spcPts val="561"/>
+              </a:spcBef>
+              <a:buClr>
+                <a:srgbClr val="000000"/>
+              </a:buClr>
+              <a:buFont typeface="Arial"/>
+              <a:buChar char="•"/>
+              <a:defRPr lang="en-US" sz="2800" b="0" u="none" strike="noStrike">
+                <a:solidFill>
+                  <a:schemeClr val="dk1"/>
+                </a:solidFill>
+                <a:effectLst/>
+                <a:uFillTx/>
+                <a:latin typeface="Calibri"/>
+              </a:defRPr>
+            </a:lvl1pPr>
+            <a:lvl2pPr lvl="1" algn="l" defTabSz="457200">
+              <a:lnSpc>
+                <a:spcPct val="100000"/>
+              </a:lnSpc>
+              <a:spcBef>
+                <a:spcPts val="479"/>
+              </a:spcBef>
+              <a:buClr>
+                <a:srgbClr val="000000"/>
+              </a:buClr>
+              <a:buFont typeface="Arial"/>
+              <a:buChar char="–"/>
+              <a:defRPr lang="en-US" sz="2400" b="0" u="none" strike="noStrike">
+                <a:solidFill>
+                  <a:schemeClr val="dk1"/>
+                </a:solidFill>
+                <a:effectLst/>
+                <a:uFillTx/>
+                <a:latin typeface="Calibri"/>
+              </a:defRPr>
+            </a:lvl2pPr>
+            <a:lvl3pPr lvl="2" algn="l" defTabSz="457200">
+              <a:lnSpc>
+                <a:spcPct val="100000"/>
+              </a:lnSpc>
+              <a:spcBef>
+                <a:spcPts val="400"/>
+              </a:spcBef>
+              <a:buClr>
+                <a:srgbClr val="000000"/>
+              </a:buClr>
+              <a:buFont typeface="Arial"/>
+              <a:buChar char="•"/>
+              <a:defRPr lang="en-US" sz="2000" b="0" u="none" strike="noStrike">
+                <a:solidFill>
+                  <a:schemeClr val="dk1"/>
+                </a:solidFill>
+                <a:effectLst/>
+                <a:uFillTx/>
+                <a:latin typeface="Calibri"/>
+              </a:defRPr>
+            </a:lvl3pPr>
+            <a:lvl4pPr lvl="3" algn="l" defTabSz="457200">
+              <a:lnSpc>
+                <a:spcPct val="100000"/>
+              </a:lnSpc>
+              <a:spcBef>
+                <a:spcPts val="360"/>
+              </a:spcBef>
+              <a:buClr>
+                <a:srgbClr val="000000"/>
+              </a:buClr>
+              <a:buFont typeface="Arial"/>
+              <a:buChar char="–"/>
+              <a:defRPr lang="en-US" sz="1800" b="0" u="none" strike="noStrike">
+                <a:solidFill>
+                  <a:schemeClr val="dk1"/>
+                </a:solidFill>
+                <a:effectLst/>
+                <a:uFillTx/>
+                <a:latin typeface="Calibri"/>
+              </a:defRPr>
+            </a:lvl4pPr>
+            <a:lvl5pPr lvl="4" algn="l" defTabSz="457200">
+              <a:lnSpc>
+                <a:spcPct val="100000"/>
+              </a:lnSpc>
+              <a:spcBef>
+                <a:spcPts val="360"/>
+              </a:spcBef>
+              <a:buClr>
+                <a:srgbClr val="000000"/>
+              </a:buClr>
+              <a:buFont typeface="Arial"/>
+              <a:buChar char="»"/>
+              <a:defRPr lang="en-US" sz="1800" b="0" u="none" strike="noStrike">
+                <a:solidFill>
+                  <a:schemeClr val="dk1"/>
+                </a:solidFill>
+                <a:effectLst/>
+                <a:uFillTx/>
+                <a:latin typeface="Calibri"/>
+              </a:defRPr>
+            </a:lvl5pPr>
+          </a:lstStyle>
+          <a:p>
+            <a:pPr marL="343080" indent="-343080" algn="l" defTabSz="457200">
+              <a:lnSpc>
+                <a:spcPct val="100000"/>
+              </a:lnSpc>
+              <a:spcBef>
+                <a:spcPts val="561"/>
+              </a:spcBef>
+              <a:buClr>
+                <a:srgbClr val="000000"/>
+              </a:buClr>
+              <a:buFont typeface="Arial"/>
+              <a:buChar char="•"/>
+            </a:pPr>
+            <a:r>
+              <a:rPr lang="en-US" sz="2800" b="0" u="none" strike="noStrike">
+                <a:solidFill>
+                  <a:schemeClr val="dk1"/>
+                </a:solidFill>
+                <a:effectLst/>
+                <a:uFillTx/>
+                <a:latin typeface="Calibri"/>
+              </a:rPr>
+              <a:t>Click to edit Master text styles</a:t>
+            </a:r>
+            <a:endParaRPr lang="en-US" sz="2800" b="0" u="none" strike="noStrike">
+              <a:solidFill>
+                <a:schemeClr val="dk1"/>
+              </a:solidFill>
+              <a:effectLst/>
+              <a:uFillTx/>
+              <a:latin typeface="Calibri"/>
+            </a:endParaRPr>
+          </a:p>
+          <a:p>
+            <a:pPr marL="743040" lvl="1" indent="-285840" algn="l" defTabSz="457200">
+              <a:lnSpc>
+                <a:spcPct val="100000"/>
+              </a:lnSpc>
+              <a:spcBef>
+                <a:spcPts val="479"/>
+              </a:spcBef>
+              <a:buClr>
+                <a:srgbClr val="000000"/>
+              </a:buClr>
+              <a:buFont typeface="Arial"/>
+              <a:buChar char="–"/>
+            </a:pPr>
+            <a:r>
+              <a:rPr lang="en-US" sz="2400" b="0" u="none" strike="noStrike">
+                <a:solidFill>
+                  <a:schemeClr val="dk1"/>
+                </a:solidFill>
+                <a:effectLst/>
+                <a:uFillTx/>
+                <a:latin typeface="Calibri"/>
+              </a:rPr>
+              <a:t>Second level</a:t>
+            </a:r>
+            <a:endParaRPr lang="en-US" sz="2400" b="0" u="none" strike="noStrike">
+              <a:solidFill>
+                <a:schemeClr val="dk1"/>
+              </a:solidFill>
+              <a:effectLst/>
+              <a:uFillTx/>
+              <a:latin typeface="Calibri"/>
+            </a:endParaRPr>
+          </a:p>
+          <a:p>
+            <a:pPr marL="1143000" lvl="2" indent="-228600" algn="l" defTabSz="457200">
+              <a:lnSpc>
+                <a:spcPct val="100000"/>
+              </a:lnSpc>
+              <a:spcBef>
+                <a:spcPts val="400"/>
+              </a:spcBef>
+              <a:buClr>
+                <a:srgbClr val="000000"/>
+              </a:buClr>
+              <a:buFont typeface="Arial"/>
+              <a:buChar char="•"/>
+            </a:pPr>
+            <a:r>
+              <a:rPr lang="en-US" sz="2000" b="0" u="none" strike="noStrike">
+                <a:solidFill>
+                  <a:schemeClr val="dk1"/>
+                </a:solidFill>
+                <a:effectLst/>
+                <a:uFillTx/>
+                <a:latin typeface="Calibri"/>
+              </a:rPr>
+              <a:t>Third level</a:t>
+            </a:r>
+            <a:endParaRPr lang="en-US" sz="2000" b="0" u="none" strike="noStrike">
+              <a:solidFill>
+                <a:schemeClr val="dk1"/>
+              </a:solidFill>
+              <a:effectLst/>
+              <a:uFillTx/>
+              <a:latin typeface="Calibri"/>
+            </a:endParaRPr>
+          </a:p>
+          <a:p>
+            <a:pPr marL="1600200" lvl="3" indent="-228600" algn="l" defTabSz="457200">
+              <a:lnSpc>
+                <a:spcPct val="100000"/>
+              </a:lnSpc>
+              <a:spcBef>
+                <a:spcPts val="360"/>
+              </a:spcBef>
+              <a:buClr>
+                <a:srgbClr val="000000"/>
+              </a:buClr>
+              <a:buFont typeface="Arial"/>
+              <a:buChar char="–"/>
+            </a:pPr>
+            <a:r>
+              <a:rPr lang="en-US" sz="1800" b="0" u="none" strike="noStrike">
+                <a:solidFill>
+                  <a:schemeClr val="dk1"/>
+                </a:solidFill>
+                <a:effectLst/>
+                <a:uFillTx/>
+                <a:latin typeface="Calibri"/>
+              </a:rPr>
+              <a:t>Fourth level</a:t>
+            </a:r>
+            <a:endParaRPr lang="en-US" sz="1800" b="0" u="none" strike="noStrike">
+              <a:solidFill>
+                <a:schemeClr val="dk1"/>
+              </a:solidFill>
+              <a:effectLst/>
+              <a:uFillTx/>
+              <a:latin typeface="Calibri"/>
+            </a:endParaRPr>
+          </a:p>
+          <a:p>
+            <a:pPr marL="2057400" lvl="4" indent="-228600" algn="l" defTabSz="457200">
+              <a:lnSpc>
+                <a:spcPct val="100000"/>
+              </a:lnSpc>
+              <a:spcBef>
+                <a:spcPts val="360"/>
+              </a:spcBef>
+              <a:buClr>
+                <a:srgbClr val="000000"/>
+              </a:buClr>
+              <a:buFont typeface="Arial"/>
+              <a:buChar char="»"/>
+            </a:pPr>
+            <a:r>
+              <a:rPr lang="en-US" sz="1800" b="0" u="none" strike="noStrike">
+                <a:solidFill>
+                  <a:schemeClr val="dk1"/>
+                </a:solidFill>
+                <a:effectLst/>
+                <a:uFillTx/>
+                <a:latin typeface="Calibri"/>
+              </a:rPr>
+              <a:t>Fifth level</a:t>
+            </a:r>
+            <a:endParaRPr lang="en-US" sz="1800" b="0" u="none" strike="noStrike">
+              <a:solidFill>
+                <a:schemeClr val="dk1"/>
+              </a:solidFill>
+              <a:effectLst/>
+              <a:uFillTx/>
+              <a:latin typeface="Calibri"/>
+            </a:endParaRPr>
+          </a:p>
+        </p:txBody>
+      </p:sp>
+      <p:sp>
+        <p:nvSpPr>
+          <p:cNvPr id="49" name="PlaceHolder 3"/>
+          <p:cNvSpPr>
+            <a:spLocks noGrp="1"/>
+          </p:cNvSpPr>
+          <p:nvPr>
+            <p:ph type="body"/>
+          </p:nvPr>
+        </p:nvSpPr>
+        <p:spPr>
+          <a:xfrm>
+            <a:off x="4648320" y="1600200"/>
+            <a:ext cx="4036320" cy="4523760"/>
+          </a:xfrm>
+          <a:prstGeom prst="rect">
+            <a:avLst/>
+          </a:prstGeom>
+          <a:noFill/>
+          <a:ln w="0">
+            <a:noFill/>
+          </a:ln>
+        </p:spPr>
+        <p:txBody>
+          <a:bodyPr lIns="91440" tIns="45720" rIns="91440" bIns="45720" anchor="t">
+            <a:noAutofit/>
+          </a:bodyPr>
+          <a:lstStyle>
+            <a:lvl1pPr algn="l" defTabSz="457200">
+              <a:lnSpc>
+                <a:spcPct val="100000"/>
+              </a:lnSpc>
+              <a:spcBef>
+                <a:spcPts val="561"/>
+              </a:spcBef>
+              <a:buClr>
+                <a:srgbClr val="000000"/>
+              </a:buClr>
+              <a:buFont typeface="Arial"/>
+              <a:buChar char="•"/>
+              <a:defRPr lang="en-US" sz="2800" b="0" u="none" strike="noStrike">
+                <a:solidFill>
+                  <a:schemeClr val="dk1"/>
+                </a:solidFill>
+                <a:effectLst/>
+                <a:uFillTx/>
+                <a:latin typeface="Calibri"/>
+              </a:defRPr>
+            </a:lvl1pPr>
+            <a:lvl2pPr lvl="1" algn="l" defTabSz="457200">
+              <a:lnSpc>
+                <a:spcPct val="100000"/>
+              </a:lnSpc>
+              <a:spcBef>
+                <a:spcPts val="479"/>
+              </a:spcBef>
+              <a:buClr>
+                <a:srgbClr val="000000"/>
+              </a:buClr>
+              <a:buFont typeface="Arial"/>
+              <a:buChar char="–"/>
+              <a:defRPr lang="en-US" sz="2400" b="0" u="none" strike="noStrike">
+                <a:solidFill>
+                  <a:schemeClr val="dk1"/>
+                </a:solidFill>
+                <a:effectLst/>
+                <a:uFillTx/>
+                <a:latin typeface="Calibri"/>
+              </a:defRPr>
+            </a:lvl2pPr>
+            <a:lvl3pPr lvl="2" algn="l" defTabSz="457200">
+              <a:lnSpc>
+                <a:spcPct val="100000"/>
+              </a:lnSpc>
+              <a:spcBef>
+                <a:spcPts val="400"/>
+              </a:spcBef>
+              <a:buClr>
+                <a:srgbClr val="000000"/>
+              </a:buClr>
+              <a:buFont typeface="Arial"/>
+              <a:buChar char="•"/>
+              <a:defRPr lang="en-US" sz="2000" b="0" u="none" strike="noStrike">
+                <a:solidFill>
+                  <a:schemeClr val="dk1"/>
+                </a:solidFill>
+                <a:effectLst/>
+                <a:uFillTx/>
+                <a:latin typeface="Calibri"/>
+              </a:defRPr>
+            </a:lvl3pPr>
+            <a:lvl4pPr lvl="3" algn="l" defTabSz="457200">
+              <a:lnSpc>
+                <a:spcPct val="100000"/>
+              </a:lnSpc>
+              <a:spcBef>
+                <a:spcPts val="360"/>
+              </a:spcBef>
+              <a:buClr>
+                <a:srgbClr val="000000"/>
+              </a:buClr>
+              <a:buFont typeface="Arial"/>
+              <a:buChar char="–"/>
+              <a:defRPr lang="en-US" sz="1800" b="0" u="none" strike="noStrike">
+                <a:solidFill>
+                  <a:schemeClr val="dk1"/>
+                </a:solidFill>
+                <a:effectLst/>
+                <a:uFillTx/>
+                <a:latin typeface="Calibri"/>
+              </a:defRPr>
+            </a:lvl4pPr>
+            <a:lvl5pPr lvl="4" algn="l" defTabSz="457200">
+              <a:lnSpc>
+                <a:spcPct val="100000"/>
+              </a:lnSpc>
+              <a:spcBef>
+                <a:spcPts val="360"/>
+              </a:spcBef>
+              <a:buClr>
+                <a:srgbClr val="000000"/>
+              </a:buClr>
+              <a:buFont typeface="Arial"/>
+              <a:buChar char="»"/>
+              <a:defRPr lang="en-US" sz="1800" b="0" u="none" strike="noStrike">
+                <a:solidFill>
+                  <a:schemeClr val="dk1"/>
+                </a:solidFill>
+                <a:effectLst/>
+                <a:uFillTx/>
+                <a:latin typeface="Calibri"/>
+              </a:defRPr>
+            </a:lvl5pPr>
+          </a:lstStyle>
+          <a:p>
+            <a:pPr marL="343080" indent="-343080" algn="l" defTabSz="457200">
+              <a:lnSpc>
+                <a:spcPct val="100000"/>
+              </a:lnSpc>
+              <a:spcBef>
+                <a:spcPts val="561"/>
+              </a:spcBef>
+              <a:buClr>
+                <a:srgbClr val="000000"/>
+              </a:buClr>
+              <a:buFont typeface="Arial"/>
+              <a:buChar char="•"/>
+            </a:pPr>
+            <a:r>
+              <a:rPr lang="en-US" sz="2800" b="0" u="none" strike="noStrike">
+                <a:solidFill>
+                  <a:schemeClr val="dk1"/>
+                </a:solidFill>
+                <a:effectLst/>
+                <a:uFillTx/>
+                <a:latin typeface="Calibri"/>
+              </a:rPr>
+              <a:t>Click to edit Master text styles</a:t>
+            </a:r>
+            <a:endParaRPr lang="en-US" sz="2800" b="0" u="none" strike="noStrike">
+              <a:solidFill>
+                <a:schemeClr val="dk1"/>
+              </a:solidFill>
+              <a:effectLst/>
+              <a:uFillTx/>
+              <a:latin typeface="Calibri"/>
+            </a:endParaRPr>
+          </a:p>
+          <a:p>
+            <a:pPr marL="743040" lvl="1" indent="-285840" algn="l" defTabSz="457200">
+              <a:lnSpc>
+                <a:spcPct val="100000"/>
+              </a:lnSpc>
+              <a:spcBef>
+                <a:spcPts val="479"/>
+              </a:spcBef>
+              <a:buClr>
+                <a:srgbClr val="000000"/>
+              </a:buClr>
+              <a:buFont typeface="Arial"/>
+              <a:buChar char="–"/>
+            </a:pPr>
+            <a:r>
+              <a:rPr lang="en-US" sz="2400" b="0" u="none" strike="noStrike">
+                <a:solidFill>
+                  <a:schemeClr val="dk1"/>
+                </a:solidFill>
+                <a:effectLst/>
+                <a:uFillTx/>
+                <a:latin typeface="Calibri"/>
+              </a:rPr>
+              <a:t>Second level</a:t>
+            </a:r>
+            <a:endParaRPr lang="en-US" sz="2400" b="0" u="none" strike="noStrike">
+              <a:solidFill>
+                <a:schemeClr val="dk1"/>
+              </a:solidFill>
+              <a:effectLst/>
+              <a:uFillTx/>
+              <a:latin typeface="Calibri"/>
+            </a:endParaRPr>
+          </a:p>
+          <a:p>
+            <a:pPr marL="1143000" lvl="2" indent="-228600" algn="l" defTabSz="457200">
+              <a:lnSpc>
+                <a:spcPct val="100000"/>
+              </a:lnSpc>
+              <a:spcBef>
+                <a:spcPts val="400"/>
+              </a:spcBef>
+              <a:buClr>
+                <a:srgbClr val="000000"/>
+              </a:buClr>
+              <a:buFont typeface="Arial"/>
+              <a:buChar char="•"/>
+            </a:pPr>
+            <a:r>
+              <a:rPr lang="en-US" sz="2000" b="0" u="none" strike="noStrike">
+                <a:solidFill>
+                  <a:schemeClr val="dk1"/>
+                </a:solidFill>
+                <a:effectLst/>
+                <a:uFillTx/>
+                <a:latin typeface="Calibri"/>
+              </a:rPr>
+              <a:t>Third level</a:t>
+            </a:r>
+            <a:endParaRPr lang="en-US" sz="2000" b="0" u="none" strike="noStrike">
+              <a:solidFill>
+                <a:schemeClr val="dk1"/>
+              </a:solidFill>
+              <a:effectLst/>
+              <a:uFillTx/>
+              <a:latin typeface="Calibri"/>
+            </a:endParaRPr>
+          </a:p>
+          <a:p>
+            <a:pPr marL="1600200" lvl="3" indent="-228600" algn="l" defTabSz="457200">
+              <a:lnSpc>
+                <a:spcPct val="100000"/>
+              </a:lnSpc>
+              <a:spcBef>
+                <a:spcPts val="360"/>
+              </a:spcBef>
+              <a:buClr>
+                <a:srgbClr val="000000"/>
+              </a:buClr>
+              <a:buFont typeface="Arial"/>
+              <a:buChar char="–"/>
+            </a:pPr>
+            <a:r>
+              <a:rPr lang="en-US" sz="1800" b="0" u="none" strike="noStrike">
+                <a:solidFill>
+                  <a:schemeClr val="dk1"/>
+                </a:solidFill>
+                <a:effectLst/>
+                <a:uFillTx/>
+                <a:latin typeface="Calibri"/>
+              </a:rPr>
+              <a:t>Fourth level</a:t>
+            </a:r>
+            <a:endParaRPr lang="en-US" sz="1800" b="0" u="none" strike="noStrike">
+              <a:solidFill>
+                <a:schemeClr val="dk1"/>
+              </a:solidFill>
+              <a:effectLst/>
+              <a:uFillTx/>
+              <a:latin typeface="Calibri"/>
+            </a:endParaRPr>
+          </a:p>
+          <a:p>
+            <a:pPr marL="2057400" lvl="4" indent="-228600" algn="l" defTabSz="457200">
+              <a:lnSpc>
+                <a:spcPct val="100000"/>
+              </a:lnSpc>
+              <a:spcBef>
+                <a:spcPts val="360"/>
+              </a:spcBef>
+              <a:buClr>
+                <a:srgbClr val="000000"/>
+              </a:buClr>
+              <a:buFont typeface="Arial"/>
+              <a:buChar char="»"/>
+            </a:pPr>
+            <a:r>
+              <a:rPr lang="en-US" sz="1800" b="0" u="none" strike="noStrike">
+                <a:solidFill>
+                  <a:schemeClr val="dk1"/>
+                </a:solidFill>
+                <a:effectLst/>
+                <a:uFillTx/>
+                <a:latin typeface="Calibri"/>
+              </a:rPr>
+              <a:t>Fifth level</a:t>
+            </a:r>
+            <a:endParaRPr lang="en-US" sz="1800" b="0" u="none" strike="noStrike">
+              <a:solidFill>
+                <a:schemeClr val="dk1"/>
+              </a:solidFill>
+              <a:effectLst/>
+              <a:uFillTx/>
+              <a:latin typeface="Calibri"/>
+            </a:endParaRPr>
+          </a:p>
+        </p:txBody>
+      </p:sp>
+      <p:sp>
+        <p:nvSpPr>
+          <p:cNvPr id="50" name="PlaceHolder 4"/>
+          <p:cNvSpPr>
+            <a:spLocks noGrp="1"/>
+          </p:cNvSpPr>
+          <p:nvPr>
+            <p:ph type="dt" idx="28"/>
+          </p:nvPr>
+        </p:nvSpPr>
+        <p:spPr>
+          <a:xfrm>
+            <a:off x="457200" y="6356520"/>
+            <a:ext cx="2131560" cy="362880"/>
+          </a:xfrm>
+          <a:prstGeom prst="rect">
+            <a:avLst/>
+          </a:prstGeom>
+          <a:noFill/>
+          <a:ln w="0">
+            <a:noFill/>
+          </a:ln>
+        </p:spPr>
+        <p:txBody>
+          <a:bodyPr lIns="91440" tIns="45720" rIns="91440" bIns="45720" anchor="ctr">
+            <a:noAutofit/>
+          </a:bodyPr>
+          <a:lstStyle>
+            <a:lvl1pPr indent="0" algn="l" defTabSz="457200">
+              <a:lnSpc>
+                <a:spcPct val="100000"/>
+              </a:lnSpc>
+              <a:buNone/>
+              <a:tabLst>
+                <a:tab pos="0" algn="l"/>
+              </a:tabLst>
+              <a:defRPr lang="en-US" sz="1200" b="0" u="none" strike="noStrike">
+                <a:solidFill>
+                  <a:schemeClr val="dk1">
+                    <a:tint val="75000"/>
+                  </a:schemeClr>
+                </a:solidFill>
+                <a:effectLst/>
+                <a:uFillTx/>
+                <a:latin typeface="Calibri"/>
+              </a:defRPr>
+            </a:lvl1pPr>
+          </a:lstStyle>
+          <a:p>
+            <a:pPr indent="0" algn="l" defTabSz="457200">
+              <a:lnSpc>
+                <a:spcPct val="100000"/>
+              </a:lnSpc>
+              <a:buNone/>
+              <a:tabLst>
+                <a:tab pos="0" algn="l"/>
+              </a:tabLst>
+            </a:pPr>
+            <a:r>
+              <a:rPr lang="en-US" sz="1200" b="0" u="none" strike="noStrike">
+                <a:solidFill>
+                  <a:schemeClr val="dk1">
+                    <a:tint val="75000"/>
+                  </a:schemeClr>
+                </a:solidFill>
+                <a:effectLst/>
+                <a:uFillTx/>
+                <a:latin typeface="Calibri"/>
+              </a:rPr>
+              <a:t>&lt;date/time&gt;</a:t>
+            </a:r>
+            <a:endParaRPr lang="en-US" sz="1200" b="0" u="none" strike="noStrike">
+              <a:solidFill>
+                <a:srgbClr val="000000"/>
+              </a:solidFill>
+              <a:effectLst/>
+              <a:uFillTx/>
+              <a:latin typeface="Times New Roman"/>
+            </a:endParaRPr>
+          </a:p>
+        </p:txBody>
+      </p:sp>
+      <p:sp>
+        <p:nvSpPr>
+          <p:cNvPr id="51" name="PlaceHolder 5"/>
+          <p:cNvSpPr>
+            <a:spLocks noGrp="1"/>
+          </p:cNvSpPr>
+          <p:nvPr>
+            <p:ph type="ftr" idx="29"/>
+          </p:nvPr>
+        </p:nvSpPr>
+        <p:spPr>
+          <a:xfrm>
+            <a:off x="3124080" y="6356520"/>
+            <a:ext cx="2893320" cy="362880"/>
+          </a:xfrm>
+          <a:prstGeom prst="rect">
+            <a:avLst/>
+          </a:prstGeom>
+          <a:noFill/>
+          <a:ln w="0">
+            <a:noFill/>
+          </a:ln>
+        </p:spPr>
+        <p:txBody>
+          <a:bodyPr lIns="91440" tIns="45720" rIns="91440" bIns="45720" anchor="ctr">
+            <a:noAutofit/>
+          </a:bodyPr>
+          <a:lstStyle>
+            <a:lvl1pPr indent="0" algn="ctr">
+              <a:lnSpc>
+                <a:spcPct val="100000"/>
+              </a:lnSpc>
+              <a:buNone/>
+              <a:tabLst>
+                <a:tab pos="0" algn="l"/>
+              </a:tabLst>
+              <a:defRPr lang="en-US" sz="1400" b="0" u="none" strike="noStrike">
+                <a:solidFill>
+                  <a:srgbClr val="000000"/>
+                </a:solidFill>
+                <a:effectLst/>
+                <a:uFillTx/>
+                <a:latin typeface="Times New Roman"/>
+              </a:defRPr>
+            </a:lvl1pPr>
+          </a:lstStyle>
+          <a:p>
+            <a:pPr indent="0" algn="ctr">
+              <a:lnSpc>
+                <a:spcPct val="100000"/>
+              </a:lnSpc>
+              <a:buNone/>
+              <a:tabLst>
+                <a:tab pos="0" algn="l"/>
+              </a:tabLst>
+            </a:pPr>
+            <a:r>
+              <a:rPr lang="en-US" sz="1400" b="0" u="none" strike="noStrike">
+                <a:solidFill>
+                  <a:srgbClr val="000000"/>
+                </a:solidFill>
+                <a:effectLst/>
+                <a:uFillTx/>
+                <a:latin typeface="Times New Roman"/>
+              </a:rPr>
+              <a:t>&lt;footer&gt;</a:t>
+            </a:r>
+            <a:endParaRPr lang="en-US" sz="1400" b="0" u="none" strike="noStrike">
+              <a:solidFill>
+                <a:srgbClr val="000000"/>
+              </a:solidFill>
+              <a:effectLst/>
+              <a:uFillTx/>
+              <a:latin typeface="Times New Roman"/>
+            </a:endParaRPr>
+          </a:p>
+        </p:txBody>
+      </p:sp>
+      <p:sp>
+        <p:nvSpPr>
+          <p:cNvPr id="52" name="PlaceHolder 6"/>
+          <p:cNvSpPr>
+            <a:spLocks noGrp="1"/>
+          </p:cNvSpPr>
+          <p:nvPr>
+            <p:ph type="sldNum" idx="30"/>
+          </p:nvPr>
+        </p:nvSpPr>
+        <p:spPr>
+          <a:xfrm>
+            <a:off x="6553080" y="6356520"/>
+            <a:ext cx="2131560" cy="362880"/>
+          </a:xfrm>
+          <a:prstGeom prst="rect">
+            <a:avLst/>
+          </a:prstGeom>
+          <a:noFill/>
+          <a:ln w="0">
+            <a:noFill/>
+          </a:ln>
+        </p:spPr>
+        <p:txBody>
+          <a:bodyPr lIns="91440" tIns="45720" rIns="91440" bIns="45720" anchor="ctr">
+            <a:noAutofit/>
+          </a:bodyPr>
+          <a:lstStyle>
+            <a:lvl1pPr indent="0" algn="r" defTabSz="457200">
+              <a:lnSpc>
+                <a:spcPct val="100000"/>
+              </a:lnSpc>
+              <a:buNone/>
+              <a:tabLst>
+                <a:tab pos="0" algn="l"/>
+              </a:tabLst>
+              <a:defRPr lang="en-US" sz="1200" b="0" u="none" strike="noStrike">
+                <a:solidFill>
+                  <a:schemeClr val="dk1">
+                    <a:tint val="75000"/>
+                  </a:schemeClr>
+                </a:solidFill>
+                <a:effectLst/>
+                <a:uFillTx/>
+                <a:latin typeface="Calibri"/>
+              </a:defRPr>
+            </a:lvl1pPr>
+          </a:lstStyle>
+          <a:p>
+            <a:pPr indent="0" algn="r" defTabSz="457200">
+              <a:lnSpc>
+                <a:spcPct val="100000"/>
+              </a:lnSpc>
+              <a:buNone/>
+              <a:tabLst>
+                <a:tab pos="0" algn="l"/>
+              </a:tabLst>
+            </a:pPr>
+            <a:fld id="{BB8613E0-4B68-4323-9BA6-34FBD1C9F73F}" type="slidenum">
+              <a:rPr lang="en-US" sz="1200" b="0" u="none" strike="noStrike">
+                <a:solidFill>
+                  <a:schemeClr val="dk1">
+                    <a:tint val="75000"/>
+                  </a:schemeClr>
+                </a:solidFill>
+                <a:effectLst/>
+                <a:uFillTx/>
+                <a:latin typeface="Calibri"/>
+              </a:rPr>
+              <a:t>&lt;number&gt;</a:t>
+            </a:fld>
+            <a:endParaRPr lang="en-US" sz="1200" b="0" u="none" strike="noStrike">
+              <a:solidFill>
+                <a:srgbClr val="000000"/>
+              </a:solidFill>
+              <a:effectLst/>
+              <a:uFillTx/>
+              <a:latin typeface="Times New Roman"/>
+            </a:endParaRPr>
+          </a:p>
+        </p:txBody>
+      </p:sp>
+    </p:spTree>
+  </p:cSld>
+</p:sldLayout>
+</file>
+
+<file path=ppt/slideLayouts/slideLayout11.xml><?xml version="1.0" encoding="utf-8"?>
+<p:sldLayout xmlns:a="http://schemas.openxmlformats.org/drawingml/2006/main" xmlns:p="http://schemas.openxmlformats.org/presentationml/2006/main" xmlns:r="http://schemas.openxmlformats.org/officeDocument/2006/relationships" xmlns:p14="http://schemas.microsoft.com/office/powerpoint/2010/main" xmlns:p15="http://schemas.microsoft.com/office/powerpoint/2012/main" xmlns:mc="http://schemas.openxmlformats.org/markup-compatibility/2006" type="blank" preserve="1">
+  <p:cSld name="Comparison">
+    <p:bg>
+      <p:bgPr>
+        <a:solidFill>
+          <a:srgbClr val="FFFFFF"/>
+        </a:solidFill>
+      </p:bgPr>
+    </p:bg>
+    <p:spTree>
+      <p:nvGrpSpPr>
+        <p:cNvPr id="1" name=""/>
+        <p:cNvGrpSpPr/>
+        <p:nvPr/>
+      </p:nvGrpSpPr>
+      <p:grpSpPr>
+        <a:xfrm>
+          <a:off x="0" y="0"/>
+          <a:ext cx="0" cy="0"/>
+          <a:chOff x="0" y="0"/>
+          <a:chExt cx="0" cy="0"/>
+        </a:xfrm>
+      </p:grpSpPr>
+      <p:sp>
+        <p:nvSpPr>
+          <p:cNvPr id="53" name="PlaceHolder 1"/>
+          <p:cNvSpPr>
+            <a:spLocks noGrp="1"/>
+          </p:cNvSpPr>
+          <p:nvPr>
+            <p:ph type="title"/>
+          </p:nvPr>
+        </p:nvSpPr>
+        <p:spPr>
+          <a:xfrm>
+            <a:off x="457200" y="274680"/>
+            <a:ext cx="8227440" cy="1140840"/>
+          </a:xfrm>
+          <a:prstGeom prst="rect">
+            <a:avLst/>
+          </a:prstGeom>
+          <a:noFill/>
+          <a:ln w="0">
+            <a:noFill/>
+          </a:ln>
+        </p:spPr>
+        <p:txBody>
+          <a:bodyPr lIns="91440" tIns="45720" rIns="91440" bIns="45720" anchor="ctr">
+            <a:noAutofit/>
+          </a:bodyPr>
+          <a:lstStyle>
+            <a:lvl1pPr indent="0" algn="ctr" defTabSz="457200">
+              <a:lnSpc>
+                <a:spcPct val="100000"/>
+              </a:lnSpc>
+              <a:buNone/>
+              <a:tabLst>
+                <a:tab pos="0" algn="l"/>
+              </a:tabLst>
+              <a:defRPr lang="en-US" sz="4400" b="0" u="none" strike="noStrike">
+                <a:solidFill>
+                  <a:schemeClr val="dk1"/>
+                </a:solidFill>
+                <a:effectLst/>
+                <a:uFillTx/>
+                <a:latin typeface="Calibri"/>
+              </a:defRPr>
+            </a:lvl1pPr>
+          </a:lstStyle>
+          <a:p>
+            <a:pPr indent="0" algn="ctr" defTabSz="457200">
+              <a:lnSpc>
+                <a:spcPct val="100000"/>
+              </a:lnSpc>
+              <a:buNone/>
+              <a:tabLst>
+                <a:tab pos="0" algn="l"/>
+              </a:tabLst>
+            </a:pPr>
+            <a:r>
+              <a:rPr lang="en-US" sz="4400" b="0" u="none" strike="noStrike">
+                <a:solidFill>
+                  <a:schemeClr val="dk1"/>
+                </a:solidFill>
+                <a:effectLst/>
+                <a:uFillTx/>
+                <a:latin typeface="Calibri"/>
+              </a:rPr>
+              <a:t>Click to edit Master title style</a:t>
+            </a:r>
+            <a:endParaRPr lang="en-US" sz="4400" b="0" u="none" strike="noStrike">
+              <a:solidFill>
+                <a:schemeClr val="dk1"/>
+              </a:solidFill>
+              <a:effectLst/>
+              <a:uFillTx/>
+              <a:latin typeface="Calibri"/>
+            </a:endParaRPr>
+          </a:p>
+        </p:txBody>
+      </p:sp>
+      <p:sp>
+        <p:nvSpPr>
+          <p:cNvPr id="54" name="PlaceHolder 2"/>
+          <p:cNvSpPr>
+            <a:spLocks noGrp="1"/>
+          </p:cNvSpPr>
+          <p:nvPr>
+            <p:ph type="body"/>
+          </p:nvPr>
+        </p:nvSpPr>
+        <p:spPr>
+          <a:xfrm>
+            <a:off x="457200" y="1535040"/>
+            <a:ext cx="4038120" cy="637560"/>
           </a:xfrm>
           <a:prstGeom prst="rect">
             <a:avLst/>
@@ -93,11 +1481,14 @@
               <a:lnSpc>
                 <a:spcPct val="100000"/>
               </a:lnSpc>
+              <a:spcBef>
+                <a:spcPts val="479"/>
+              </a:spcBef>
               <a:buNone/>
               <a:tabLst>
                 <a:tab pos="0" algn="l"/>
               </a:tabLst>
-              <a:defRPr lang="en-US" sz="2000" b="1" u="none" strike="noStrike">
+              <a:defRPr lang="en-US" sz="2400" b="1" u="none" strike="noStrike">
                 <a:solidFill>
                   <a:schemeClr val="dk1"/>
                 </a:solidFill>
@@ -112,13 +1503,16 @@
               <a:lnSpc>
                 <a:spcPct val="100000"/>
               </a:lnSpc>
+              <a:spcBef>
+                <a:spcPts val="479"/>
+              </a:spcBef>
               <a:buNone/>
               <a:tabLst>
                 <a:tab pos="0" algn="l"/>
               </a:tabLst>
             </a:pPr>
             <a:r>
-              <a:rPr lang="en-US" sz="2000" b="1" u="none" strike="noStrike">
+              <a:rPr lang="en-US" sz="2400" b="1" u="none" strike="noStrike">
                 <a:solidFill>
                   <a:schemeClr val="dk1"/>
                 </a:solidFill>
@@ -126,9 +1520,9 @@
                 <a:uFillTx/>
                 <a:latin typeface="Calibri"/>
               </a:rPr>
-              <a:t>Click to edit Master title style</a:t>
-            </a:r>
-            <a:endParaRPr lang="en-US" sz="2000" b="1" u="none" strike="noStrike">
+              <a:t>Click to edit Master text styles</a:t>
+            </a:r>
+            <a:endParaRPr lang="en-US" sz="2400" b="0" u="none" strike="noStrike">
               <a:solidFill>
                 <a:schemeClr val="dk1"/>
               </a:solidFill>
@@ -141,7 +1535,7 @@
       </p:sp>
       <p:sp>
         <p:nvSpPr>
-          <p:cNvPr id="3" name="PlaceHolder 2"/>
+          <p:cNvPr id="55" name="PlaceHolder 3"/>
           <p:cNvSpPr>
             <a:spLocks noGrp="1"/>
           </p:cNvSpPr>
@@ -151,478 +1545,8 @@
         </p:nvSpPr>
         <p:spPr>
           <a:xfrm>
-            <a:off x="1792440" y="612720"/>
-            <a:ext cx="5484600" cy="4113000"/>
-          </a:xfrm>
-          <a:prstGeom prst="rect">
-            <a:avLst/>
-          </a:prstGeom>
-          <a:noFill/>
-          <a:ln w="0">
-            <a:noFill/>
-          </a:ln>
-        </p:spPr>
-        <p:txBody>
-          <a:bodyPr lIns="90000" tIns="45000" rIns="90000" bIns="45000" anchor="t">
-            <a:noAutofit/>
-          </a:bodyPr>
-          <a:lstStyle>
-            <a:lvl1pPr algn="l" defTabSz="457200">
-              <a:lnSpc>
-                <a:spcPct val="100000"/>
-              </a:lnSpc>
-              <a:spcBef>
-                <a:spcPts val="281"/>
-              </a:spcBef>
-              <a:buClr>
-                <a:srgbClr val="000000"/>
-              </a:buClr>
-              <a:buFont typeface="Arial"/>
-              <a:buChar char="•"/>
-              <a:tabLst>
-                <a:tab pos="0" algn="l"/>
-              </a:tabLst>
-              <a:defRPr lang="en-US" sz="3200" b="0" u="none" strike="noStrike">
-                <a:solidFill>
-                  <a:schemeClr val="dk1"/>
-                </a:solidFill>
-                <a:effectLst/>
-                <a:uFillTx/>
-                <a:latin typeface="Calibri"/>
-              </a:defRPr>
-            </a:lvl1pPr>
-            <a:lvl2pPr lvl="1" algn="l" defTabSz="457200">
-              <a:lnSpc>
-                <a:spcPct val="100000"/>
-              </a:lnSpc>
-              <a:spcBef>
-                <a:spcPts val="561"/>
-              </a:spcBef>
-              <a:buClr>
-                <a:srgbClr val="000000"/>
-              </a:buClr>
-              <a:buSzPct val="75000"/>
-              <a:buFont typeface="Symbol" charset="2"/>
-              <a:buChar char=""/>
-              <a:tabLst>
-                <a:tab pos="0" algn="l"/>
-              </a:tabLst>
-              <a:defRPr lang="en-US" sz="3200" b="0" u="none" strike="noStrike">
-                <a:solidFill>
-                  <a:schemeClr val="dk1"/>
-                </a:solidFill>
-                <a:effectLst/>
-                <a:uFillTx/>
-                <a:latin typeface="Calibri"/>
-              </a:defRPr>
-            </a:lvl2pPr>
-            <a:lvl3pPr lvl="2" algn="l" defTabSz="457200">
-              <a:lnSpc>
-                <a:spcPct val="100000"/>
-              </a:lnSpc>
-              <a:spcBef>
-                <a:spcPts val="479"/>
-              </a:spcBef>
-              <a:buClr>
-                <a:srgbClr val="000000"/>
-              </a:buClr>
-              <a:buSzPct val="45000"/>
-              <a:buFont typeface="Wingdings" charset="2"/>
-              <a:buChar char=""/>
-              <a:tabLst>
-                <a:tab pos="0" algn="l"/>
-              </a:tabLst>
-              <a:defRPr lang="en-US" sz="3200" b="0" u="none" strike="noStrike">
-                <a:solidFill>
-                  <a:schemeClr val="dk1"/>
-                </a:solidFill>
-                <a:effectLst/>
-                <a:uFillTx/>
-                <a:latin typeface="Calibri"/>
-              </a:defRPr>
-            </a:lvl3pPr>
-            <a:lvl4pPr lvl="3" algn="l" defTabSz="457200">
-              <a:lnSpc>
-                <a:spcPct val="100000"/>
-              </a:lnSpc>
-              <a:spcBef>
-                <a:spcPts val="400"/>
-              </a:spcBef>
-              <a:buClr>
-                <a:srgbClr val="000000"/>
-              </a:buClr>
-              <a:buSzPct val="75000"/>
-              <a:buFont typeface="Symbol" charset="2"/>
-              <a:buChar char=""/>
-              <a:tabLst>
-                <a:tab pos="0" algn="l"/>
-              </a:tabLst>
-              <a:defRPr lang="en-US" sz="3200" b="0" u="none" strike="noStrike">
-                <a:solidFill>
-                  <a:schemeClr val="dk1"/>
-                </a:solidFill>
-                <a:effectLst/>
-                <a:uFillTx/>
-                <a:latin typeface="Calibri"/>
-              </a:defRPr>
-            </a:lvl4pPr>
-            <a:lvl5pPr lvl="4" algn="l" defTabSz="457200">
-              <a:lnSpc>
-                <a:spcPct val="100000"/>
-              </a:lnSpc>
-              <a:spcBef>
-                <a:spcPts val="400"/>
-              </a:spcBef>
-              <a:buClr>
-                <a:srgbClr val="000000"/>
-              </a:buClr>
-              <a:buSzPct val="45000"/>
-              <a:buFont typeface="Wingdings" charset="2"/>
-              <a:buChar char=""/>
-              <a:tabLst>
-                <a:tab pos="0" algn="l"/>
-              </a:tabLst>
-              <a:defRPr lang="en-US" sz="3200" b="0" u="none" strike="noStrike">
-                <a:solidFill>
-                  <a:schemeClr val="dk1"/>
-                </a:solidFill>
-                <a:effectLst/>
-                <a:uFillTx/>
-                <a:latin typeface="Calibri"/>
-              </a:defRPr>
-            </a:lvl5pPr>
-            <a:lvl6pPr lvl="5" algn="l" defTabSz="457200">
-              <a:lnSpc>
-                <a:spcPct val="100000"/>
-              </a:lnSpc>
-              <a:spcBef>
-                <a:spcPts val="283"/>
-              </a:spcBef>
-              <a:buClr>
-                <a:srgbClr val="000000"/>
-              </a:buClr>
-              <a:buSzPct val="45000"/>
-              <a:buFont typeface="Wingdings" charset="2"/>
-              <a:buChar char=""/>
-              <a:tabLst>
-                <a:tab pos="0" algn="l"/>
-              </a:tabLst>
-              <a:defRPr lang="en-US" sz="3200" b="0" u="none" strike="noStrike">
-                <a:solidFill>
-                  <a:schemeClr val="dk1"/>
-                </a:solidFill>
-                <a:effectLst/>
-                <a:uFillTx/>
-                <a:latin typeface="Calibri"/>
-              </a:defRPr>
-            </a:lvl6pPr>
-            <a:lvl7pPr lvl="6" algn="l" defTabSz="457200">
-              <a:lnSpc>
-                <a:spcPct val="100000"/>
-              </a:lnSpc>
-              <a:spcBef>
-                <a:spcPts val="283"/>
-              </a:spcBef>
-              <a:buClr>
-                <a:srgbClr val="000000"/>
-              </a:buClr>
-              <a:buSzPct val="45000"/>
-              <a:buFont typeface="Wingdings" charset="2"/>
-              <a:buChar char=""/>
-              <a:tabLst>
-                <a:tab pos="0" algn="l"/>
-              </a:tabLst>
-              <a:defRPr lang="en-US" sz="3200" b="0" u="none" strike="noStrike">
-                <a:solidFill>
-                  <a:schemeClr val="dk1"/>
-                </a:solidFill>
-                <a:effectLst/>
-                <a:uFillTx/>
-                <a:latin typeface="Calibri"/>
-              </a:defRPr>
-            </a:lvl7pPr>
-          </a:lstStyle>
-          <a:p>
-            <a:pPr marL="432000" indent="-324000" algn="l" defTabSz="457200">
-              <a:lnSpc>
-                <a:spcPct val="100000"/>
-              </a:lnSpc>
-              <a:spcBef>
-                <a:spcPts val="281"/>
-              </a:spcBef>
-              <a:buClr>
-                <a:srgbClr val="000000"/>
-              </a:buClr>
-              <a:buFont typeface="Arial"/>
-              <a:buChar char="•"/>
-              <a:tabLst>
-                <a:tab pos="0" algn="l"/>
-              </a:tabLst>
-            </a:pPr>
-            <a:r>
-              <a:rPr lang="en-US" sz="3200" b="0" u="none" strike="noStrike">
-                <a:solidFill>
-                  <a:schemeClr val="dk1"/>
-                </a:solidFill>
-                <a:effectLst/>
-                <a:uFillTx/>
-                <a:latin typeface="Calibri"/>
-              </a:rPr>
-              <a:t>Click to edit the outline text format</a:t>
-            </a:r>
-            <a:endParaRPr lang="en-US" sz="3200" b="0" u="none" strike="noStrike">
-              <a:solidFill>
-                <a:schemeClr val="dk1"/>
-              </a:solidFill>
-              <a:effectLst/>
-              <a:uFillTx/>
-              <a:latin typeface="Calibri"/>
-            </a:endParaRPr>
-          </a:p>
-          <a:p>
-            <a:pPr marL="457200" lvl="1" indent="-324000" algn="l" defTabSz="457200">
-              <a:lnSpc>
-                <a:spcPct val="100000"/>
-              </a:lnSpc>
-              <a:spcBef>
-                <a:spcPts val="561"/>
-              </a:spcBef>
-              <a:buClr>
-                <a:srgbClr val="000000"/>
-              </a:buClr>
-              <a:buSzPct val="75000"/>
-              <a:buFont typeface="Symbol" charset="2"/>
-              <a:buChar char=""/>
-              <a:tabLst>
-                <a:tab pos="0" algn="l"/>
-              </a:tabLst>
-            </a:pPr>
-            <a:r>
-              <a:rPr lang="en-US" sz="3200" b="0" u="none" strike="noStrike">
-                <a:solidFill>
-                  <a:schemeClr val="dk1"/>
-                </a:solidFill>
-                <a:effectLst/>
-                <a:uFillTx/>
-                <a:latin typeface="Calibri"/>
-              </a:rPr>
-              <a:t>Second Outline Level</a:t>
-            </a:r>
-            <a:endParaRPr lang="en-US" sz="3200" b="0" u="none" strike="noStrike">
-              <a:solidFill>
-                <a:schemeClr val="dk1"/>
-              </a:solidFill>
-              <a:effectLst/>
-              <a:uFillTx/>
-              <a:latin typeface="Calibri"/>
-            </a:endParaRPr>
-          </a:p>
-          <a:p>
-            <a:pPr marL="914400" lvl="2" indent="-288000" algn="l" defTabSz="457200">
-              <a:lnSpc>
-                <a:spcPct val="100000"/>
-              </a:lnSpc>
-              <a:spcBef>
-                <a:spcPts val="479"/>
-              </a:spcBef>
-              <a:buClr>
-                <a:srgbClr val="000000"/>
-              </a:buClr>
-              <a:buSzPct val="45000"/>
-              <a:buFont typeface="Wingdings" charset="2"/>
-              <a:buChar char=""/>
-              <a:tabLst>
-                <a:tab pos="0" algn="l"/>
-              </a:tabLst>
-            </a:pPr>
-            <a:r>
-              <a:rPr lang="en-US" sz="3200" b="0" u="none" strike="noStrike">
-                <a:solidFill>
-                  <a:schemeClr val="dk1"/>
-                </a:solidFill>
-                <a:effectLst/>
-                <a:uFillTx/>
-                <a:latin typeface="Calibri"/>
-              </a:rPr>
-              <a:t>Third Outline Level</a:t>
-            </a:r>
-            <a:endParaRPr lang="en-US" sz="3200" b="0" u="none" strike="noStrike">
-              <a:solidFill>
-                <a:schemeClr val="dk1"/>
-              </a:solidFill>
-              <a:effectLst/>
-              <a:uFillTx/>
-              <a:latin typeface="Calibri"/>
-            </a:endParaRPr>
-          </a:p>
-          <a:p>
-            <a:pPr marL="1371600" lvl="3" indent="-216000" algn="l" defTabSz="457200">
-              <a:lnSpc>
-                <a:spcPct val="100000"/>
-              </a:lnSpc>
-              <a:spcBef>
-                <a:spcPts val="400"/>
-              </a:spcBef>
-              <a:buClr>
-                <a:srgbClr val="000000"/>
-              </a:buClr>
-              <a:buSzPct val="75000"/>
-              <a:buFont typeface="Symbol" charset="2"/>
-              <a:buChar char=""/>
-              <a:tabLst>
-                <a:tab pos="0" algn="l"/>
-              </a:tabLst>
-            </a:pPr>
-            <a:r>
-              <a:rPr lang="en-US" sz="3200" b="0" u="none" strike="noStrike">
-                <a:solidFill>
-                  <a:schemeClr val="dk1"/>
-                </a:solidFill>
-                <a:effectLst/>
-                <a:uFillTx/>
-                <a:latin typeface="Calibri"/>
-              </a:rPr>
-              <a:t>Fourth Outline Level</a:t>
-            </a:r>
-            <a:endParaRPr lang="en-US" sz="3200" b="0" u="none" strike="noStrike">
-              <a:solidFill>
-                <a:schemeClr val="dk1"/>
-              </a:solidFill>
-              <a:effectLst/>
-              <a:uFillTx/>
-              <a:latin typeface="Calibri"/>
-            </a:endParaRPr>
-          </a:p>
-          <a:p>
-            <a:pPr marL="1828800" lvl="4" indent="-216000" algn="l" defTabSz="457200">
-              <a:lnSpc>
-                <a:spcPct val="100000"/>
-              </a:lnSpc>
-              <a:spcBef>
-                <a:spcPts val="400"/>
-              </a:spcBef>
-              <a:buClr>
-                <a:srgbClr val="000000"/>
-              </a:buClr>
-              <a:buSzPct val="45000"/>
-              <a:buFont typeface="Wingdings" charset="2"/>
-              <a:buChar char=""/>
-              <a:tabLst>
-                <a:tab pos="0" algn="l"/>
-              </a:tabLst>
-            </a:pPr>
-            <a:r>
-              <a:rPr lang="en-US" sz="3200" b="0" u="none" strike="noStrike">
-                <a:solidFill>
-                  <a:schemeClr val="dk1"/>
-                </a:solidFill>
-                <a:effectLst/>
-                <a:uFillTx/>
-                <a:latin typeface="Calibri"/>
-              </a:rPr>
-              <a:t>Fifth Outline Level</a:t>
-            </a:r>
-            <a:endParaRPr lang="en-US" sz="3200" b="0" u="none" strike="noStrike">
-              <a:solidFill>
-                <a:schemeClr val="dk1"/>
-              </a:solidFill>
-              <a:effectLst/>
-              <a:uFillTx/>
-              <a:latin typeface="Calibri"/>
-            </a:endParaRPr>
-          </a:p>
-          <a:p>
-            <a:pPr marL="2286000" lvl="5" indent="-216000" algn="l" defTabSz="457200">
-              <a:lnSpc>
-                <a:spcPct val="100000"/>
-              </a:lnSpc>
-              <a:spcBef>
-                <a:spcPts val="283"/>
-              </a:spcBef>
-              <a:buClr>
-                <a:srgbClr val="000000"/>
-              </a:buClr>
-              <a:buSzPct val="45000"/>
-              <a:buFont typeface="Wingdings" charset="2"/>
-              <a:buChar char=""/>
-              <a:tabLst>
-                <a:tab pos="0" algn="l"/>
-              </a:tabLst>
-            </a:pPr>
-            <a:r>
-              <a:rPr lang="en-US" sz="3200" b="0" u="none" strike="noStrike">
-                <a:solidFill>
-                  <a:schemeClr val="dk1"/>
-                </a:solidFill>
-                <a:effectLst/>
-                <a:uFillTx/>
-                <a:latin typeface="Calibri"/>
-              </a:rPr>
-              <a:t>Sixth Outline Level</a:t>
-            </a:r>
-            <a:endParaRPr lang="en-US" sz="3200" b="0" u="none" strike="noStrike">
-              <a:solidFill>
-                <a:schemeClr val="dk1"/>
-              </a:solidFill>
-              <a:effectLst/>
-              <a:uFillTx/>
-              <a:latin typeface="Calibri"/>
-            </a:endParaRPr>
-          </a:p>
-          <a:p>
-            <a:pPr marL="2743200" lvl="6" indent="-216000" algn="l" defTabSz="457200">
-              <a:lnSpc>
-                <a:spcPct val="100000"/>
-              </a:lnSpc>
-              <a:spcBef>
-                <a:spcPts val="283"/>
-              </a:spcBef>
-              <a:buClr>
-                <a:srgbClr val="000000"/>
-              </a:buClr>
-              <a:buSzPct val="45000"/>
-              <a:buFont typeface="Wingdings" charset="2"/>
-              <a:buChar char=""/>
-              <a:tabLst>
-                <a:tab pos="0" algn="l"/>
-              </a:tabLst>
-            </a:pPr>
-            <a:r>
-              <a:rPr lang="en-US" sz="3200" b="0" u="none" strike="noStrike">
-                <a:solidFill>
-                  <a:schemeClr val="dk1"/>
-                </a:solidFill>
-                <a:effectLst/>
-                <a:uFillTx/>
-                <a:latin typeface="Calibri"/>
-              </a:rPr>
-              <a:t>Seventh Outline Level</a:t>
-            </a:r>
-            <a:endParaRPr lang="en-US" sz="3200" b="0" u="none" strike="noStrike">
-              <a:solidFill>
-                <a:schemeClr val="dk1"/>
-              </a:solidFill>
-              <a:effectLst/>
-              <a:uFillTx/>
-              <a:latin typeface="Calibri"/>
-            </a:endParaRPr>
-          </a:p>
-        </p:txBody>
-      </p:sp>
-      <p:sp>
-        <p:nvSpPr>
-          <p:cNvPr id="4" name="PlaceHolder 3"/>
-          <p:cNvSpPr>
-            <a:spLocks noGrp="1"/>
-          </p:cNvSpPr>
-          <p:nvPr>
-            <p:ph type="body"/>
-          </p:nvPr>
-        </p:nvSpPr>
-        <p:spPr>
-          <a:xfrm>
-            <a:off x="1792440" y="5367240"/>
-            <a:ext cx="5484600" cy="803160"/>
+            <a:off x="457200" y="2174760"/>
+            <a:ext cx="4038120" cy="3949200"/>
           </a:xfrm>
           <a:prstGeom prst="rect">
             <a:avLst/>
@@ -637,18 +1561,354 @@
             <a:noAutofit/>
           </a:bodyPr>
           <a:lstStyle>
+            <a:lvl1pPr algn="l" defTabSz="457200">
+              <a:lnSpc>
+                <a:spcPct val="100000"/>
+              </a:lnSpc>
+              <a:spcBef>
+                <a:spcPts val="479"/>
+              </a:spcBef>
+              <a:buClr>
+                <a:srgbClr val="000000"/>
+              </a:buClr>
+              <a:buFont typeface="Arial"/>
+              <a:buChar char="•"/>
+              <a:tabLst>
+                <a:tab pos="0" algn="l"/>
+              </a:tabLst>
+              <a:defRPr lang="en-US" sz="2400" b="0" u="none" strike="noStrike">
+                <a:solidFill>
+                  <a:schemeClr val="dk1"/>
+                </a:solidFill>
+                <a:effectLst/>
+                <a:uFillTx/>
+                <a:latin typeface="Calibri"/>
+              </a:defRPr>
+            </a:lvl1pPr>
+            <a:lvl2pPr lvl="1" algn="l" defTabSz="457200">
+              <a:lnSpc>
+                <a:spcPct val="100000"/>
+              </a:lnSpc>
+              <a:spcBef>
+                <a:spcPts val="400"/>
+              </a:spcBef>
+              <a:buClr>
+                <a:srgbClr val="000000"/>
+              </a:buClr>
+              <a:buFont typeface="Arial"/>
+              <a:buChar char="–"/>
+              <a:tabLst>
+                <a:tab pos="0" algn="l"/>
+              </a:tabLst>
+              <a:defRPr lang="en-US" sz="2000" b="0" u="none" strike="noStrike">
+                <a:solidFill>
+                  <a:schemeClr val="dk1"/>
+                </a:solidFill>
+                <a:effectLst/>
+                <a:uFillTx/>
+                <a:latin typeface="Calibri"/>
+              </a:defRPr>
+            </a:lvl2pPr>
+            <a:lvl3pPr lvl="2" algn="l" defTabSz="457200">
+              <a:lnSpc>
+                <a:spcPct val="100000"/>
+              </a:lnSpc>
+              <a:spcBef>
+                <a:spcPts val="360"/>
+              </a:spcBef>
+              <a:buClr>
+                <a:srgbClr val="000000"/>
+              </a:buClr>
+              <a:buFont typeface="Arial"/>
+              <a:buChar char="•"/>
+              <a:tabLst>
+                <a:tab pos="0" algn="l"/>
+              </a:tabLst>
+              <a:defRPr lang="en-US" sz="1800" b="0" u="none" strike="noStrike">
+                <a:solidFill>
+                  <a:schemeClr val="dk1"/>
+                </a:solidFill>
+                <a:effectLst/>
+                <a:uFillTx/>
+                <a:latin typeface="Calibri"/>
+              </a:defRPr>
+            </a:lvl3pPr>
+            <a:lvl4pPr lvl="3" algn="l" defTabSz="457200">
+              <a:lnSpc>
+                <a:spcPct val="100000"/>
+              </a:lnSpc>
+              <a:spcBef>
+                <a:spcPts val="320"/>
+              </a:spcBef>
+              <a:buClr>
+                <a:srgbClr val="000000"/>
+              </a:buClr>
+              <a:buFont typeface="Arial"/>
+              <a:buChar char="–"/>
+              <a:tabLst>
+                <a:tab pos="0" algn="l"/>
+              </a:tabLst>
+              <a:defRPr lang="en-US" sz="1600" b="0" u="none" strike="noStrike">
+                <a:solidFill>
+                  <a:schemeClr val="dk1"/>
+                </a:solidFill>
+                <a:effectLst/>
+                <a:uFillTx/>
+                <a:latin typeface="Calibri"/>
+              </a:defRPr>
+            </a:lvl4pPr>
+            <a:lvl5pPr lvl="4" algn="l" defTabSz="457200">
+              <a:lnSpc>
+                <a:spcPct val="100000"/>
+              </a:lnSpc>
+              <a:spcBef>
+                <a:spcPts val="320"/>
+              </a:spcBef>
+              <a:buClr>
+                <a:srgbClr val="000000"/>
+              </a:buClr>
+              <a:buFont typeface="Arial"/>
+              <a:buChar char="»"/>
+              <a:tabLst>
+                <a:tab pos="0" algn="l"/>
+              </a:tabLst>
+              <a:defRPr lang="en-US" sz="1600" b="0" u="none" strike="noStrike">
+                <a:solidFill>
+                  <a:schemeClr val="dk1"/>
+                </a:solidFill>
+                <a:effectLst/>
+                <a:uFillTx/>
+                <a:latin typeface="Calibri"/>
+              </a:defRPr>
+            </a:lvl5pPr>
+          </a:lstStyle>
+          <a:p>
+            <a:pPr marL="343080" indent="-343080" algn="l" defTabSz="457200">
+              <a:lnSpc>
+                <a:spcPct val="100000"/>
+              </a:lnSpc>
+              <a:spcBef>
+                <a:spcPts val="479"/>
+              </a:spcBef>
+              <a:buClr>
+                <a:srgbClr val="000000"/>
+              </a:buClr>
+              <a:buFont typeface="Arial"/>
+              <a:buChar char="•"/>
+              <a:tabLst>
+                <a:tab pos="0" algn="l"/>
+              </a:tabLst>
+            </a:pPr>
+            <a:r>
+              <a:rPr lang="en-US" sz="2400" b="0" u="none" strike="noStrike">
+                <a:solidFill>
+                  <a:schemeClr val="dk1"/>
+                </a:solidFill>
+                <a:effectLst/>
+                <a:uFillTx/>
+                <a:latin typeface="Calibri"/>
+              </a:rPr>
+              <a:t>Click to edit Master text styles</a:t>
+            </a:r>
+            <a:endParaRPr lang="en-US" sz="2400" b="0" u="none" strike="noStrike">
+              <a:solidFill>
+                <a:schemeClr val="dk1"/>
+              </a:solidFill>
+              <a:effectLst/>
+              <a:uFillTx/>
+              <a:latin typeface="Calibri"/>
+            </a:endParaRPr>
+          </a:p>
+          <a:p>
+            <a:pPr marL="743040" lvl="1" indent="-285840" algn="l" defTabSz="457200">
+              <a:lnSpc>
+                <a:spcPct val="100000"/>
+              </a:lnSpc>
+              <a:spcBef>
+                <a:spcPts val="400"/>
+              </a:spcBef>
+              <a:buClr>
+                <a:srgbClr val="000000"/>
+              </a:buClr>
+              <a:buFont typeface="Arial"/>
+              <a:buChar char="–"/>
+              <a:tabLst>
+                <a:tab pos="0" algn="l"/>
+              </a:tabLst>
+            </a:pPr>
+            <a:r>
+              <a:rPr lang="en-US" sz="2000" b="0" u="none" strike="noStrike">
+                <a:solidFill>
+                  <a:schemeClr val="dk1"/>
+                </a:solidFill>
+                <a:effectLst/>
+                <a:uFillTx/>
+                <a:latin typeface="Calibri"/>
+              </a:rPr>
+              <a:t>Second level</a:t>
+            </a:r>
+            <a:endParaRPr lang="en-US" sz="2000" b="0" u="none" strike="noStrike">
+              <a:solidFill>
+                <a:schemeClr val="dk1"/>
+              </a:solidFill>
+              <a:effectLst/>
+              <a:uFillTx/>
+              <a:latin typeface="Calibri"/>
+            </a:endParaRPr>
+          </a:p>
+          <a:p>
+            <a:pPr marL="1143000" lvl="2" indent="-228600" algn="l" defTabSz="457200">
+              <a:lnSpc>
+                <a:spcPct val="100000"/>
+              </a:lnSpc>
+              <a:spcBef>
+                <a:spcPts val="360"/>
+              </a:spcBef>
+              <a:buClr>
+                <a:srgbClr val="000000"/>
+              </a:buClr>
+              <a:buFont typeface="Arial"/>
+              <a:buChar char="•"/>
+              <a:tabLst>
+                <a:tab pos="0" algn="l"/>
+              </a:tabLst>
+            </a:pPr>
+            <a:r>
+              <a:rPr lang="en-US" sz="1800" b="0" u="none" strike="noStrike">
+                <a:solidFill>
+                  <a:schemeClr val="dk1"/>
+                </a:solidFill>
+                <a:effectLst/>
+                <a:uFillTx/>
+                <a:latin typeface="Calibri"/>
+              </a:rPr>
+              <a:t>Third level</a:t>
+            </a:r>
+            <a:endParaRPr lang="en-US" sz="1800" b="0" u="none" strike="noStrike">
+              <a:solidFill>
+                <a:schemeClr val="dk1"/>
+              </a:solidFill>
+              <a:effectLst/>
+              <a:uFillTx/>
+              <a:latin typeface="Calibri"/>
+            </a:endParaRPr>
+          </a:p>
+          <a:p>
+            <a:pPr marL="1600200" lvl="3" indent="-228600" algn="l" defTabSz="457200">
+              <a:lnSpc>
+                <a:spcPct val="100000"/>
+              </a:lnSpc>
+              <a:spcBef>
+                <a:spcPts val="320"/>
+              </a:spcBef>
+              <a:buClr>
+                <a:srgbClr val="000000"/>
+              </a:buClr>
+              <a:buFont typeface="Arial"/>
+              <a:buChar char="–"/>
+              <a:tabLst>
+                <a:tab pos="0" algn="l"/>
+              </a:tabLst>
+            </a:pPr>
+            <a:r>
+              <a:rPr lang="en-US" sz="1600" b="0" u="none" strike="noStrike">
+                <a:solidFill>
+                  <a:schemeClr val="dk1"/>
+                </a:solidFill>
+                <a:effectLst/>
+                <a:uFillTx/>
+                <a:latin typeface="Calibri"/>
+              </a:rPr>
+              <a:t>Fourth level</a:t>
+            </a:r>
+            <a:endParaRPr lang="en-US" sz="1600" b="0" u="none" strike="noStrike">
+              <a:solidFill>
+                <a:schemeClr val="dk1"/>
+              </a:solidFill>
+              <a:effectLst/>
+              <a:uFillTx/>
+              <a:latin typeface="Calibri"/>
+            </a:endParaRPr>
+          </a:p>
+          <a:p>
+            <a:pPr marL="2057400" lvl="4" indent="-228600" algn="l" defTabSz="457200">
+              <a:lnSpc>
+                <a:spcPct val="100000"/>
+              </a:lnSpc>
+              <a:spcBef>
+                <a:spcPts val="320"/>
+              </a:spcBef>
+              <a:buClr>
+                <a:srgbClr val="000000"/>
+              </a:buClr>
+              <a:buFont typeface="Arial"/>
+              <a:buChar char="»"/>
+              <a:tabLst>
+                <a:tab pos="0" algn="l"/>
+              </a:tabLst>
+            </a:pPr>
+            <a:r>
+              <a:rPr lang="en-US" sz="1600" b="0" u="none" strike="noStrike">
+                <a:solidFill>
+                  <a:schemeClr val="dk1"/>
+                </a:solidFill>
+                <a:effectLst/>
+                <a:uFillTx/>
+                <a:latin typeface="Calibri"/>
+              </a:rPr>
+              <a:t>Fifth level</a:t>
+            </a:r>
+            <a:endParaRPr lang="en-US" sz="1600" b="0" u="none" strike="noStrike">
+              <a:solidFill>
+                <a:schemeClr val="dk1"/>
+              </a:solidFill>
+              <a:effectLst/>
+              <a:uFillTx/>
+              <a:latin typeface="Calibri"/>
+            </a:endParaRPr>
+          </a:p>
+        </p:txBody>
+      </p:sp>
+      <p:sp>
+        <p:nvSpPr>
+          <p:cNvPr id="56" name="PlaceHolder 4"/>
+          <p:cNvSpPr>
+            <a:spLocks noGrp="1"/>
+          </p:cNvSpPr>
+          <p:nvPr>
+            <p:ph type="body"/>
+          </p:nvPr>
+        </p:nvSpPr>
+        <p:spPr>
+          <a:xfrm>
+            <a:off x="4645080" y="1535040"/>
+            <a:ext cx="4039560" cy="637560"/>
+          </a:xfrm>
+          <a:prstGeom prst="rect">
+            <a:avLst/>
+          </a:prstGeom>
+          <a:noFill/>
+          <a:ln w="0">
+            <a:noFill/>
+          </a:ln>
+        </p:spPr>
+        <p:txBody>
+          <a:bodyPr lIns="91440" tIns="45720" rIns="91440" bIns="45720" anchor="b">
+            <a:noAutofit/>
+          </a:bodyPr>
+          <a:lstStyle>
             <a:lvl1pPr indent="0" algn="l" defTabSz="457200">
               <a:lnSpc>
                 <a:spcPct val="100000"/>
               </a:lnSpc>
               <a:spcBef>
-                <a:spcPts val="281"/>
+                <a:spcPts val="479"/>
               </a:spcBef>
               <a:buNone/>
               <a:tabLst>
                 <a:tab pos="0" algn="l"/>
               </a:tabLst>
-              <a:defRPr lang="en-US" sz="1400" b="0" u="none" strike="noStrike">
+              <a:defRPr lang="en-US" sz="2400" b="1" u="none" strike="noStrike">
                 <a:solidFill>
                   <a:schemeClr val="dk1"/>
                 </a:solidFill>
@@ -664,7 +1924,7 @@
                 <a:spcPct val="100000"/>
               </a:lnSpc>
               <a:spcBef>
-                <a:spcPts val="281"/>
+                <a:spcPts val="479"/>
               </a:spcBef>
               <a:buNone/>
               <a:tabLst>
@@ -672,7 +1932,7 @@
               </a:tabLst>
             </a:pPr>
             <a:r>
-              <a:rPr lang="en-US" sz="1400" b="0" u="none" strike="noStrike">
+              <a:rPr lang="en-US" sz="2400" b="1" u="none" strike="noStrike">
                 <a:solidFill>
                   <a:schemeClr val="dk1"/>
                 </a:solidFill>
@@ -682,7 +1942,7 @@
               </a:rPr>
               <a:t>Click to edit Master text styles</a:t>
             </a:r>
-            <a:endParaRPr lang="en-US" sz="1400" b="0" u="none" strike="noStrike">
+            <a:endParaRPr lang="en-US" sz="2400" b="0" u="none" strike="noStrike">
               <a:solidFill>
                 <a:schemeClr val="dk1"/>
               </a:solidFill>
@@ -695,18 +1955,354 @@
       </p:sp>
       <p:sp>
         <p:nvSpPr>
-          <p:cNvPr id="5" name="PlaceHolder 4"/>
+          <p:cNvPr id="57" name="PlaceHolder 5"/>
           <p:cNvSpPr>
             <a:spLocks noGrp="1"/>
           </p:cNvSpPr>
           <p:nvPr>
-            <p:ph type="dt" idx="1"/>
+            <p:ph type="body"/>
+          </p:nvPr>
+        </p:nvSpPr>
+        <p:spPr>
+          <a:xfrm>
+            <a:off x="4645080" y="2174760"/>
+            <a:ext cx="4039560" cy="3949200"/>
+          </a:xfrm>
+          <a:prstGeom prst="rect">
+            <a:avLst/>
+          </a:prstGeom>
+          <a:noFill/>
+          <a:ln w="0">
+            <a:noFill/>
+          </a:ln>
+        </p:spPr>
+        <p:txBody>
+          <a:bodyPr lIns="91440" tIns="45720" rIns="91440" bIns="45720" anchor="t">
+            <a:noAutofit/>
+          </a:bodyPr>
+          <a:lstStyle>
+            <a:lvl1pPr algn="l" defTabSz="457200">
+              <a:lnSpc>
+                <a:spcPct val="100000"/>
+              </a:lnSpc>
+              <a:spcBef>
+                <a:spcPts val="479"/>
+              </a:spcBef>
+              <a:buClr>
+                <a:srgbClr val="000000"/>
+              </a:buClr>
+              <a:buFont typeface="Arial"/>
+              <a:buChar char="•"/>
+              <a:tabLst>
+                <a:tab pos="0" algn="l"/>
+              </a:tabLst>
+              <a:defRPr lang="en-US" sz="2400" b="0" u="none" strike="noStrike">
+                <a:solidFill>
+                  <a:schemeClr val="dk1"/>
+                </a:solidFill>
+                <a:effectLst/>
+                <a:uFillTx/>
+                <a:latin typeface="Calibri"/>
+              </a:defRPr>
+            </a:lvl1pPr>
+            <a:lvl2pPr lvl="1" algn="l" defTabSz="457200">
+              <a:lnSpc>
+                <a:spcPct val="100000"/>
+              </a:lnSpc>
+              <a:spcBef>
+                <a:spcPts val="400"/>
+              </a:spcBef>
+              <a:buClr>
+                <a:srgbClr val="000000"/>
+              </a:buClr>
+              <a:buFont typeface="Arial"/>
+              <a:buChar char="–"/>
+              <a:tabLst>
+                <a:tab pos="0" algn="l"/>
+              </a:tabLst>
+              <a:defRPr lang="en-US" sz="2000" b="0" u="none" strike="noStrike">
+                <a:solidFill>
+                  <a:schemeClr val="dk1"/>
+                </a:solidFill>
+                <a:effectLst/>
+                <a:uFillTx/>
+                <a:latin typeface="Calibri"/>
+              </a:defRPr>
+            </a:lvl2pPr>
+            <a:lvl3pPr lvl="2" algn="l" defTabSz="457200">
+              <a:lnSpc>
+                <a:spcPct val="100000"/>
+              </a:lnSpc>
+              <a:spcBef>
+                <a:spcPts val="360"/>
+              </a:spcBef>
+              <a:buClr>
+                <a:srgbClr val="000000"/>
+              </a:buClr>
+              <a:buFont typeface="Arial"/>
+              <a:buChar char="•"/>
+              <a:tabLst>
+                <a:tab pos="0" algn="l"/>
+              </a:tabLst>
+              <a:defRPr lang="en-US" sz="1800" b="0" u="none" strike="noStrike">
+                <a:solidFill>
+                  <a:schemeClr val="dk1"/>
+                </a:solidFill>
+                <a:effectLst/>
+                <a:uFillTx/>
+                <a:latin typeface="Calibri"/>
+              </a:defRPr>
+            </a:lvl3pPr>
+            <a:lvl4pPr lvl="3" algn="l" defTabSz="457200">
+              <a:lnSpc>
+                <a:spcPct val="100000"/>
+              </a:lnSpc>
+              <a:spcBef>
+                <a:spcPts val="320"/>
+              </a:spcBef>
+              <a:buClr>
+                <a:srgbClr val="000000"/>
+              </a:buClr>
+              <a:buFont typeface="Arial"/>
+              <a:buChar char="–"/>
+              <a:tabLst>
+                <a:tab pos="0" algn="l"/>
+              </a:tabLst>
+              <a:defRPr lang="en-US" sz="1600" b="0" u="none" strike="noStrike">
+                <a:solidFill>
+                  <a:schemeClr val="dk1"/>
+                </a:solidFill>
+                <a:effectLst/>
+                <a:uFillTx/>
+                <a:latin typeface="Calibri"/>
+              </a:defRPr>
+            </a:lvl4pPr>
+            <a:lvl5pPr lvl="4" algn="l" defTabSz="457200">
+              <a:lnSpc>
+                <a:spcPct val="100000"/>
+              </a:lnSpc>
+              <a:spcBef>
+                <a:spcPts val="320"/>
+              </a:spcBef>
+              <a:buClr>
+                <a:srgbClr val="000000"/>
+              </a:buClr>
+              <a:buFont typeface="Arial"/>
+              <a:buChar char="»"/>
+              <a:tabLst>
+                <a:tab pos="0" algn="l"/>
+              </a:tabLst>
+              <a:defRPr lang="en-US" sz="1600" b="0" u="none" strike="noStrike">
+                <a:solidFill>
+                  <a:schemeClr val="dk1"/>
+                </a:solidFill>
+                <a:effectLst/>
+                <a:uFillTx/>
+                <a:latin typeface="Calibri"/>
+              </a:defRPr>
+            </a:lvl5pPr>
+          </a:lstStyle>
+          <a:p>
+            <a:pPr marL="343080" indent="-343080" algn="l" defTabSz="457200">
+              <a:lnSpc>
+                <a:spcPct val="100000"/>
+              </a:lnSpc>
+              <a:spcBef>
+                <a:spcPts val="479"/>
+              </a:spcBef>
+              <a:buClr>
+                <a:srgbClr val="000000"/>
+              </a:buClr>
+              <a:buFont typeface="Arial"/>
+              <a:buChar char="•"/>
+              <a:tabLst>
+                <a:tab pos="0" algn="l"/>
+              </a:tabLst>
+            </a:pPr>
+            <a:r>
+              <a:rPr lang="en-US" sz="2400" b="0" u="none" strike="noStrike">
+                <a:solidFill>
+                  <a:schemeClr val="dk1"/>
+                </a:solidFill>
+                <a:effectLst/>
+                <a:uFillTx/>
+                <a:latin typeface="Calibri"/>
+              </a:rPr>
+              <a:t>Click to edit Master text styles</a:t>
+            </a:r>
+            <a:endParaRPr lang="en-US" sz="2400" b="0" u="none" strike="noStrike">
+              <a:solidFill>
+                <a:schemeClr val="dk1"/>
+              </a:solidFill>
+              <a:effectLst/>
+              <a:uFillTx/>
+              <a:latin typeface="Calibri"/>
+            </a:endParaRPr>
+          </a:p>
+          <a:p>
+            <a:pPr marL="743040" lvl="1" indent="-285840" algn="l" defTabSz="457200">
+              <a:lnSpc>
+                <a:spcPct val="100000"/>
+              </a:lnSpc>
+              <a:spcBef>
+                <a:spcPts val="400"/>
+              </a:spcBef>
+              <a:buClr>
+                <a:srgbClr val="000000"/>
+              </a:buClr>
+              <a:buFont typeface="Arial"/>
+              <a:buChar char="–"/>
+              <a:tabLst>
+                <a:tab pos="0" algn="l"/>
+              </a:tabLst>
+            </a:pPr>
+            <a:r>
+              <a:rPr lang="en-US" sz="2000" b="0" u="none" strike="noStrike">
+                <a:solidFill>
+                  <a:schemeClr val="dk1"/>
+                </a:solidFill>
+                <a:effectLst/>
+                <a:uFillTx/>
+                <a:latin typeface="Calibri"/>
+              </a:rPr>
+              <a:t>Second level</a:t>
+            </a:r>
+            <a:endParaRPr lang="en-US" sz="2000" b="0" u="none" strike="noStrike">
+              <a:solidFill>
+                <a:schemeClr val="dk1"/>
+              </a:solidFill>
+              <a:effectLst/>
+              <a:uFillTx/>
+              <a:latin typeface="Calibri"/>
+            </a:endParaRPr>
+          </a:p>
+          <a:p>
+            <a:pPr marL="1143000" lvl="2" indent="-228600" algn="l" defTabSz="457200">
+              <a:lnSpc>
+                <a:spcPct val="100000"/>
+              </a:lnSpc>
+              <a:spcBef>
+                <a:spcPts val="360"/>
+              </a:spcBef>
+              <a:buClr>
+                <a:srgbClr val="000000"/>
+              </a:buClr>
+              <a:buFont typeface="Arial"/>
+              <a:buChar char="•"/>
+              <a:tabLst>
+                <a:tab pos="0" algn="l"/>
+              </a:tabLst>
+            </a:pPr>
+            <a:r>
+              <a:rPr lang="en-US" sz="1800" b="0" u="none" strike="noStrike">
+                <a:solidFill>
+                  <a:schemeClr val="dk1"/>
+                </a:solidFill>
+                <a:effectLst/>
+                <a:uFillTx/>
+                <a:latin typeface="Calibri"/>
+              </a:rPr>
+              <a:t>Third level</a:t>
+            </a:r>
+            <a:endParaRPr lang="en-US" sz="1800" b="0" u="none" strike="noStrike">
+              <a:solidFill>
+                <a:schemeClr val="dk1"/>
+              </a:solidFill>
+              <a:effectLst/>
+              <a:uFillTx/>
+              <a:latin typeface="Calibri"/>
+            </a:endParaRPr>
+          </a:p>
+          <a:p>
+            <a:pPr marL="1600200" lvl="3" indent="-228600" algn="l" defTabSz="457200">
+              <a:lnSpc>
+                <a:spcPct val="100000"/>
+              </a:lnSpc>
+              <a:spcBef>
+                <a:spcPts val="320"/>
+              </a:spcBef>
+              <a:buClr>
+                <a:srgbClr val="000000"/>
+              </a:buClr>
+              <a:buFont typeface="Arial"/>
+              <a:buChar char="–"/>
+              <a:tabLst>
+                <a:tab pos="0" algn="l"/>
+              </a:tabLst>
+            </a:pPr>
+            <a:r>
+              <a:rPr lang="en-US" sz="1600" b="0" u="none" strike="noStrike">
+                <a:solidFill>
+                  <a:schemeClr val="dk1"/>
+                </a:solidFill>
+                <a:effectLst/>
+                <a:uFillTx/>
+                <a:latin typeface="Calibri"/>
+              </a:rPr>
+              <a:t>Fourth level</a:t>
+            </a:r>
+            <a:endParaRPr lang="en-US" sz="1600" b="0" u="none" strike="noStrike">
+              <a:solidFill>
+                <a:schemeClr val="dk1"/>
+              </a:solidFill>
+              <a:effectLst/>
+              <a:uFillTx/>
+              <a:latin typeface="Calibri"/>
+            </a:endParaRPr>
+          </a:p>
+          <a:p>
+            <a:pPr marL="2057400" lvl="4" indent="-228600" algn="l" defTabSz="457200">
+              <a:lnSpc>
+                <a:spcPct val="100000"/>
+              </a:lnSpc>
+              <a:spcBef>
+                <a:spcPts val="320"/>
+              </a:spcBef>
+              <a:buClr>
+                <a:srgbClr val="000000"/>
+              </a:buClr>
+              <a:buFont typeface="Arial"/>
+              <a:buChar char="»"/>
+              <a:tabLst>
+                <a:tab pos="0" algn="l"/>
+              </a:tabLst>
+            </a:pPr>
+            <a:r>
+              <a:rPr lang="en-US" sz="1600" b="0" u="none" strike="noStrike">
+                <a:solidFill>
+                  <a:schemeClr val="dk1"/>
+                </a:solidFill>
+                <a:effectLst/>
+                <a:uFillTx/>
+                <a:latin typeface="Calibri"/>
+              </a:rPr>
+              <a:t>Fifth level</a:t>
+            </a:r>
+            <a:endParaRPr lang="en-US" sz="1600" b="0" u="none" strike="noStrike">
+              <a:solidFill>
+                <a:schemeClr val="dk1"/>
+              </a:solidFill>
+              <a:effectLst/>
+              <a:uFillTx/>
+              <a:latin typeface="Calibri"/>
+            </a:endParaRPr>
+          </a:p>
+        </p:txBody>
+      </p:sp>
+      <p:sp>
+        <p:nvSpPr>
+          <p:cNvPr id="58" name="PlaceHolder 6"/>
+          <p:cNvSpPr>
+            <a:spLocks noGrp="1"/>
+          </p:cNvSpPr>
+          <p:nvPr>
+            <p:ph type="dt" idx="31"/>
           </p:nvPr>
         </p:nvSpPr>
         <p:spPr>
           <a:xfrm>
             <a:off x="457200" y="6356520"/>
-            <a:ext cx="2131920" cy="363240"/>
+            <a:ext cx="2131560" cy="362880"/>
           </a:xfrm>
           <a:prstGeom prst="rect">
             <a:avLst/>
@@ -777,18 +2373,18 @@
       </p:sp>
       <p:sp>
         <p:nvSpPr>
-          <p:cNvPr id="6" name="PlaceHolder 5"/>
+          <p:cNvPr id="59" name="PlaceHolder 7"/>
           <p:cNvSpPr>
             <a:spLocks noGrp="1"/>
           </p:cNvSpPr>
           <p:nvPr>
-            <p:ph type="ftr" idx="2"/>
+            <p:ph type="ftr" idx="32"/>
           </p:nvPr>
         </p:nvSpPr>
         <p:spPr>
           <a:xfrm>
             <a:off x="3124080" y="6356520"/>
-            <a:ext cx="2893680" cy="363240"/>
+            <a:ext cx="2893320" cy="362880"/>
           </a:xfrm>
           <a:prstGeom prst="rect">
             <a:avLst/>
@@ -855,18 +2451,18 @@
       </p:sp>
       <p:sp>
         <p:nvSpPr>
-          <p:cNvPr id="7" name="PlaceHolder 6"/>
+          <p:cNvPr id="60" name="PlaceHolder 8"/>
           <p:cNvSpPr>
             <a:spLocks noGrp="1"/>
           </p:cNvSpPr>
           <p:nvPr>
-            <p:ph type="sldNum" idx="3"/>
+            <p:ph type="sldNum" idx="33"/>
           </p:nvPr>
         </p:nvSpPr>
         <p:spPr>
           <a:xfrm>
             <a:off x="6553080" y="6356520"/>
-            <a:ext cx="2131920" cy="363240"/>
+            <a:ext cx="2131560" cy="362880"/>
           </a:xfrm>
           <a:prstGeom prst="rect">
             <a:avLst/>
@@ -911,7 +2507,7 @@
                 <a:tab pos="0" algn="l"/>
               </a:tabLst>
             </a:pPr>
-            <a:fld id="{A8D17A16-2E74-412A-B3C5-18E55CF1B49A}" type="slidenum">
+            <a:fld id="{ED2FEBD5-4F76-465E-B3E7-E3902BA7B261}" type="slidenum">
               <a:rPr lang="en-US" sz="1200" b="0" u="none" strike="noStrike">
                 <a:solidFill>
                   <a:schemeClr val="dk1">
@@ -940,7 +2536,7 @@
 </p:sldLayout>
 </file>
 
-<file path=ppt/slideLayouts/slideLayout10.xml><?xml version="1.0" encoding="utf-8"?>
+<file path=ppt/slideLayouts/slideLayout2.xml><?xml version="1.0" encoding="utf-8"?>
 <p:sldLayout xmlns:a="http://schemas.openxmlformats.org/drawingml/2006/main" xmlns:p="http://schemas.openxmlformats.org/presentationml/2006/main" xmlns:r="http://schemas.openxmlformats.org/officeDocument/2006/relationships" xmlns:p14="http://schemas.microsoft.com/office/powerpoint/2010/main" xmlns:p15="http://schemas.microsoft.com/office/powerpoint/2012/main" xmlns:mc="http://schemas.openxmlformats.org/markup-compatibility/2006" type="blank" preserve="1">
   <p:cSld name="Blank">
     <p:bg>
@@ -966,18 +2562,18 @@
       </p:grpSpPr>
       <p:sp>
         <p:nvSpPr>
-          <p:cNvPr id="50" name="PlaceHolder 1"/>
+          <p:cNvPr id="6" name="PlaceHolder 1"/>
           <p:cNvSpPr>
             <a:spLocks noGrp="1"/>
           </p:cNvSpPr>
           <p:nvPr>
-            <p:ph type="dt" idx="28"/>
+            <p:ph type="dt" idx="4"/>
           </p:nvPr>
         </p:nvSpPr>
         <p:spPr>
           <a:xfrm>
             <a:off x="457200" y="6356520"/>
-            <a:ext cx="2131920" cy="363240"/>
+            <a:ext cx="2131560" cy="362880"/>
           </a:xfrm>
           <a:prstGeom prst="rect">
             <a:avLst/>
@@ -1033,7 +2629,7 @@
                 <a:uFillTx/>
                 <a:latin typeface="Calibri"/>
               </a:rPr>
-              <a:t>&lt;date/time&gt;</a:t>
+              <a:t> </a:t>
             </a:r>
             <a:endParaRPr lang="en-US" sz="1200" b="0" u="none" strike="noStrike">
               <a:solidFill>
@@ -1048,18 +2644,18 @@
       </p:sp>
       <p:sp>
         <p:nvSpPr>
-          <p:cNvPr id="51" name="PlaceHolder 2"/>
+          <p:cNvPr id="7" name="PlaceHolder 2"/>
           <p:cNvSpPr>
             <a:spLocks noGrp="1"/>
           </p:cNvSpPr>
           <p:nvPr>
-            <p:ph type="ftr" idx="29"/>
+            <p:ph type="ftr" idx="5"/>
           </p:nvPr>
         </p:nvSpPr>
         <p:spPr>
           <a:xfrm>
             <a:off x="3124080" y="6356520"/>
-            <a:ext cx="2893680" cy="363240"/>
+            <a:ext cx="2893320" cy="362880"/>
           </a:xfrm>
           <a:prstGeom prst="rect">
             <a:avLst/>
@@ -1111,7 +2707,7 @@
                 <a:uFillTx/>
                 <a:latin typeface="Times New Roman"/>
               </a:rPr>
-              <a:t>&lt;footer&gt;</a:t>
+              <a:t> </a:t>
             </a:r>
             <a:endParaRPr lang="en-US" sz="1400" b="0" u="none" strike="noStrike">
               <a:solidFill>
@@ -1126,18 +2722,18 @@
       </p:sp>
       <p:sp>
         <p:nvSpPr>
-          <p:cNvPr id="52" name="PlaceHolder 3"/>
+          <p:cNvPr id="8" name="PlaceHolder 3"/>
           <p:cNvSpPr>
             <a:spLocks noGrp="1"/>
           </p:cNvSpPr>
           <p:nvPr>
-            <p:ph type="sldNum" idx="30"/>
+            <p:ph type="sldNum" idx="6"/>
           </p:nvPr>
         </p:nvSpPr>
         <p:spPr>
           <a:xfrm>
             <a:off x="6553080" y="6356520"/>
-            <a:ext cx="2131920" cy="363240"/>
+            <a:ext cx="2131560" cy="362880"/>
           </a:xfrm>
           <a:prstGeom prst="rect">
             <a:avLst/>
@@ -1182,7 +2778,7 @@
                 <a:tab pos="0" algn="l"/>
               </a:tabLst>
             </a:pPr>
-            <a:fld id="{BF3ADB10-C82B-473B-B9AC-C1927AC001D7}" type="slidenum">
+            <a:fld id="{16DFDA4F-A2B2-4DBD-8B63-A61A3A0688BD}" type="slidenum">
               <a:rPr lang="en-US" sz="1200" b="0" u="none" strike="noStrike">
                 <a:solidFill>
                   <a:schemeClr val="dk1">
@@ -1193,7 +2789,7 @@
                 <a:uFillTx/>
                 <a:latin typeface="Calibri"/>
               </a:rPr>
-              <a:t>&lt;number&gt;</a:t>
+              <a:t>1</a:t>
             </a:fld>
             <a:endParaRPr lang="en-US" sz="1200" b="0" u="none" strike="noStrike">
               <a:solidFill>
@@ -1208,7 +2804,7 @@
       </p:sp>
       <p:sp>
         <p:nvSpPr>
-          <p:cNvPr id="53" name="PlaceHolder 4"/>
+          <p:cNvPr id="9" name="PlaceHolder 4"/>
           <p:cNvSpPr>
             <a:spLocks noGrp="1"/>
           </p:cNvSpPr>
@@ -1219,7 +2815,7 @@
         <p:spPr>
           <a:xfrm>
             <a:off x="609480" y="273600"/>
-            <a:ext cx="10971000" cy="1143360"/>
+            <a:ext cx="10970640" cy="1143000"/>
           </a:xfrm>
           <a:prstGeom prst="rect">
             <a:avLst/>
@@ -1286,7 +2882,7 @@
       </p:sp>
       <p:sp>
         <p:nvSpPr>
-          <p:cNvPr id="54" name="PlaceHolder 5"/>
+          <p:cNvPr id="10" name="PlaceHolder 5"/>
           <p:cNvSpPr>
             <a:spLocks noGrp="1"/>
           </p:cNvSpPr>
@@ -1297,7 +2893,7 @@
         <p:spPr>
           <a:xfrm>
             <a:off x="609480" y="1604520"/>
-            <a:ext cx="10971000" cy="3975840"/>
+            <a:ext cx="10970640" cy="3975480"/>
           </a:xfrm>
           <a:prstGeom prst="rect">
             <a:avLst/>
@@ -1717,7 +3313,7 @@
 </p:sldLayout>
 </file>
 
-<file path=ppt/slideLayouts/slideLayout11.xml><?xml version="1.0" encoding="utf-8"?>
+<file path=ppt/slideLayouts/slideLayout3.xml><?xml version="1.0" encoding="utf-8"?>
 <p:sldLayout xmlns:a="http://schemas.openxmlformats.org/drawingml/2006/main" xmlns:p="http://schemas.openxmlformats.org/presentationml/2006/main" xmlns:r="http://schemas.openxmlformats.org/officeDocument/2006/relationships" xmlns:p14="http://schemas.microsoft.com/office/powerpoint/2010/main" xmlns:p15="http://schemas.microsoft.com/office/powerpoint/2012/main" xmlns:mc="http://schemas.openxmlformats.org/markup-compatibility/2006" type="blank" preserve="1">
   <p:cSld name="Content with Caption">
     <p:bg>
@@ -1743,7 +3339,7 @@
       </p:grpSpPr>
       <p:sp>
         <p:nvSpPr>
-          <p:cNvPr id="55" name="PlaceHolder 1"/>
+          <p:cNvPr id="11" name="PlaceHolder 1"/>
           <p:cNvSpPr>
             <a:spLocks noGrp="1"/>
           </p:cNvSpPr>
@@ -1754,7 +3350,7 @@
         <p:spPr>
           <a:xfrm>
             <a:off x="457200" y="272880"/>
-            <a:ext cx="3006360" cy="1160280"/>
+            <a:ext cx="3006000" cy="1159920"/>
           </a:xfrm>
           <a:prstGeom prst="rect">
             <a:avLst/>
@@ -1821,7 +3417,7 @@
       </p:sp>
       <p:sp>
         <p:nvSpPr>
-          <p:cNvPr id="56" name="PlaceHolder 2"/>
+          <p:cNvPr id="12" name="PlaceHolder 2"/>
           <p:cNvSpPr>
             <a:spLocks noGrp="1"/>
           </p:cNvSpPr>
@@ -1832,7 +3428,7 @@
         <p:spPr>
           <a:xfrm>
             <a:off x="3575160" y="272880"/>
-            <a:ext cx="5109840" cy="5851440"/>
+            <a:ext cx="5109480" cy="5851080"/>
           </a:xfrm>
           <a:prstGeom prst="rect">
             <a:avLst/>
@@ -2127,7 +3723,7 @@
       </p:sp>
       <p:sp>
         <p:nvSpPr>
-          <p:cNvPr id="57" name="PlaceHolder 3"/>
+          <p:cNvPr id="13" name="PlaceHolder 3"/>
           <p:cNvSpPr>
             <a:spLocks noGrp="1"/>
           </p:cNvSpPr>
@@ -2138,7 +3734,7 @@
         <p:spPr>
           <a:xfrm>
             <a:off x="457200" y="1434960"/>
-            <a:ext cx="3006360" cy="4689360"/>
+            <a:ext cx="3006000" cy="4689000"/>
           </a:xfrm>
           <a:prstGeom prst="rect">
             <a:avLst/>
@@ -2211,18 +3807,18 @@
       </p:sp>
       <p:sp>
         <p:nvSpPr>
-          <p:cNvPr id="58" name="PlaceHolder 4"/>
+          <p:cNvPr id="14" name="PlaceHolder 4"/>
           <p:cNvSpPr>
             <a:spLocks noGrp="1"/>
           </p:cNvSpPr>
           <p:nvPr>
-            <p:ph type="dt" idx="31"/>
+            <p:ph type="dt" idx="7"/>
           </p:nvPr>
         </p:nvSpPr>
         <p:spPr>
           <a:xfrm>
             <a:off x="457200" y="6356520"/>
-            <a:ext cx="2131920" cy="363240"/>
+            <a:ext cx="2131560" cy="362880"/>
           </a:xfrm>
           <a:prstGeom prst="rect">
             <a:avLst/>
@@ -2293,18 +3889,18 @@
       </p:sp>
       <p:sp>
         <p:nvSpPr>
-          <p:cNvPr id="59" name="PlaceHolder 5"/>
+          <p:cNvPr id="15" name="PlaceHolder 5"/>
           <p:cNvSpPr>
             <a:spLocks noGrp="1"/>
           </p:cNvSpPr>
           <p:nvPr>
-            <p:ph type="ftr" idx="32"/>
+            <p:ph type="ftr" idx="8"/>
           </p:nvPr>
         </p:nvSpPr>
         <p:spPr>
           <a:xfrm>
             <a:off x="3124080" y="6356520"/>
-            <a:ext cx="2893680" cy="363240"/>
+            <a:ext cx="2893320" cy="362880"/>
           </a:xfrm>
           <a:prstGeom prst="rect">
             <a:avLst/>
@@ -2371,18 +3967,18 @@
       </p:sp>
       <p:sp>
         <p:nvSpPr>
-          <p:cNvPr id="60" name="PlaceHolder 6"/>
+          <p:cNvPr id="16" name="PlaceHolder 6"/>
           <p:cNvSpPr>
             <a:spLocks noGrp="1"/>
           </p:cNvSpPr>
           <p:nvPr>
-            <p:ph type="sldNum" idx="33"/>
+            <p:ph type="sldNum" idx="9"/>
           </p:nvPr>
         </p:nvSpPr>
         <p:spPr>
           <a:xfrm>
             <a:off x="6553080" y="6356520"/>
-            <a:ext cx="2131920" cy="363240"/>
+            <a:ext cx="2131560" cy="362880"/>
           </a:xfrm>
           <a:prstGeom prst="rect">
             <a:avLst/>
@@ -2427,1011 +4023,7 @@
                 <a:tab pos="0" algn="l"/>
               </a:tabLst>
             </a:pPr>
-            <a:fld id="{F5AB7516-0FF8-4355-8AFE-2041A0491786}" type="slidenum">
-              <a:rPr lang="en-US" sz="1200" b="0" u="none" strike="noStrike">
-                <a:solidFill>
-                  <a:schemeClr val="dk1">
-                    <a:tint val="75000"/>
-                  </a:schemeClr>
-                </a:solidFill>
-                <a:effectLst/>
-                <a:uFillTx/>
-                <a:latin typeface="Calibri"/>
-              </a:rPr>
-              <a:t>&lt;number&gt;</a:t>
-            </a:fld>
-            <a:endParaRPr lang="en-US" sz="1200" b="0" u="none" strike="noStrike">
-              <a:solidFill>
-                <a:srgbClr val="000000"/>
-              </a:solidFill>
-              <a:effectLst/>
-              <a:uFillTx/>
-              <a:latin typeface="Times New Roman"/>
-            </a:endParaRPr>
-          </a:p>
-        </p:txBody>
-      </p:sp>
-    </p:spTree>
-  </p:cSld>
-</p:sldLayout>
-</file>
-
-<file path=ppt/slideLayouts/slideLayout2.xml><?xml version="1.0" encoding="utf-8"?>
-<p:sldLayout xmlns:a="http://schemas.openxmlformats.org/drawingml/2006/main" xmlns:p="http://schemas.openxmlformats.org/presentationml/2006/main" xmlns:r="http://schemas.openxmlformats.org/officeDocument/2006/relationships" xmlns:p14="http://schemas.microsoft.com/office/powerpoint/2010/main" xmlns:p15="http://schemas.microsoft.com/office/powerpoint/2012/main" xmlns:mc="http://schemas.openxmlformats.org/markup-compatibility/2006" type="title" preserve="1">
-  <p:cSld name="Title Slide">
-    <p:bg>
-      <p:bgPr>
-        <a:solidFill>
-          <a:srgbClr val="FFFFFF"/>
-        </a:solidFill>
-      </p:bgPr>
-    </p:bg>
-    <p:spTree>
-      <p:nvGrpSpPr>
-        <p:cNvPr id="1" name=""/>
-        <p:cNvGrpSpPr/>
-        <p:nvPr/>
-      </p:nvGrpSpPr>
-      <p:grpSpPr>
-        <a:xfrm>
-          <a:off x="0" y="0"/>
-          <a:ext cx="0" cy="0"/>
-          <a:chOff x="0" y="0"/>
-          <a:chExt cx="0" cy="0"/>
-        </a:xfrm>
-      </p:grpSpPr>
-      <p:sp>
-        <p:nvSpPr>
-          <p:cNvPr id="8" name="PlaceHolder 1"/>
-          <p:cNvSpPr>
-            <a:spLocks noGrp="1"/>
-          </p:cNvSpPr>
-          <p:nvPr>
-            <p:ph type="title"/>
-          </p:nvPr>
-        </p:nvSpPr>
-        <p:spPr>
-          <a:xfrm>
-            <a:off x="685800" y="2130480"/>
-            <a:ext cx="7770600" cy="1468080"/>
-          </a:xfrm>
-          <a:prstGeom prst="rect">
-            <a:avLst/>
-          </a:prstGeom>
-          <a:noFill/>
-          <a:ln w="0">
-            <a:noFill/>
-          </a:ln>
-        </p:spPr>
-        <p:txBody>
-          <a:bodyPr lIns="91440" tIns="45720" rIns="91440" bIns="45720" anchor="ctr">
-            <a:noAutofit/>
-          </a:bodyPr>
-          <a:lstStyle>
-            <a:lvl1pPr indent="0" algn="ctr" defTabSz="457200">
-              <a:lnSpc>
-                <a:spcPct val="100000"/>
-              </a:lnSpc>
-              <a:buNone/>
-              <a:tabLst>
-                <a:tab pos="0" algn="l"/>
-              </a:tabLst>
-              <a:defRPr lang="en-US" sz="4400" b="0" u="none" strike="noStrike">
-                <a:solidFill>
-                  <a:schemeClr val="dk1"/>
-                </a:solidFill>
-                <a:effectLst/>
-                <a:uFillTx/>
-                <a:latin typeface="Calibri"/>
-              </a:defRPr>
-            </a:lvl1pPr>
-          </a:lstStyle>
-          <a:p>
-            <a:pPr indent="0" algn="ctr" defTabSz="457200">
-              <a:lnSpc>
-                <a:spcPct val="100000"/>
-              </a:lnSpc>
-              <a:buNone/>
-              <a:tabLst>
-                <a:tab pos="0" algn="l"/>
-              </a:tabLst>
-            </a:pPr>
-            <a:r>
-              <a:rPr lang="en-US" sz="4400" b="0" u="none" strike="noStrike">
-                <a:solidFill>
-                  <a:schemeClr val="dk1"/>
-                </a:solidFill>
-                <a:effectLst/>
-                <a:uFillTx/>
-                <a:latin typeface="Calibri"/>
-              </a:rPr>
-              <a:t>Click to edit Master title style</a:t>
-            </a:r>
-            <a:endParaRPr lang="en-US" sz="4400" b="0" u="none" strike="noStrike">
-              <a:solidFill>
-                <a:schemeClr val="dk1"/>
-              </a:solidFill>
-              <a:effectLst/>
-              <a:uFillTx/>
-              <a:latin typeface="Calibri"/>
-            </a:endParaRPr>
-          </a:p>
-        </p:txBody>
-      </p:sp>
-      <p:sp>
-        <p:nvSpPr>
-          <p:cNvPr id="9" name="PlaceHolder 2"/>
-          <p:cNvSpPr>
-            <a:spLocks noGrp="1"/>
-          </p:cNvSpPr>
-          <p:nvPr>
-            <p:ph type="dt" idx="4"/>
-          </p:nvPr>
-        </p:nvSpPr>
-        <p:spPr>
-          <a:xfrm>
-            <a:off x="457200" y="6356520"/>
-            <a:ext cx="2131920" cy="363240"/>
-          </a:xfrm>
-          <a:prstGeom prst="rect">
-            <a:avLst/>
-          </a:prstGeom>
-          <a:noFill/>
-          <a:ln w="0">
-            <a:noFill/>
-          </a:ln>
-        </p:spPr>
-        <p:txBody>
-          <a:bodyPr lIns="91440" tIns="45720" rIns="91440" bIns="45720" anchor="ctr">
-            <a:noAutofit/>
-          </a:bodyPr>
-          <a:lstStyle>
-            <a:lvl1pPr indent="0" algn="l" defTabSz="457200">
-              <a:lnSpc>
-                <a:spcPct val="100000"/>
-              </a:lnSpc>
-              <a:buNone/>
-              <a:tabLst>
-                <a:tab pos="0" algn="l"/>
-              </a:tabLst>
-              <a:defRPr lang="en-US" sz="1200" b="0" u="none" strike="noStrike">
-                <a:solidFill>
-                  <a:schemeClr val="dk1">
-                    <a:tint val="75000"/>
-                  </a:schemeClr>
-                </a:solidFill>
-                <a:effectLst/>
-                <a:uFillTx/>
-                <a:latin typeface="Calibri"/>
-              </a:defRPr>
-            </a:lvl1pPr>
-          </a:lstStyle>
-          <a:p>
-            <a:pPr indent="0" algn="l" defTabSz="457200">
-              <a:lnSpc>
-                <a:spcPct val="100000"/>
-              </a:lnSpc>
-              <a:buNone/>
-              <a:tabLst>
-                <a:tab pos="0" algn="l"/>
-              </a:tabLst>
-            </a:pPr>
-            <a:r>
-              <a:rPr lang="en-US" sz="1200" b="0" u="none" strike="noStrike">
-                <a:solidFill>
-                  <a:schemeClr val="dk1">
-                    <a:tint val="75000"/>
-                  </a:schemeClr>
-                </a:solidFill>
-                <a:effectLst/>
-                <a:uFillTx/>
-                <a:latin typeface="Calibri"/>
-              </a:rPr>
-              <a:t>&lt;date/time&gt;</a:t>
-            </a:r>
-            <a:endParaRPr lang="en-US" sz="1200" b="0" u="none" strike="noStrike">
-              <a:solidFill>
-                <a:srgbClr val="000000"/>
-              </a:solidFill>
-              <a:effectLst/>
-              <a:uFillTx/>
-              <a:latin typeface="Times New Roman"/>
-            </a:endParaRPr>
-          </a:p>
-        </p:txBody>
-      </p:sp>
-      <p:sp>
-        <p:nvSpPr>
-          <p:cNvPr id="10" name="PlaceHolder 3"/>
-          <p:cNvSpPr>
-            <a:spLocks noGrp="1"/>
-          </p:cNvSpPr>
-          <p:nvPr>
-            <p:ph type="ftr" idx="5"/>
-          </p:nvPr>
-        </p:nvSpPr>
-        <p:spPr>
-          <a:xfrm>
-            <a:off x="3124080" y="6356520"/>
-            <a:ext cx="2893680" cy="363240"/>
-          </a:xfrm>
-          <a:prstGeom prst="rect">
-            <a:avLst/>
-          </a:prstGeom>
-          <a:noFill/>
-          <a:ln w="0">
-            <a:noFill/>
-          </a:ln>
-        </p:spPr>
-        <p:txBody>
-          <a:bodyPr lIns="91440" tIns="45720" rIns="91440" bIns="45720" anchor="ctr">
-            <a:noAutofit/>
-          </a:bodyPr>
-          <a:lstStyle>
-            <a:lvl1pPr indent="0" algn="ctr">
-              <a:lnSpc>
-                <a:spcPct val="100000"/>
-              </a:lnSpc>
-              <a:buNone/>
-              <a:tabLst>
-                <a:tab pos="0" algn="l"/>
-              </a:tabLst>
-              <a:defRPr lang="en-US" sz="1400" b="0" u="none" strike="noStrike">
-                <a:solidFill>
-                  <a:srgbClr val="000000"/>
-                </a:solidFill>
-                <a:effectLst/>
-                <a:uFillTx/>
-                <a:latin typeface="Times New Roman"/>
-              </a:defRPr>
-            </a:lvl1pPr>
-          </a:lstStyle>
-          <a:p>
-            <a:pPr indent="0" algn="ctr">
-              <a:lnSpc>
-                <a:spcPct val="100000"/>
-              </a:lnSpc>
-              <a:buNone/>
-              <a:tabLst>
-                <a:tab pos="0" algn="l"/>
-              </a:tabLst>
-            </a:pPr>
-            <a:r>
-              <a:rPr lang="en-US" sz="1400" b="0" u="none" strike="noStrike">
-                <a:solidFill>
-                  <a:srgbClr val="000000"/>
-                </a:solidFill>
-                <a:effectLst/>
-                <a:uFillTx/>
-                <a:latin typeface="Times New Roman"/>
-              </a:rPr>
-              <a:t>&lt;footer&gt;</a:t>
-            </a:r>
-            <a:endParaRPr lang="en-US" sz="1400" b="0" u="none" strike="noStrike">
-              <a:solidFill>
-                <a:srgbClr val="000000"/>
-              </a:solidFill>
-              <a:effectLst/>
-              <a:uFillTx/>
-              <a:latin typeface="Times New Roman"/>
-            </a:endParaRPr>
-          </a:p>
-        </p:txBody>
-      </p:sp>
-      <p:sp>
-        <p:nvSpPr>
-          <p:cNvPr id="11" name="PlaceHolder 4"/>
-          <p:cNvSpPr>
-            <a:spLocks noGrp="1"/>
-          </p:cNvSpPr>
-          <p:nvPr>
-            <p:ph type="sldNum" idx="6"/>
-          </p:nvPr>
-        </p:nvSpPr>
-        <p:spPr>
-          <a:xfrm>
-            <a:off x="6553080" y="6356520"/>
-            <a:ext cx="2131920" cy="363240"/>
-          </a:xfrm>
-          <a:prstGeom prst="rect">
-            <a:avLst/>
-          </a:prstGeom>
-          <a:noFill/>
-          <a:ln w="0">
-            <a:noFill/>
-          </a:ln>
-        </p:spPr>
-        <p:txBody>
-          <a:bodyPr lIns="91440" tIns="45720" rIns="91440" bIns="45720" anchor="ctr">
-            <a:noAutofit/>
-          </a:bodyPr>
-          <a:lstStyle>
-            <a:lvl1pPr indent="0" algn="r" defTabSz="457200">
-              <a:lnSpc>
-                <a:spcPct val="100000"/>
-              </a:lnSpc>
-              <a:buNone/>
-              <a:tabLst>
-                <a:tab pos="0" algn="l"/>
-              </a:tabLst>
-              <a:defRPr lang="en-US" sz="1200" b="0" u="none" strike="noStrike">
-                <a:solidFill>
-                  <a:schemeClr val="dk1">
-                    <a:tint val="75000"/>
-                  </a:schemeClr>
-                </a:solidFill>
-                <a:effectLst/>
-                <a:uFillTx/>
-                <a:latin typeface="Calibri"/>
-              </a:defRPr>
-            </a:lvl1pPr>
-          </a:lstStyle>
-          <a:p>
-            <a:pPr indent="0" algn="r" defTabSz="457200">
-              <a:lnSpc>
-                <a:spcPct val="100000"/>
-              </a:lnSpc>
-              <a:buNone/>
-              <a:tabLst>
-                <a:tab pos="0" algn="l"/>
-              </a:tabLst>
-            </a:pPr>
-            <a:fld id="{B599CB49-D68D-4757-8B3B-8B9916CEAD16}" type="slidenum">
-              <a:rPr lang="en-US" sz="1200" b="0" u="none" strike="noStrike">
-                <a:solidFill>
-                  <a:schemeClr val="dk1">
-                    <a:tint val="75000"/>
-                  </a:schemeClr>
-                </a:solidFill>
-                <a:effectLst/>
-                <a:uFillTx/>
-                <a:latin typeface="Calibri"/>
-              </a:rPr>
-              <a:t>&lt;number&gt;</a:t>
-            </a:fld>
-            <a:endParaRPr lang="en-US" sz="1200" b="0" u="none" strike="noStrike">
-              <a:solidFill>
-                <a:srgbClr val="000000"/>
-              </a:solidFill>
-              <a:effectLst/>
-              <a:uFillTx/>
-              <a:latin typeface="Times New Roman"/>
-            </a:endParaRPr>
-          </a:p>
-        </p:txBody>
-      </p:sp>
-    </p:spTree>
-  </p:cSld>
-</p:sldLayout>
-</file>
-
-<file path=ppt/slideLayouts/slideLayout3.xml><?xml version="1.0" encoding="utf-8"?>
-<p:sldLayout xmlns:a="http://schemas.openxmlformats.org/drawingml/2006/main" xmlns:p="http://schemas.openxmlformats.org/presentationml/2006/main" xmlns:r="http://schemas.openxmlformats.org/officeDocument/2006/relationships" xmlns:p14="http://schemas.microsoft.com/office/powerpoint/2010/main" xmlns:p15="http://schemas.microsoft.com/office/powerpoint/2012/main" xmlns:mc="http://schemas.openxmlformats.org/markup-compatibility/2006" type="vertTx" preserve="1">
-  <p:cSld name="Title and Vertical Text">
-    <p:bg>
-      <p:bgPr>
-        <a:solidFill>
-          <a:srgbClr val="FFFFFF"/>
-        </a:solidFill>
-      </p:bgPr>
-    </p:bg>
-    <p:spTree>
-      <p:nvGrpSpPr>
-        <p:cNvPr id="1" name=""/>
-        <p:cNvGrpSpPr/>
-        <p:nvPr/>
-      </p:nvGrpSpPr>
-      <p:grpSpPr>
-        <a:xfrm>
-          <a:off x="0" y="0"/>
-          <a:ext cx="0" cy="0"/>
-          <a:chOff x="0" y="0"/>
-          <a:chExt cx="0" cy="0"/>
-        </a:xfrm>
-      </p:grpSpPr>
-      <p:sp>
-        <p:nvSpPr>
-          <p:cNvPr id="12" name="PlaceHolder 1"/>
-          <p:cNvSpPr>
-            <a:spLocks noGrp="1"/>
-          </p:cNvSpPr>
-          <p:nvPr>
-            <p:ph type="title"/>
-          </p:nvPr>
-        </p:nvSpPr>
-        <p:spPr>
-          <a:xfrm>
-            <a:off x="457200" y="274680"/>
-            <a:ext cx="8227800" cy="1141200"/>
-          </a:xfrm>
-          <a:prstGeom prst="rect">
-            <a:avLst/>
-          </a:prstGeom>
-          <a:noFill/>
-          <a:ln w="0">
-            <a:noFill/>
-          </a:ln>
-        </p:spPr>
-        <p:txBody>
-          <a:bodyPr lIns="91440" tIns="45720" rIns="91440" bIns="45720" anchor="ctr">
-            <a:noAutofit/>
-          </a:bodyPr>
-          <a:lstStyle>
-            <a:lvl1pPr indent="0" algn="ctr" defTabSz="457200">
-              <a:lnSpc>
-                <a:spcPct val="100000"/>
-              </a:lnSpc>
-              <a:buNone/>
-              <a:tabLst>
-                <a:tab pos="0" algn="l"/>
-              </a:tabLst>
-              <a:defRPr lang="en-US" sz="4400" b="0" u="none" strike="noStrike">
-                <a:solidFill>
-                  <a:schemeClr val="dk1"/>
-                </a:solidFill>
-                <a:effectLst/>
-                <a:uFillTx/>
-                <a:latin typeface="Calibri"/>
-              </a:defRPr>
-            </a:lvl1pPr>
-          </a:lstStyle>
-          <a:p>
-            <a:pPr indent="0" algn="ctr" defTabSz="457200">
-              <a:lnSpc>
-                <a:spcPct val="100000"/>
-              </a:lnSpc>
-              <a:buNone/>
-              <a:tabLst>
-                <a:tab pos="0" algn="l"/>
-              </a:tabLst>
-            </a:pPr>
-            <a:r>
-              <a:rPr lang="en-US" sz="4400" b="0" u="none" strike="noStrike">
-                <a:solidFill>
-                  <a:schemeClr val="dk1"/>
-                </a:solidFill>
-                <a:effectLst/>
-                <a:uFillTx/>
-                <a:latin typeface="Calibri"/>
-              </a:rPr>
-              <a:t>Click to edit Master title style</a:t>
-            </a:r>
-            <a:endParaRPr lang="en-US" sz="4400" b="0" u="none" strike="noStrike">
-              <a:solidFill>
-                <a:schemeClr val="dk1"/>
-              </a:solidFill>
-              <a:effectLst/>
-              <a:uFillTx/>
-              <a:latin typeface="Calibri"/>
-            </a:endParaRPr>
-          </a:p>
-        </p:txBody>
-      </p:sp>
-      <p:sp>
-        <p:nvSpPr>
-          <p:cNvPr id="13" name="PlaceHolder 2"/>
-          <p:cNvSpPr>
-            <a:spLocks noGrp="1"/>
-          </p:cNvSpPr>
-          <p:nvPr>
-            <p:ph type="body"/>
-          </p:nvPr>
-        </p:nvSpPr>
-        <p:spPr>
-          <a:xfrm>
-            <a:off x="457200" y="1600200"/>
-            <a:ext cx="8227800" cy="4524120"/>
-          </a:xfrm>
-          <a:prstGeom prst="rect">
-            <a:avLst/>
-          </a:prstGeom>
-          <a:noFill/>
-          <a:ln w="0">
-            <a:noFill/>
-          </a:ln>
-        </p:spPr>
-        <p:txBody>
-          <a:bodyPr lIns="91440" tIns="45720" rIns="91440" bIns="45720" anchor="t" vert="eaVert">
-            <a:noAutofit/>
-          </a:bodyPr>
-          <a:lstStyle>
-            <a:lvl1pPr algn="l" defTabSz="457200">
-              <a:lnSpc>
-                <a:spcPct val="100000"/>
-              </a:lnSpc>
-              <a:spcBef>
-                <a:spcPts val="641"/>
-              </a:spcBef>
-              <a:buClr>
-                <a:srgbClr val="000000"/>
-              </a:buClr>
-              <a:buFont typeface="Arial"/>
-              <a:buChar char="•"/>
-              <a:defRPr lang="en-US" sz="3200" b="0" u="none" strike="noStrike">
-                <a:solidFill>
-                  <a:schemeClr val="dk1"/>
-                </a:solidFill>
-                <a:effectLst/>
-                <a:uFillTx/>
-                <a:latin typeface="Calibri"/>
-              </a:defRPr>
-            </a:lvl1pPr>
-            <a:lvl2pPr lvl="1" algn="l" defTabSz="457200">
-              <a:lnSpc>
-                <a:spcPct val="100000"/>
-              </a:lnSpc>
-              <a:spcBef>
-                <a:spcPts val="561"/>
-              </a:spcBef>
-              <a:buClr>
-                <a:srgbClr val="000000"/>
-              </a:buClr>
-              <a:buFont typeface="Arial"/>
-              <a:buChar char="–"/>
-              <a:defRPr lang="en-US" sz="2800" b="0" u="none" strike="noStrike">
-                <a:solidFill>
-                  <a:schemeClr val="dk1"/>
-                </a:solidFill>
-                <a:effectLst/>
-                <a:uFillTx/>
-                <a:latin typeface="Calibri"/>
-              </a:defRPr>
-            </a:lvl2pPr>
-            <a:lvl3pPr lvl="2" algn="l" defTabSz="457200">
-              <a:lnSpc>
-                <a:spcPct val="100000"/>
-              </a:lnSpc>
-              <a:spcBef>
-                <a:spcPts val="479"/>
-              </a:spcBef>
-              <a:buClr>
-                <a:srgbClr val="000000"/>
-              </a:buClr>
-              <a:buFont typeface="Arial"/>
-              <a:buChar char="•"/>
-              <a:defRPr lang="en-US" sz="2400" b="0" u="none" strike="noStrike">
-                <a:solidFill>
-                  <a:schemeClr val="dk1"/>
-                </a:solidFill>
-                <a:effectLst/>
-                <a:uFillTx/>
-                <a:latin typeface="Calibri"/>
-              </a:defRPr>
-            </a:lvl3pPr>
-            <a:lvl4pPr lvl="3" algn="l" defTabSz="457200">
-              <a:lnSpc>
-                <a:spcPct val="100000"/>
-              </a:lnSpc>
-              <a:spcBef>
-                <a:spcPts val="400"/>
-              </a:spcBef>
-              <a:buClr>
-                <a:srgbClr val="000000"/>
-              </a:buClr>
-              <a:buFont typeface="Arial"/>
-              <a:buChar char="–"/>
-              <a:defRPr lang="en-US" sz="2000" b="0" u="none" strike="noStrike">
-                <a:solidFill>
-                  <a:schemeClr val="dk1"/>
-                </a:solidFill>
-                <a:effectLst/>
-                <a:uFillTx/>
-                <a:latin typeface="Calibri"/>
-              </a:defRPr>
-            </a:lvl4pPr>
-            <a:lvl5pPr lvl="4" algn="l" defTabSz="457200">
-              <a:lnSpc>
-                <a:spcPct val="100000"/>
-              </a:lnSpc>
-              <a:spcBef>
-                <a:spcPts val="400"/>
-              </a:spcBef>
-              <a:buClr>
-                <a:srgbClr val="000000"/>
-              </a:buClr>
-              <a:buFont typeface="Arial"/>
-              <a:buChar char="»"/>
-              <a:defRPr lang="en-US" sz="2000" b="0" u="none" strike="noStrike">
-                <a:solidFill>
-                  <a:schemeClr val="dk1"/>
-                </a:solidFill>
-                <a:effectLst/>
-                <a:uFillTx/>
-                <a:latin typeface="Calibri"/>
-              </a:defRPr>
-            </a:lvl5pPr>
-          </a:lstStyle>
-          <a:p>
-            <a:pPr marL="343080" indent="-343080" algn="l" defTabSz="457200">
-              <a:lnSpc>
-                <a:spcPct val="100000"/>
-              </a:lnSpc>
-              <a:spcBef>
-                <a:spcPts val="641"/>
-              </a:spcBef>
-              <a:buClr>
-                <a:srgbClr val="000000"/>
-              </a:buClr>
-              <a:buFont typeface="Arial"/>
-              <a:buChar char="•"/>
-            </a:pPr>
-            <a:r>
-              <a:rPr lang="en-US" sz="3200" b="0" u="none" strike="noStrike">
-                <a:solidFill>
-                  <a:schemeClr val="dk1"/>
-                </a:solidFill>
-                <a:effectLst/>
-                <a:uFillTx/>
-                <a:latin typeface="Calibri"/>
-              </a:rPr>
-              <a:t>Click to edit Master text styles</a:t>
-            </a:r>
-            <a:endParaRPr lang="en-US" sz="3200" b="0" u="none" strike="noStrike">
-              <a:solidFill>
-                <a:schemeClr val="dk1"/>
-              </a:solidFill>
-              <a:effectLst/>
-              <a:uFillTx/>
-              <a:latin typeface="Calibri"/>
-            </a:endParaRPr>
-          </a:p>
-          <a:p>
-            <a:pPr marL="743040" lvl="1" indent="-285840" algn="l" defTabSz="457200">
-              <a:lnSpc>
-                <a:spcPct val="100000"/>
-              </a:lnSpc>
-              <a:spcBef>
-                <a:spcPts val="561"/>
-              </a:spcBef>
-              <a:buClr>
-                <a:srgbClr val="000000"/>
-              </a:buClr>
-              <a:buFont typeface="Arial"/>
-              <a:buChar char="–"/>
-            </a:pPr>
-            <a:r>
-              <a:rPr lang="en-US" sz="2800" b="0" u="none" strike="noStrike">
-                <a:solidFill>
-                  <a:schemeClr val="dk1"/>
-                </a:solidFill>
-                <a:effectLst/>
-                <a:uFillTx/>
-                <a:latin typeface="Calibri"/>
-              </a:rPr>
-              <a:t>Second level</a:t>
-            </a:r>
-            <a:endParaRPr lang="en-US" sz="2800" b="0" u="none" strike="noStrike">
-              <a:solidFill>
-                <a:schemeClr val="dk1"/>
-              </a:solidFill>
-              <a:effectLst/>
-              <a:uFillTx/>
-              <a:latin typeface="Calibri"/>
-            </a:endParaRPr>
-          </a:p>
-          <a:p>
-            <a:pPr marL="1143000" lvl="2" indent="-228600" algn="l" defTabSz="457200">
-              <a:lnSpc>
-                <a:spcPct val="100000"/>
-              </a:lnSpc>
-              <a:spcBef>
-                <a:spcPts val="479"/>
-              </a:spcBef>
-              <a:buClr>
-                <a:srgbClr val="000000"/>
-              </a:buClr>
-              <a:buFont typeface="Arial"/>
-              <a:buChar char="•"/>
-            </a:pPr>
-            <a:r>
-              <a:rPr lang="en-US" sz="2400" b="0" u="none" strike="noStrike">
-                <a:solidFill>
-                  <a:schemeClr val="dk1"/>
-                </a:solidFill>
-                <a:effectLst/>
-                <a:uFillTx/>
-                <a:latin typeface="Calibri"/>
-              </a:rPr>
-              <a:t>Third level</a:t>
-            </a:r>
-            <a:endParaRPr lang="en-US" sz="2400" b="0" u="none" strike="noStrike">
-              <a:solidFill>
-                <a:schemeClr val="dk1"/>
-              </a:solidFill>
-              <a:effectLst/>
-              <a:uFillTx/>
-              <a:latin typeface="Calibri"/>
-            </a:endParaRPr>
-          </a:p>
-          <a:p>
-            <a:pPr marL="1600200" lvl="3" indent="-228600" algn="l" defTabSz="457200">
-              <a:lnSpc>
-                <a:spcPct val="100000"/>
-              </a:lnSpc>
-              <a:spcBef>
-                <a:spcPts val="400"/>
-              </a:spcBef>
-              <a:buClr>
-                <a:srgbClr val="000000"/>
-              </a:buClr>
-              <a:buFont typeface="Arial"/>
-              <a:buChar char="–"/>
-            </a:pPr>
-            <a:r>
-              <a:rPr lang="en-US" sz="2000" b="0" u="none" strike="noStrike">
-                <a:solidFill>
-                  <a:schemeClr val="dk1"/>
-                </a:solidFill>
-                <a:effectLst/>
-                <a:uFillTx/>
-                <a:latin typeface="Calibri"/>
-              </a:rPr>
-              <a:t>Fourth level</a:t>
-            </a:r>
-            <a:endParaRPr lang="en-US" sz="2000" b="0" u="none" strike="noStrike">
-              <a:solidFill>
-                <a:schemeClr val="dk1"/>
-              </a:solidFill>
-              <a:effectLst/>
-              <a:uFillTx/>
-              <a:latin typeface="Calibri"/>
-            </a:endParaRPr>
-          </a:p>
-          <a:p>
-            <a:pPr marL="2057400" lvl="4" indent="-228600" algn="l" defTabSz="457200">
-              <a:lnSpc>
-                <a:spcPct val="100000"/>
-              </a:lnSpc>
-              <a:spcBef>
-                <a:spcPts val="400"/>
-              </a:spcBef>
-              <a:buClr>
-                <a:srgbClr val="000000"/>
-              </a:buClr>
-              <a:buFont typeface="Arial"/>
-              <a:buChar char="»"/>
-            </a:pPr>
-            <a:r>
-              <a:rPr lang="en-US" sz="2000" b="0" u="none" strike="noStrike">
-                <a:solidFill>
-                  <a:schemeClr val="dk1"/>
-                </a:solidFill>
-                <a:effectLst/>
-                <a:uFillTx/>
-                <a:latin typeface="Calibri"/>
-              </a:rPr>
-              <a:t>Fifth level</a:t>
-            </a:r>
-            <a:endParaRPr lang="en-US" sz="2000" b="0" u="none" strike="noStrike">
-              <a:solidFill>
-                <a:schemeClr val="dk1"/>
-              </a:solidFill>
-              <a:effectLst/>
-              <a:uFillTx/>
-              <a:latin typeface="Calibri"/>
-            </a:endParaRPr>
-          </a:p>
-        </p:txBody>
-      </p:sp>
-      <p:sp>
-        <p:nvSpPr>
-          <p:cNvPr id="14" name="PlaceHolder 3"/>
-          <p:cNvSpPr>
-            <a:spLocks noGrp="1"/>
-          </p:cNvSpPr>
-          <p:nvPr>
-            <p:ph type="dt" idx="7"/>
-          </p:nvPr>
-        </p:nvSpPr>
-        <p:spPr>
-          <a:xfrm>
-            <a:off x="457200" y="6356520"/>
-            <a:ext cx="2131920" cy="363240"/>
-          </a:xfrm>
-          <a:prstGeom prst="rect">
-            <a:avLst/>
-          </a:prstGeom>
-          <a:noFill/>
-          <a:ln w="0">
-            <a:noFill/>
-          </a:ln>
-        </p:spPr>
-        <p:txBody>
-          <a:bodyPr lIns="91440" tIns="45720" rIns="91440" bIns="45720" anchor="ctr">
-            <a:noAutofit/>
-          </a:bodyPr>
-          <a:lstStyle>
-            <a:lvl1pPr indent="0" algn="l" defTabSz="457200">
-              <a:lnSpc>
-                <a:spcPct val="100000"/>
-              </a:lnSpc>
-              <a:buNone/>
-              <a:tabLst>
-                <a:tab pos="0" algn="l"/>
-              </a:tabLst>
-              <a:defRPr lang="en-US" sz="1200" b="0" u="none" strike="noStrike">
-                <a:solidFill>
-                  <a:schemeClr val="dk1">
-                    <a:tint val="75000"/>
-                  </a:schemeClr>
-                </a:solidFill>
-                <a:effectLst/>
-                <a:uFillTx/>
-                <a:latin typeface="Calibri"/>
-              </a:defRPr>
-            </a:lvl1pPr>
-          </a:lstStyle>
-          <a:p>
-            <a:pPr indent="0" algn="l" defTabSz="457200">
-              <a:lnSpc>
-                <a:spcPct val="100000"/>
-              </a:lnSpc>
-              <a:buNone/>
-              <a:tabLst>
-                <a:tab pos="0" algn="l"/>
-              </a:tabLst>
-            </a:pPr>
-            <a:r>
-              <a:rPr lang="en-US" sz="1200" b="0" u="none" strike="noStrike">
-                <a:solidFill>
-                  <a:schemeClr val="dk1">
-                    <a:tint val="75000"/>
-                  </a:schemeClr>
-                </a:solidFill>
-                <a:effectLst/>
-                <a:uFillTx/>
-                <a:latin typeface="Calibri"/>
-              </a:rPr>
-              <a:t>&lt;date/time&gt;</a:t>
-            </a:r>
-            <a:endParaRPr lang="en-US" sz="1200" b="0" u="none" strike="noStrike">
-              <a:solidFill>
-                <a:srgbClr val="000000"/>
-              </a:solidFill>
-              <a:effectLst/>
-              <a:uFillTx/>
-              <a:latin typeface="Times New Roman"/>
-            </a:endParaRPr>
-          </a:p>
-        </p:txBody>
-      </p:sp>
-      <p:sp>
-        <p:nvSpPr>
-          <p:cNvPr id="15" name="PlaceHolder 4"/>
-          <p:cNvSpPr>
-            <a:spLocks noGrp="1"/>
-          </p:cNvSpPr>
-          <p:nvPr>
-            <p:ph type="ftr" idx="8"/>
-          </p:nvPr>
-        </p:nvSpPr>
-        <p:spPr>
-          <a:xfrm>
-            <a:off x="3124080" y="6356520"/>
-            <a:ext cx="2893680" cy="363240"/>
-          </a:xfrm>
-          <a:prstGeom prst="rect">
-            <a:avLst/>
-          </a:prstGeom>
-          <a:noFill/>
-          <a:ln w="0">
-            <a:noFill/>
-          </a:ln>
-        </p:spPr>
-        <p:txBody>
-          <a:bodyPr lIns="91440" tIns="45720" rIns="91440" bIns="45720" anchor="ctr">
-            <a:noAutofit/>
-          </a:bodyPr>
-          <a:lstStyle>
-            <a:lvl1pPr indent="0" algn="ctr">
-              <a:lnSpc>
-                <a:spcPct val="100000"/>
-              </a:lnSpc>
-              <a:buNone/>
-              <a:tabLst>
-                <a:tab pos="0" algn="l"/>
-              </a:tabLst>
-              <a:defRPr lang="en-US" sz="1400" b="0" u="none" strike="noStrike">
-                <a:solidFill>
-                  <a:srgbClr val="000000"/>
-                </a:solidFill>
-                <a:effectLst/>
-                <a:uFillTx/>
-                <a:latin typeface="Times New Roman"/>
-              </a:defRPr>
-            </a:lvl1pPr>
-          </a:lstStyle>
-          <a:p>
-            <a:pPr indent="0" algn="ctr">
-              <a:lnSpc>
-                <a:spcPct val="100000"/>
-              </a:lnSpc>
-              <a:buNone/>
-              <a:tabLst>
-                <a:tab pos="0" algn="l"/>
-              </a:tabLst>
-            </a:pPr>
-            <a:r>
-              <a:rPr lang="en-US" sz="1400" b="0" u="none" strike="noStrike">
-                <a:solidFill>
-                  <a:srgbClr val="000000"/>
-                </a:solidFill>
-                <a:effectLst/>
-                <a:uFillTx/>
-                <a:latin typeface="Times New Roman"/>
-              </a:rPr>
-              <a:t>&lt;footer&gt;</a:t>
-            </a:r>
-            <a:endParaRPr lang="en-US" sz="1400" b="0" u="none" strike="noStrike">
-              <a:solidFill>
-                <a:srgbClr val="000000"/>
-              </a:solidFill>
-              <a:effectLst/>
-              <a:uFillTx/>
-              <a:latin typeface="Times New Roman"/>
-            </a:endParaRPr>
-          </a:p>
-        </p:txBody>
-      </p:sp>
-      <p:sp>
-        <p:nvSpPr>
-          <p:cNvPr id="16" name="PlaceHolder 5"/>
-          <p:cNvSpPr>
-            <a:spLocks noGrp="1"/>
-          </p:cNvSpPr>
-          <p:nvPr>
-            <p:ph type="sldNum" idx="9"/>
-          </p:nvPr>
-        </p:nvSpPr>
-        <p:spPr>
-          <a:xfrm>
-            <a:off x="6553080" y="6356520"/>
-            <a:ext cx="2131920" cy="363240"/>
-          </a:xfrm>
-          <a:prstGeom prst="rect">
-            <a:avLst/>
-          </a:prstGeom>
-          <a:noFill/>
-          <a:ln w="0">
-            <a:noFill/>
-          </a:ln>
-        </p:spPr>
-        <p:txBody>
-          <a:bodyPr lIns="91440" tIns="45720" rIns="91440" bIns="45720" anchor="ctr">
-            <a:noAutofit/>
-          </a:bodyPr>
-          <a:lstStyle>
-            <a:lvl1pPr indent="0" algn="r" defTabSz="457200">
-              <a:lnSpc>
-                <a:spcPct val="100000"/>
-              </a:lnSpc>
-              <a:buNone/>
-              <a:tabLst>
-                <a:tab pos="0" algn="l"/>
-              </a:tabLst>
-              <a:defRPr lang="en-US" sz="1200" b="0" u="none" strike="noStrike">
-                <a:solidFill>
-                  <a:schemeClr val="dk1">
-                    <a:tint val="75000"/>
-                  </a:schemeClr>
-                </a:solidFill>
-                <a:effectLst/>
-                <a:uFillTx/>
-                <a:latin typeface="Calibri"/>
-              </a:defRPr>
-            </a:lvl1pPr>
-          </a:lstStyle>
-          <a:p>
-            <a:pPr indent="0" algn="r" defTabSz="457200">
-              <a:lnSpc>
-                <a:spcPct val="100000"/>
-              </a:lnSpc>
-              <a:buNone/>
-              <a:tabLst>
-                <a:tab pos="0" algn="l"/>
-              </a:tabLst>
-            </a:pPr>
-            <a:fld id="{17F4EF6D-C60A-4611-B42D-F64DF3ECDC4C}" type="slidenum">
+            <a:fld id="{F425E3B4-9CC0-4CAD-A57B-B0B10F19302D}" type="slidenum">
               <a:rPr lang="en-US" sz="1200" b="0" u="none" strike="noStrike">
                 <a:solidFill>
                   <a:schemeClr val="dk1">
@@ -3461,8 +4053,8 @@
 </file>
 
 <file path=ppt/slideLayouts/slideLayout4.xml><?xml version="1.0" encoding="utf-8"?>
-<p:sldLayout xmlns:a="http://schemas.openxmlformats.org/drawingml/2006/main" xmlns:p="http://schemas.openxmlformats.org/presentationml/2006/main" xmlns:r="http://schemas.openxmlformats.org/officeDocument/2006/relationships" xmlns:p14="http://schemas.microsoft.com/office/powerpoint/2010/main" xmlns:p15="http://schemas.microsoft.com/office/powerpoint/2012/main" xmlns:mc="http://schemas.openxmlformats.org/markup-compatibility/2006" type="vertTitleAndTx" preserve="1">
-  <p:cSld name="Vertical Title and Text">
+<p:sldLayout xmlns:a="http://schemas.openxmlformats.org/drawingml/2006/main" xmlns:p="http://schemas.openxmlformats.org/presentationml/2006/main" xmlns:r="http://schemas.openxmlformats.org/officeDocument/2006/relationships" xmlns:p14="http://schemas.microsoft.com/office/powerpoint/2010/main" xmlns:p15="http://schemas.microsoft.com/office/powerpoint/2012/main" xmlns:mc="http://schemas.openxmlformats.org/markup-compatibility/2006" type="blank" preserve="1">
+  <p:cSld name="Picture with Caption">
     <p:bg>
       <p:bgPr>
         <a:solidFill>
@@ -3496,8 +4088,8 @@
         </p:nvSpPr>
         <p:spPr>
           <a:xfrm>
-            <a:off x="6629400" y="274680"/>
-            <a:ext cx="2055600" cy="5849640"/>
+            <a:off x="1792440" y="4800600"/>
+            <a:ext cx="5484240" cy="564480"/>
           </a:xfrm>
           <a:prstGeom prst="rect">
             <a:avLst/>
@@ -3508,11 +4100,11 @@
           </a:ln>
         </p:spPr>
         <p:txBody>
-          <a:bodyPr lIns="91440" tIns="45720" rIns="91440" bIns="45720" anchor="ctr" vert="eaVert">
+          <a:bodyPr lIns="91440" tIns="45720" rIns="91440" bIns="45720" anchor="b">
             <a:noAutofit/>
           </a:bodyPr>
           <a:lstStyle>
-            <a:lvl1pPr indent="0" algn="ctr" defTabSz="457200">
+            <a:lvl1pPr indent="0" algn="l" defTabSz="457200">
               <a:lnSpc>
                 <a:spcPct val="100000"/>
               </a:lnSpc>
@@ -3520,7 +4112,7 @@
               <a:tabLst>
                 <a:tab pos="0" algn="l"/>
               </a:tabLst>
-              <a:defRPr lang="en-US" sz="4400" b="0" u="none" strike="noStrike">
+              <a:defRPr lang="en-US" sz="2000" b="1" u="none" strike="noStrike">
                 <a:solidFill>
                   <a:schemeClr val="dk1"/>
                 </a:solidFill>
@@ -3531,7 +4123,7 @@
             </a:lvl1pPr>
           </a:lstStyle>
           <a:p>
-            <a:pPr indent="0" algn="ctr" defTabSz="457200">
+            <a:pPr indent="0" algn="l" defTabSz="457200">
               <a:lnSpc>
                 <a:spcPct val="100000"/>
               </a:lnSpc>
@@ -3541,7 +4133,7 @@
               </a:tabLst>
             </a:pPr>
             <a:r>
-              <a:rPr lang="en-US" sz="4400" b="0" u="none" strike="noStrike">
+              <a:rPr lang="en-US" sz="2000" b="1" u="none" strike="noStrike">
                 <a:solidFill>
                   <a:schemeClr val="dk1"/>
                 </a:solidFill>
@@ -3551,7 +4143,7 @@
               </a:rPr>
               <a:t>Click to edit Master title style</a:t>
             </a:r>
-            <a:endParaRPr lang="en-US" sz="4400" b="0" u="none" strike="noStrike">
+            <a:endParaRPr lang="en-US" sz="2000" b="1" u="none" strike="noStrike">
               <a:solidFill>
                 <a:schemeClr val="dk1"/>
               </a:solidFill>
@@ -3574,8 +4166,8 @@
         </p:nvSpPr>
         <p:spPr>
           <a:xfrm>
-            <a:off x="457200" y="274680"/>
-            <a:ext cx="6018120" cy="5849640"/>
+            <a:off x="1792440" y="612720"/>
+            <a:ext cx="5484240" cy="4112640"/>
           </a:xfrm>
           <a:prstGeom prst="rect">
             <a:avLst/>
@@ -3586,7 +4178,7 @@
           </a:ln>
         </p:spPr>
         <p:txBody>
-          <a:bodyPr lIns="91440" tIns="45720" rIns="91440" bIns="45720" anchor="t" vert="eaVert">
+          <a:bodyPr lIns="90000" tIns="45000" rIns="90000" bIns="45000" anchor="t">
             <a:noAutofit/>
           </a:bodyPr>
           <a:lstStyle>
@@ -3595,13 +4187,16 @@
                 <a:spcPct val="100000"/>
               </a:lnSpc>
               <a:spcBef>
-                <a:spcPts val="641"/>
+                <a:spcPts val="281"/>
               </a:spcBef>
               <a:buClr>
                 <a:srgbClr val="000000"/>
               </a:buClr>
               <a:buFont typeface="Arial"/>
               <a:buChar char="•"/>
+              <a:tabLst>
+                <a:tab pos="0" algn="l"/>
+              </a:tabLst>
               <a:defRPr lang="en-US" sz="3200" b="0" u="none" strike="noStrike">
                 <a:solidFill>
                   <a:schemeClr val="dk1"/>
@@ -3621,9 +4216,13 @@
               <a:buClr>
                 <a:srgbClr val="000000"/>
               </a:buClr>
-              <a:buFont typeface="Arial"/>
-              <a:buChar char="–"/>
-              <a:defRPr lang="en-US" sz="2800" b="0" u="none" strike="noStrike">
+              <a:buSzPct val="75000"/>
+              <a:buFont typeface="Symbol" charset="2"/>
+              <a:buChar char=""/>
+              <a:tabLst>
+                <a:tab pos="0" algn="l"/>
+              </a:tabLst>
+              <a:defRPr lang="en-US" sz="3200" b="0" u="none" strike="noStrike">
                 <a:solidFill>
                   <a:schemeClr val="dk1"/>
                 </a:solidFill>
@@ -3642,9 +4241,13 @@
               <a:buClr>
                 <a:srgbClr val="000000"/>
               </a:buClr>
-              <a:buFont typeface="Arial"/>
-              <a:buChar char="•"/>
-              <a:defRPr lang="en-US" sz="2400" b="0" u="none" strike="noStrike">
+              <a:buSzPct val="45000"/>
+              <a:buFont typeface="Wingdings" charset="2"/>
+              <a:buChar char=""/>
+              <a:tabLst>
+                <a:tab pos="0" algn="l"/>
+              </a:tabLst>
+              <a:defRPr lang="en-US" sz="3200" b="0" u="none" strike="noStrike">
                 <a:solidFill>
                   <a:schemeClr val="dk1"/>
                 </a:solidFill>
@@ -3663,9 +4266,13 @@
               <a:buClr>
                 <a:srgbClr val="000000"/>
               </a:buClr>
-              <a:buFont typeface="Arial"/>
-              <a:buChar char="–"/>
-              <a:defRPr lang="en-US" sz="2000" b="0" u="none" strike="noStrike">
+              <a:buSzPct val="75000"/>
+              <a:buFont typeface="Symbol" charset="2"/>
+              <a:buChar char=""/>
+              <a:tabLst>
+                <a:tab pos="0" algn="l"/>
+              </a:tabLst>
+              <a:defRPr lang="en-US" sz="3200" b="0" u="none" strike="noStrike">
                 <a:solidFill>
                   <a:schemeClr val="dk1"/>
                 </a:solidFill>
@@ -3684,9 +4291,13 @@
               <a:buClr>
                 <a:srgbClr val="000000"/>
               </a:buClr>
-              <a:buFont typeface="Arial"/>
-              <a:buChar char="»"/>
-              <a:defRPr lang="en-US" sz="2000" b="0" u="none" strike="noStrike">
+              <a:buSzPct val="45000"/>
+              <a:buFont typeface="Wingdings" charset="2"/>
+              <a:buChar char=""/>
+              <a:tabLst>
+                <a:tab pos="0" algn="l"/>
+              </a:tabLst>
+              <a:defRPr lang="en-US" sz="3200" b="0" u="none" strike="noStrike">
                 <a:solidFill>
                   <a:schemeClr val="dk1"/>
                 </a:solidFill>
@@ -3695,20 +4306,73 @@
                 <a:latin typeface="Calibri"/>
               </a:defRPr>
             </a:lvl5pPr>
+            <a:lvl6pPr lvl="5" algn="l" defTabSz="457200">
+              <a:lnSpc>
+                <a:spcPct val="100000"/>
+              </a:lnSpc>
+              <a:spcBef>
+                <a:spcPts val="283"/>
+              </a:spcBef>
+              <a:buClr>
+                <a:srgbClr val="000000"/>
+              </a:buClr>
+              <a:buSzPct val="45000"/>
+              <a:buFont typeface="Wingdings" charset="2"/>
+              <a:buChar char=""/>
+              <a:tabLst>
+                <a:tab pos="0" algn="l"/>
+              </a:tabLst>
+              <a:defRPr lang="en-US" sz="3200" b="0" u="none" strike="noStrike">
+                <a:solidFill>
+                  <a:schemeClr val="dk1"/>
+                </a:solidFill>
+                <a:effectLst/>
+                <a:uFillTx/>
+                <a:latin typeface="Calibri"/>
+              </a:defRPr>
+            </a:lvl6pPr>
+            <a:lvl7pPr lvl="6" algn="l" defTabSz="457200">
+              <a:lnSpc>
+                <a:spcPct val="100000"/>
+              </a:lnSpc>
+              <a:spcBef>
+                <a:spcPts val="283"/>
+              </a:spcBef>
+              <a:buClr>
+                <a:srgbClr val="000000"/>
+              </a:buClr>
+              <a:buSzPct val="45000"/>
+              <a:buFont typeface="Wingdings" charset="2"/>
+              <a:buChar char=""/>
+              <a:tabLst>
+                <a:tab pos="0" algn="l"/>
+              </a:tabLst>
+              <a:defRPr lang="en-US" sz="3200" b="0" u="none" strike="noStrike">
+                <a:solidFill>
+                  <a:schemeClr val="dk1"/>
+                </a:solidFill>
+                <a:effectLst/>
+                <a:uFillTx/>
+                <a:latin typeface="Calibri"/>
+              </a:defRPr>
+            </a:lvl7pPr>
           </a:lstStyle>
           <a:p>
-            <a:pPr marL="343080" indent="-343080" algn="l" defTabSz="457200">
+            <a:pPr marL="432000" indent="-324000" algn="l" defTabSz="457200">
               <a:lnSpc>
                 <a:spcPct val="100000"/>
               </a:lnSpc>
               <a:spcBef>
-                <a:spcPts val="641"/>
+                <a:spcPts val="281"/>
               </a:spcBef>
               <a:buClr>
                 <a:srgbClr val="000000"/>
               </a:buClr>
               <a:buFont typeface="Arial"/>
               <a:buChar char="•"/>
+              <a:tabLst>
+                <a:tab pos="0" algn="l"/>
+              </a:tabLst>
             </a:pPr>
             <a:r>
               <a:rPr lang="en-US" sz="3200" b="0" u="none" strike="noStrike">
@@ -3719,7 +4383,7 @@
                 <a:uFillTx/>
                 <a:latin typeface="Calibri"/>
               </a:rPr>
-              <a:t>Click to edit Master text styles</a:t>
+              <a:t>Click to edit the outline text format</a:t>
             </a:r>
             <a:endParaRPr lang="en-US" sz="3200" b="0" u="none" strike="noStrike">
               <a:solidFill>
@@ -3731,7 +4395,7 @@
             </a:endParaRPr>
           </a:p>
           <a:p>
-            <a:pPr marL="743040" lvl="1" indent="-285840" algn="l" defTabSz="457200">
+            <a:pPr marL="457200" lvl="1" indent="-324000" algn="l" defTabSz="457200">
               <a:lnSpc>
                 <a:spcPct val="100000"/>
               </a:lnSpc>
@@ -3741,11 +4405,15 @@
               <a:buClr>
                 <a:srgbClr val="000000"/>
               </a:buClr>
-              <a:buFont typeface="Arial"/>
-              <a:buChar char="–"/>
-            </a:pPr>
-            <a:r>
-              <a:rPr lang="en-US" sz="2800" b="0" u="none" strike="noStrike">
+              <a:buSzPct val="75000"/>
+              <a:buFont typeface="Symbol" charset="2"/>
+              <a:buChar char=""/>
+              <a:tabLst>
+                <a:tab pos="0" algn="l"/>
+              </a:tabLst>
+            </a:pPr>
+            <a:r>
+              <a:rPr lang="en-US" sz="3200" b="0" u="none" strike="noStrike">
                 <a:solidFill>
                   <a:schemeClr val="dk1"/>
                 </a:solidFill>
@@ -3753,9 +4421,9 @@
                 <a:uFillTx/>
                 <a:latin typeface="Calibri"/>
               </a:rPr>
-              <a:t>Second level</a:t>
-            </a:r>
-            <a:endParaRPr lang="en-US" sz="2800" b="0" u="none" strike="noStrike">
+              <a:t>Second Outline Level</a:t>
+            </a:r>
+            <a:endParaRPr lang="en-US" sz="3200" b="0" u="none" strike="noStrike">
               <a:solidFill>
                 <a:schemeClr val="dk1"/>
               </a:solidFill>
@@ -3765,7 +4433,7 @@
             </a:endParaRPr>
           </a:p>
           <a:p>
-            <a:pPr marL="1143000" lvl="2" indent="-228600" algn="l" defTabSz="457200">
+            <a:pPr marL="914400" lvl="2" indent="-288000" algn="l" defTabSz="457200">
               <a:lnSpc>
                 <a:spcPct val="100000"/>
               </a:lnSpc>
@@ -3775,11 +4443,15 @@
               <a:buClr>
                 <a:srgbClr val="000000"/>
               </a:buClr>
-              <a:buFont typeface="Arial"/>
-              <a:buChar char="•"/>
-            </a:pPr>
-            <a:r>
-              <a:rPr lang="en-US" sz="2400" b="0" u="none" strike="noStrike">
+              <a:buSzPct val="45000"/>
+              <a:buFont typeface="Wingdings" charset="2"/>
+              <a:buChar char=""/>
+              <a:tabLst>
+                <a:tab pos="0" algn="l"/>
+              </a:tabLst>
+            </a:pPr>
+            <a:r>
+              <a:rPr lang="en-US" sz="3200" b="0" u="none" strike="noStrike">
                 <a:solidFill>
                   <a:schemeClr val="dk1"/>
                 </a:solidFill>
@@ -3787,9 +4459,9 @@
                 <a:uFillTx/>
                 <a:latin typeface="Calibri"/>
               </a:rPr>
-              <a:t>Third level</a:t>
-            </a:r>
-            <a:endParaRPr lang="en-US" sz="2400" b="0" u="none" strike="noStrike">
+              <a:t>Third Outline Level</a:t>
+            </a:r>
+            <a:endParaRPr lang="en-US" sz="3200" b="0" u="none" strike="noStrike">
               <a:solidFill>
                 <a:schemeClr val="dk1"/>
               </a:solidFill>
@@ -3799,7 +4471,7 @@
             </a:endParaRPr>
           </a:p>
           <a:p>
-            <a:pPr marL="1600200" lvl="3" indent="-228600" algn="l" defTabSz="457200">
+            <a:pPr marL="1371600" lvl="3" indent="-216000" algn="l" defTabSz="457200">
               <a:lnSpc>
                 <a:spcPct val="100000"/>
               </a:lnSpc>
@@ -3809,11 +4481,15 @@
               <a:buClr>
                 <a:srgbClr val="000000"/>
               </a:buClr>
-              <a:buFont typeface="Arial"/>
-              <a:buChar char="–"/>
-            </a:pPr>
-            <a:r>
-              <a:rPr lang="en-US" sz="2000" b="0" u="none" strike="noStrike">
+              <a:buSzPct val="75000"/>
+              <a:buFont typeface="Symbol" charset="2"/>
+              <a:buChar char=""/>
+              <a:tabLst>
+                <a:tab pos="0" algn="l"/>
+              </a:tabLst>
+            </a:pPr>
+            <a:r>
+              <a:rPr lang="en-US" sz="3200" b="0" u="none" strike="noStrike">
                 <a:solidFill>
                   <a:schemeClr val="dk1"/>
                 </a:solidFill>
@@ -3821,9 +4497,9 @@
                 <a:uFillTx/>
                 <a:latin typeface="Calibri"/>
               </a:rPr>
-              <a:t>Fourth level</a:t>
-            </a:r>
-            <a:endParaRPr lang="en-US" sz="2000" b="0" u="none" strike="noStrike">
+              <a:t>Fourth Outline Level</a:t>
+            </a:r>
+            <a:endParaRPr lang="en-US" sz="3200" b="0" u="none" strike="noStrike">
               <a:solidFill>
                 <a:schemeClr val="dk1"/>
               </a:solidFill>
@@ -3833,7 +4509,7 @@
             </a:endParaRPr>
           </a:p>
           <a:p>
-            <a:pPr marL="2057400" lvl="4" indent="-228600" algn="l" defTabSz="457200">
+            <a:pPr marL="1828800" lvl="4" indent="-216000" algn="l" defTabSz="457200">
               <a:lnSpc>
                 <a:spcPct val="100000"/>
               </a:lnSpc>
@@ -3843,11 +4519,15 @@
               <a:buClr>
                 <a:srgbClr val="000000"/>
               </a:buClr>
-              <a:buFont typeface="Arial"/>
-              <a:buChar char="»"/>
-            </a:pPr>
-            <a:r>
-              <a:rPr lang="en-US" sz="2000" b="0" u="none" strike="noStrike">
+              <a:buSzPct val="45000"/>
+              <a:buFont typeface="Wingdings" charset="2"/>
+              <a:buChar char=""/>
+              <a:tabLst>
+                <a:tab pos="0" algn="l"/>
+              </a:tabLst>
+            </a:pPr>
+            <a:r>
+              <a:rPr lang="en-US" sz="3200" b="0" u="none" strike="noStrike">
                 <a:solidFill>
                   <a:schemeClr val="dk1"/>
                 </a:solidFill>
@@ -3855,9 +4535,85 @@
                 <a:uFillTx/>
                 <a:latin typeface="Calibri"/>
               </a:rPr>
-              <a:t>Fifth level</a:t>
-            </a:r>
-            <a:endParaRPr lang="en-US" sz="2000" b="0" u="none" strike="noStrike">
+              <a:t>Fifth Outline Level</a:t>
+            </a:r>
+            <a:endParaRPr lang="en-US" sz="3200" b="0" u="none" strike="noStrike">
+              <a:solidFill>
+                <a:schemeClr val="dk1"/>
+              </a:solidFill>
+              <a:effectLst/>
+              <a:uFillTx/>
+              <a:latin typeface="Calibri"/>
+            </a:endParaRPr>
+          </a:p>
+          <a:p>
+            <a:pPr marL="2286000" lvl="5" indent="-216000" algn="l" defTabSz="457200">
+              <a:lnSpc>
+                <a:spcPct val="100000"/>
+              </a:lnSpc>
+              <a:spcBef>
+                <a:spcPts val="283"/>
+              </a:spcBef>
+              <a:buClr>
+                <a:srgbClr val="000000"/>
+              </a:buClr>
+              <a:buSzPct val="45000"/>
+              <a:buFont typeface="Wingdings" charset="2"/>
+              <a:buChar char=""/>
+              <a:tabLst>
+                <a:tab pos="0" algn="l"/>
+              </a:tabLst>
+            </a:pPr>
+            <a:r>
+              <a:rPr lang="en-US" sz="3200" b="0" u="none" strike="noStrike">
+                <a:solidFill>
+                  <a:schemeClr val="dk1"/>
+                </a:solidFill>
+                <a:effectLst/>
+                <a:uFillTx/>
+                <a:latin typeface="Calibri"/>
+              </a:rPr>
+              <a:t>Sixth Outline Level</a:t>
+            </a:r>
+            <a:endParaRPr lang="en-US" sz="3200" b="0" u="none" strike="noStrike">
+              <a:solidFill>
+                <a:schemeClr val="dk1"/>
+              </a:solidFill>
+              <a:effectLst/>
+              <a:uFillTx/>
+              <a:latin typeface="Calibri"/>
+            </a:endParaRPr>
+          </a:p>
+          <a:p>
+            <a:pPr marL="2743200" lvl="6" indent="-216000" algn="l" defTabSz="457200">
+              <a:lnSpc>
+                <a:spcPct val="100000"/>
+              </a:lnSpc>
+              <a:spcBef>
+                <a:spcPts val="283"/>
+              </a:spcBef>
+              <a:buClr>
+                <a:srgbClr val="000000"/>
+              </a:buClr>
+              <a:buSzPct val="45000"/>
+              <a:buFont typeface="Wingdings" charset="2"/>
+              <a:buChar char=""/>
+              <a:tabLst>
+                <a:tab pos="0" algn="l"/>
+              </a:tabLst>
+            </a:pPr>
+            <a:r>
+              <a:rPr lang="en-US" sz="3200" b="0" u="none" strike="noStrike">
+                <a:solidFill>
+                  <a:schemeClr val="dk1"/>
+                </a:solidFill>
+                <a:effectLst/>
+                <a:uFillTx/>
+                <a:latin typeface="Calibri"/>
+              </a:rPr>
+              <a:t>Seventh Outline Level</a:t>
+            </a:r>
+            <a:endParaRPr lang="en-US" sz="3200" b="0" u="none" strike="noStrike">
               <a:solidFill>
                 <a:schemeClr val="dk1"/>
               </a:solidFill>
@@ -3871,6 +4627,90 @@
       <p:sp>
         <p:nvSpPr>
           <p:cNvPr id="19" name="PlaceHolder 3"/>
+          <p:cNvSpPr>
+            <a:spLocks noGrp="1"/>
+          </p:cNvSpPr>
+          <p:nvPr>
+            <p:ph type="body"/>
+          </p:nvPr>
+        </p:nvSpPr>
+        <p:spPr>
+          <a:xfrm>
+            <a:off x="1792440" y="5367240"/>
+            <a:ext cx="5484240" cy="802800"/>
+          </a:xfrm>
+          <a:prstGeom prst="rect">
+            <a:avLst/>
+          </a:prstGeom>
+          <a:noFill/>
+          <a:ln w="0">
+            <a:noFill/>
+          </a:ln>
+        </p:spPr>
+        <p:txBody>
+          <a:bodyPr lIns="91440" tIns="45720" rIns="91440" bIns="45720" anchor="t">
+            <a:noAutofit/>
+          </a:bodyPr>
+          <a:lstStyle>
+            <a:lvl1pPr indent="0" algn="l" defTabSz="457200">
+              <a:lnSpc>
+                <a:spcPct val="100000"/>
+              </a:lnSpc>
+              <a:spcBef>
+                <a:spcPts val="281"/>
+              </a:spcBef>
+              <a:buNone/>
+              <a:tabLst>
+                <a:tab pos="0" algn="l"/>
+              </a:tabLst>
+              <a:defRPr lang="en-US" sz="1400" b="0" u="none" strike="noStrike">
+                <a:solidFill>
+                  <a:schemeClr val="dk1"/>
+                </a:solidFill>
+                <a:effectLst/>
+                <a:uFillTx/>
+                <a:latin typeface="Calibri"/>
+              </a:defRPr>
+            </a:lvl1pPr>
+          </a:lstStyle>
+          <a:p>
+            <a:pPr indent="0" algn="l" defTabSz="457200">
+              <a:lnSpc>
+                <a:spcPct val="100000"/>
+              </a:lnSpc>
+              <a:spcBef>
+                <a:spcPts val="281"/>
+              </a:spcBef>
+              <a:buNone/>
+              <a:tabLst>
+                <a:tab pos="0" algn="l"/>
+              </a:tabLst>
+            </a:pPr>
+            <a:r>
+              <a:rPr lang="en-US" sz="1400" b="0" u="none" strike="noStrike">
+                <a:solidFill>
+                  <a:schemeClr val="dk1"/>
+                </a:solidFill>
+                <a:effectLst/>
+                <a:uFillTx/>
+                <a:latin typeface="Calibri"/>
+              </a:rPr>
+              <a:t>Click to edit Master text styles</a:t>
+            </a:r>
+            <a:endParaRPr lang="en-US" sz="1400" b="0" u="none" strike="noStrike">
+              <a:solidFill>
+                <a:schemeClr val="dk1"/>
+              </a:solidFill>
+              <a:effectLst/>
+              <a:uFillTx/>
+              <a:latin typeface="Calibri"/>
+            </a:endParaRPr>
+          </a:p>
+        </p:txBody>
+      </p:sp>
+      <p:sp>
+        <p:nvSpPr>
+          <p:cNvPr id="20" name="PlaceHolder 4"/>
           <p:cNvSpPr>
             <a:spLocks noGrp="1"/>
           </p:cNvSpPr>
@@ -3881,7 +4721,7 @@
         <p:spPr>
           <a:xfrm>
             <a:off x="457200" y="6356520"/>
-            <a:ext cx="2131920" cy="363240"/>
+            <a:ext cx="2131560" cy="362880"/>
           </a:xfrm>
           <a:prstGeom prst="rect">
             <a:avLst/>
@@ -3952,7 +4792,7 @@
       </p:sp>
       <p:sp>
         <p:nvSpPr>
-          <p:cNvPr id="20" name="PlaceHolder 4"/>
+          <p:cNvPr id="21" name="PlaceHolder 5"/>
           <p:cNvSpPr>
             <a:spLocks noGrp="1"/>
           </p:cNvSpPr>
@@ -3963,7 +4803,7 @@
         <p:spPr>
           <a:xfrm>
             <a:off x="3124080" y="6356520"/>
-            <a:ext cx="2893680" cy="363240"/>
+            <a:ext cx="2893320" cy="362880"/>
           </a:xfrm>
           <a:prstGeom prst="rect">
             <a:avLst/>
@@ -4030,7 +4870,7 @@
       </p:sp>
       <p:sp>
         <p:nvSpPr>
-          <p:cNvPr id="21" name="PlaceHolder 5"/>
+          <p:cNvPr id="22" name="PlaceHolder 6"/>
           <p:cNvSpPr>
             <a:spLocks noGrp="1"/>
           </p:cNvSpPr>
@@ -4041,7 +4881,7 @@
         <p:spPr>
           <a:xfrm>
             <a:off x="6553080" y="6356520"/>
-            <a:ext cx="2131920" cy="363240"/>
+            <a:ext cx="2131560" cy="362880"/>
           </a:xfrm>
           <a:prstGeom prst="rect">
             <a:avLst/>
@@ -4086,7 +4926,7 @@
                 <a:tab pos="0" algn="l"/>
               </a:tabLst>
             </a:pPr>
-            <a:fld id="{E564F69C-2A25-4E88-9313-6D2B3C9B5134}" type="slidenum">
+            <a:fld id="{B1EAB853-B632-4F18-AE2D-9BD9B95DE875}" type="slidenum">
               <a:rPr lang="en-US" sz="1200" b="0" u="none" strike="noStrike">
                 <a:solidFill>
                   <a:schemeClr val="dk1">
@@ -4116,8 +4956,8 @@
 </file>
 
 <file path=ppt/slideLayouts/slideLayout5.xml><?xml version="1.0" encoding="utf-8"?>
-<p:sldLayout xmlns:a="http://schemas.openxmlformats.org/drawingml/2006/main" xmlns:p="http://schemas.openxmlformats.org/presentationml/2006/main" xmlns:r="http://schemas.openxmlformats.org/officeDocument/2006/relationships" xmlns:p14="http://schemas.microsoft.com/office/powerpoint/2010/main" xmlns:p15="http://schemas.microsoft.com/office/powerpoint/2012/main" xmlns:mc="http://schemas.openxmlformats.org/markup-compatibility/2006" type="obj" preserve="1">
-  <p:cSld name="Title and Content">
+<p:sldLayout xmlns:a="http://schemas.openxmlformats.org/drawingml/2006/main" xmlns:p="http://schemas.openxmlformats.org/presentationml/2006/main" xmlns:r="http://schemas.openxmlformats.org/officeDocument/2006/relationships" xmlns:p14="http://schemas.microsoft.com/office/powerpoint/2010/main" xmlns:p15="http://schemas.microsoft.com/office/powerpoint/2012/main" xmlns:mc="http://schemas.openxmlformats.org/markup-compatibility/2006" type="title" preserve="1">
+  <p:cSld name="Title Slide">
     <p:bg>
       <p:bgPr>
         <a:solidFill>
@@ -4141,7 +4981,7 @@
       </p:grpSpPr>
       <p:sp>
         <p:nvSpPr>
-          <p:cNvPr id="22" name="PlaceHolder 1"/>
+          <p:cNvPr id="23" name="PlaceHolder 1"/>
           <p:cNvSpPr>
             <a:spLocks noGrp="1"/>
           </p:cNvSpPr>
@@ -4151,8 +4991,8 @@
         </p:nvSpPr>
         <p:spPr>
           <a:xfrm>
-            <a:off x="457200" y="274680"/>
-            <a:ext cx="8227800" cy="1141200"/>
+            <a:off x="685800" y="2130480"/>
+            <a:ext cx="7770240" cy="1467720"/>
           </a:xfrm>
           <a:prstGeom prst="rect">
             <a:avLst/>
@@ -4219,313 +5059,7 @@
       </p:sp>
       <p:sp>
         <p:nvSpPr>
-          <p:cNvPr id="23" name="PlaceHolder 2"/>
-          <p:cNvSpPr>
-            <a:spLocks noGrp="1"/>
-          </p:cNvSpPr>
-          <p:nvPr>
-            <p:ph type="body"/>
-          </p:nvPr>
-        </p:nvSpPr>
-        <p:spPr>
-          <a:xfrm>
-            <a:off x="457200" y="1600200"/>
-            <a:ext cx="8227800" cy="4524120"/>
-          </a:xfrm>
-          <a:prstGeom prst="rect">
-            <a:avLst/>
-          </a:prstGeom>
-          <a:noFill/>
-          <a:ln w="0">
-            <a:noFill/>
-          </a:ln>
-        </p:spPr>
-        <p:txBody>
-          <a:bodyPr lIns="91440" tIns="45720" rIns="91440" bIns="45720" anchor="t">
-            <a:noAutofit/>
-          </a:bodyPr>
-          <a:lstStyle>
-            <a:lvl1pPr algn="l" defTabSz="457200">
-              <a:lnSpc>
-                <a:spcPct val="100000"/>
-              </a:lnSpc>
-              <a:spcBef>
-                <a:spcPts val="641"/>
-              </a:spcBef>
-              <a:buClr>
-                <a:srgbClr val="000000"/>
-              </a:buClr>
-              <a:buFont typeface="Arial"/>
-              <a:buChar char="•"/>
-              <a:defRPr lang="en-US" sz="3200" b="0" u="none" strike="noStrike">
-                <a:solidFill>
-                  <a:schemeClr val="dk1"/>
-                </a:solidFill>
-                <a:effectLst/>
-                <a:uFillTx/>
-                <a:latin typeface="Calibri"/>
-              </a:defRPr>
-            </a:lvl1pPr>
-            <a:lvl2pPr lvl="1" algn="l" defTabSz="457200">
-              <a:lnSpc>
-                <a:spcPct val="100000"/>
-              </a:lnSpc>
-              <a:spcBef>
-                <a:spcPts val="561"/>
-              </a:spcBef>
-              <a:buClr>
-                <a:srgbClr val="000000"/>
-              </a:buClr>
-              <a:buFont typeface="Arial"/>
-              <a:buChar char="–"/>
-              <a:defRPr lang="en-US" sz="2800" b="0" u="none" strike="noStrike">
-                <a:solidFill>
-                  <a:schemeClr val="dk1"/>
-                </a:solidFill>
-                <a:effectLst/>
-                <a:uFillTx/>
-                <a:latin typeface="Calibri"/>
-              </a:defRPr>
-            </a:lvl2pPr>
-            <a:lvl3pPr lvl="2" algn="l" defTabSz="457200">
-              <a:lnSpc>
-                <a:spcPct val="100000"/>
-              </a:lnSpc>
-              <a:spcBef>
-                <a:spcPts val="479"/>
-              </a:spcBef>
-              <a:buClr>
-                <a:srgbClr val="000000"/>
-              </a:buClr>
-              <a:buFont typeface="Arial"/>
-              <a:buChar char="•"/>
-              <a:defRPr lang="en-US" sz="2400" b="0" u="none" strike="noStrike">
-                <a:solidFill>
-                  <a:schemeClr val="dk1"/>
-                </a:solidFill>
-                <a:effectLst/>
-                <a:uFillTx/>
-                <a:latin typeface="Calibri"/>
-              </a:defRPr>
-            </a:lvl3pPr>
-            <a:lvl4pPr lvl="3" algn="l" defTabSz="457200">
-              <a:lnSpc>
-                <a:spcPct val="100000"/>
-              </a:lnSpc>
-              <a:spcBef>
-                <a:spcPts val="400"/>
-              </a:spcBef>
-              <a:buClr>
-                <a:srgbClr val="000000"/>
-              </a:buClr>
-              <a:buFont typeface="Arial"/>
-              <a:buChar char="–"/>
-              <a:defRPr lang="en-US" sz="2000" b="0" u="none" strike="noStrike">
-                <a:solidFill>
-                  <a:schemeClr val="dk1"/>
-                </a:solidFill>
-                <a:effectLst/>
-                <a:uFillTx/>
-                <a:latin typeface="Calibri"/>
-              </a:defRPr>
-            </a:lvl4pPr>
-            <a:lvl5pPr lvl="4" algn="l" defTabSz="457200">
-              <a:lnSpc>
-                <a:spcPct val="100000"/>
-              </a:lnSpc>
-              <a:spcBef>
-                <a:spcPts val="400"/>
-              </a:spcBef>
-              <a:buClr>
-                <a:srgbClr val="000000"/>
-              </a:buClr>
-              <a:buFont typeface="Arial"/>
-              <a:buChar char="»"/>
-              <a:defRPr lang="en-US" sz="2000" b="0" u="none" strike="noStrike">
-                <a:solidFill>
-                  <a:schemeClr val="dk1"/>
-                </a:solidFill>
-                <a:effectLst/>
-                <a:uFillTx/>
-                <a:latin typeface="Calibri"/>
-              </a:defRPr>
-            </a:lvl5pPr>
-          </a:lstStyle>
-          <a:p>
-            <a:pPr marL="343080" indent="-343080" algn="l" defTabSz="457200">
-              <a:lnSpc>
-                <a:spcPct val="100000"/>
-              </a:lnSpc>
-              <a:spcBef>
-                <a:spcPts val="641"/>
-              </a:spcBef>
-              <a:buClr>
-                <a:srgbClr val="000000"/>
-              </a:buClr>
-              <a:buFont typeface="Arial"/>
-              <a:buChar char="•"/>
-            </a:pPr>
-            <a:r>
-              <a:rPr lang="en-US" sz="3200" b="0" u="none" strike="noStrike">
-                <a:solidFill>
-                  <a:schemeClr val="dk1"/>
-                </a:solidFill>
-                <a:effectLst/>
-                <a:uFillTx/>
-                <a:latin typeface="Calibri"/>
-              </a:rPr>
-              <a:t>Click to edit Master text styles</a:t>
-            </a:r>
-            <a:endParaRPr lang="en-US" sz="3200" b="0" u="none" strike="noStrike">
-              <a:solidFill>
-                <a:schemeClr val="dk1"/>
-              </a:solidFill>
-              <a:effectLst/>
-              <a:uFillTx/>
-              <a:latin typeface="Calibri"/>
-            </a:endParaRPr>
-          </a:p>
-          <a:p>
-            <a:pPr marL="743040" lvl="1" indent="-285840" algn="l" defTabSz="457200">
-              <a:lnSpc>
-                <a:spcPct val="100000"/>
-              </a:lnSpc>
-              <a:spcBef>
-                <a:spcPts val="561"/>
-              </a:spcBef>
-              <a:buClr>
-                <a:srgbClr val="000000"/>
-              </a:buClr>
-              <a:buFont typeface="Arial"/>
-              <a:buChar char="–"/>
-            </a:pPr>
-            <a:r>
-              <a:rPr lang="en-US" sz="2800" b="0" u="none" strike="noStrike">
-                <a:solidFill>
-                  <a:schemeClr val="dk1"/>
-                </a:solidFill>
-                <a:effectLst/>
-                <a:uFillTx/>
-                <a:latin typeface="Calibri"/>
-              </a:rPr>
-              <a:t>Second level</a:t>
-            </a:r>
-            <a:endParaRPr lang="en-US" sz="2800" b="0" u="none" strike="noStrike">
-              <a:solidFill>
-                <a:schemeClr val="dk1"/>
-              </a:solidFill>
-              <a:effectLst/>
-              <a:uFillTx/>
-              <a:latin typeface="Calibri"/>
-            </a:endParaRPr>
-          </a:p>
-          <a:p>
-            <a:pPr marL="1143000" lvl="2" indent="-228600" algn="l" defTabSz="457200">
-              <a:lnSpc>
-                <a:spcPct val="100000"/>
-              </a:lnSpc>
-              <a:spcBef>
-                <a:spcPts val="479"/>
-              </a:spcBef>
-              <a:buClr>
-                <a:srgbClr val="000000"/>
-              </a:buClr>
-              <a:buFont typeface="Arial"/>
-              <a:buChar char="•"/>
-            </a:pPr>
-            <a:r>
-              <a:rPr lang="en-US" sz="2400" b="0" u="none" strike="noStrike">
-                <a:solidFill>
-                  <a:schemeClr val="dk1"/>
-                </a:solidFill>
-                <a:effectLst/>
-                <a:uFillTx/>
-                <a:latin typeface="Calibri"/>
-              </a:rPr>
-              <a:t>Third level</a:t>
-            </a:r>
-            <a:endParaRPr lang="en-US" sz="2400" b="0" u="none" strike="noStrike">
-              <a:solidFill>
-                <a:schemeClr val="dk1"/>
-              </a:solidFill>
-              <a:effectLst/>
-              <a:uFillTx/>
-              <a:latin typeface="Calibri"/>
-            </a:endParaRPr>
-          </a:p>
-          <a:p>
-            <a:pPr marL="1600200" lvl="3" indent="-228600" algn="l" defTabSz="457200">
-              <a:lnSpc>
-                <a:spcPct val="100000"/>
-              </a:lnSpc>
-              <a:spcBef>
-                <a:spcPts val="400"/>
-              </a:spcBef>
-              <a:buClr>
-                <a:srgbClr val="000000"/>
-              </a:buClr>
-              <a:buFont typeface="Arial"/>
-              <a:buChar char="–"/>
-            </a:pPr>
-            <a:r>
-              <a:rPr lang="en-US" sz="2000" b="0" u="none" strike="noStrike">
-                <a:solidFill>
-                  <a:schemeClr val="dk1"/>
-                </a:solidFill>
-                <a:effectLst/>
-                <a:uFillTx/>
-                <a:latin typeface="Calibri"/>
-              </a:rPr>
-              <a:t>Fourth level</a:t>
-            </a:r>
-            <a:endParaRPr lang="en-US" sz="2000" b="0" u="none" strike="noStrike">
-              <a:solidFill>
-                <a:schemeClr val="dk1"/>
-              </a:solidFill>
-              <a:effectLst/>
-              <a:uFillTx/>
-              <a:latin typeface="Calibri"/>
-            </a:endParaRPr>
-          </a:p>
-          <a:p>
-            <a:pPr marL="2057400" lvl="4" indent="-228600" algn="l" defTabSz="457200">
-              <a:lnSpc>
-                <a:spcPct val="100000"/>
-              </a:lnSpc>
-              <a:spcBef>
-                <a:spcPts val="400"/>
-              </a:spcBef>
-              <a:buClr>
-                <a:srgbClr val="000000"/>
-              </a:buClr>
-              <a:buFont typeface="Arial"/>
-              <a:buChar char="»"/>
-            </a:pPr>
-            <a:r>
-              <a:rPr lang="en-US" sz="2000" b="0" u="none" strike="noStrike">
-                <a:solidFill>
-                  <a:schemeClr val="dk1"/>
-                </a:solidFill>
-                <a:effectLst/>
-                <a:uFillTx/>
-                <a:latin typeface="Calibri"/>
-              </a:rPr>
-              <a:t>Fifth level</a:t>
-            </a:r>
-            <a:endParaRPr lang="en-US" sz="2000" b="0" u="none" strike="noStrike">
-              <a:solidFill>
-                <a:schemeClr val="dk1"/>
-              </a:solidFill>
-              <a:effectLst/>
-              <a:uFillTx/>
-              <a:latin typeface="Calibri"/>
-            </a:endParaRPr>
-          </a:p>
-        </p:txBody>
-      </p:sp>
-      <p:sp>
-        <p:nvSpPr>
-          <p:cNvPr id="24" name="PlaceHolder 3"/>
+          <p:cNvPr id="24" name="PlaceHolder 2"/>
           <p:cNvSpPr>
             <a:spLocks noGrp="1"/>
           </p:cNvSpPr>
@@ -4536,7 +5070,7 @@
         <p:spPr>
           <a:xfrm>
             <a:off x="457200" y="6356520"/>
-            <a:ext cx="2131920" cy="363240"/>
+            <a:ext cx="2131560" cy="362880"/>
           </a:xfrm>
           <a:prstGeom prst="rect">
             <a:avLst/>
@@ -4607,7 +5141,7 @@
       </p:sp>
       <p:sp>
         <p:nvSpPr>
-          <p:cNvPr id="25" name="PlaceHolder 4"/>
+          <p:cNvPr id="25" name="PlaceHolder 3"/>
           <p:cNvSpPr>
             <a:spLocks noGrp="1"/>
           </p:cNvSpPr>
@@ -4618,7 +5152,7 @@
         <p:spPr>
           <a:xfrm>
             <a:off x="3124080" y="6356520"/>
-            <a:ext cx="2893680" cy="363240"/>
+            <a:ext cx="2893320" cy="362880"/>
           </a:xfrm>
           <a:prstGeom prst="rect">
             <a:avLst/>
@@ -4685,7 +5219,7 @@
       </p:sp>
       <p:sp>
         <p:nvSpPr>
-          <p:cNvPr id="26" name="PlaceHolder 5"/>
+          <p:cNvPr id="26" name="PlaceHolder 4"/>
           <p:cNvSpPr>
             <a:spLocks noGrp="1"/>
           </p:cNvSpPr>
@@ -4696,7 +5230,7 @@
         <p:spPr>
           <a:xfrm>
             <a:off x="6553080" y="6356520"/>
-            <a:ext cx="2131920" cy="363240"/>
+            <a:ext cx="2131560" cy="362880"/>
           </a:xfrm>
           <a:prstGeom prst="rect">
             <a:avLst/>
@@ -4741,7 +5275,7 @@
                 <a:tab pos="0" algn="l"/>
               </a:tabLst>
             </a:pPr>
-            <a:fld id="{B5EBA32C-1461-4A74-9902-6E1B8F91E3AE}" type="slidenum">
+            <a:fld id="{143FE57D-FE1A-4EDE-A04A-0055E42FA3B1}" type="slidenum">
               <a:rPr lang="en-US" sz="1200" b="0" u="none" strike="noStrike">
                 <a:solidFill>
                   <a:schemeClr val="dk1">
@@ -4771,8 +5305,8 @@
 </file>
 
 <file path=ppt/slideLayouts/slideLayout6.xml><?xml version="1.0" encoding="utf-8"?>
-<p:sldLayout xmlns:a="http://schemas.openxmlformats.org/drawingml/2006/main" xmlns:p="http://schemas.openxmlformats.org/presentationml/2006/main" xmlns:r="http://schemas.openxmlformats.org/officeDocument/2006/relationships" xmlns:p14="http://schemas.microsoft.com/office/powerpoint/2010/main" xmlns:p15="http://schemas.microsoft.com/office/powerpoint/2012/main" xmlns:mc="http://schemas.openxmlformats.org/markup-compatibility/2006" type="blank" preserve="1">
-  <p:cSld name="Section Header">
+<p:sldLayout xmlns:a="http://schemas.openxmlformats.org/drawingml/2006/main" xmlns:p="http://schemas.openxmlformats.org/presentationml/2006/main" xmlns:r="http://schemas.openxmlformats.org/officeDocument/2006/relationships" xmlns:p14="http://schemas.microsoft.com/office/powerpoint/2010/main" xmlns:p15="http://schemas.microsoft.com/office/powerpoint/2012/main" xmlns:mc="http://schemas.openxmlformats.org/markup-compatibility/2006" type="vertTx" preserve="1">
+  <p:cSld name="Title and Vertical Text">
     <p:bg>
       <p:bgPr>
         <a:solidFill>
@@ -4806,8 +5340,8 @@
         </p:nvSpPr>
         <p:spPr>
           <a:xfrm>
-            <a:off x="722160" y="4406760"/>
-            <a:ext cx="7770600" cy="1360440"/>
+            <a:off x="457200" y="274680"/>
+            <a:ext cx="8227440" cy="1140840"/>
           </a:xfrm>
           <a:prstGeom prst="rect">
             <a:avLst/>
@@ -4818,11 +5352,11 @@
           </a:ln>
         </p:spPr>
         <p:txBody>
-          <a:bodyPr lIns="91440" tIns="45720" rIns="91440" bIns="45720" anchor="t">
+          <a:bodyPr lIns="91440" tIns="45720" rIns="91440" bIns="45720" anchor="ctr">
             <a:noAutofit/>
           </a:bodyPr>
           <a:lstStyle>
-            <a:lvl1pPr indent="0" algn="l" defTabSz="457200">
+            <a:lvl1pPr indent="0" algn="ctr" defTabSz="457200">
               <a:lnSpc>
                 <a:spcPct val="100000"/>
               </a:lnSpc>
@@ -4830,7 +5364,7 @@
               <a:tabLst>
                 <a:tab pos="0" algn="l"/>
               </a:tabLst>
-              <a:defRPr lang="en-US" sz="4000" b="1" u="none" strike="noStrike" cap="all">
+              <a:defRPr lang="en-US" sz="4400" b="0" u="none" strike="noStrike">
                 <a:solidFill>
                   <a:schemeClr val="dk1"/>
                 </a:solidFill>
@@ -4841,7 +5375,7 @@
             </a:lvl1pPr>
           </a:lstStyle>
           <a:p>
-            <a:pPr indent="0" algn="l" defTabSz="457200">
+            <a:pPr indent="0" algn="ctr" defTabSz="457200">
               <a:lnSpc>
                 <a:spcPct val="100000"/>
               </a:lnSpc>
@@ -4851,7 +5385,7 @@
               </a:tabLst>
             </a:pPr>
             <a:r>
-              <a:rPr lang="en-US" sz="4000" b="1" u="none" strike="noStrike" cap="all">
+              <a:rPr lang="en-US" sz="4400" b="0" u="none" strike="noStrike">
                 <a:solidFill>
                   <a:schemeClr val="dk1"/>
                 </a:solidFill>
@@ -4861,7 +5395,7 @@
               </a:rPr>
               <a:t>Click to edit Master title style</a:t>
             </a:r>
-            <a:endParaRPr lang="en-US" sz="4000" b="1" u="none" strike="noStrike" cap="all">
+            <a:endParaRPr lang="en-US" sz="4400" b="0" u="none" strike="noStrike">
               <a:solidFill>
                 <a:schemeClr val="dk1"/>
               </a:solidFill>
@@ -4884,8 +5418,8 @@
         </p:nvSpPr>
         <p:spPr>
           <a:xfrm>
-            <a:off x="722160" y="2906640"/>
-            <a:ext cx="7770600" cy="1498320"/>
+            <a:off x="457200" y="1600200"/>
+            <a:ext cx="8227440" cy="4523760"/>
           </a:xfrm>
           <a:prstGeom prst="rect">
             <a:avLst/>
@@ -4896,64 +5430,280 @@
           </a:ln>
         </p:spPr>
         <p:txBody>
-          <a:bodyPr lIns="91440" tIns="45720" rIns="91440" bIns="45720" anchor="b">
+          <a:bodyPr lIns="91440" tIns="45720" rIns="91440" bIns="45720" anchor="t" vert="eaVert">
             <a:noAutofit/>
           </a:bodyPr>
           <a:lstStyle>
-            <a:lvl1pPr indent="0" algn="l" defTabSz="457200">
+            <a:lvl1pPr algn="l" defTabSz="457200">
+              <a:lnSpc>
+                <a:spcPct val="100000"/>
+              </a:lnSpc>
+              <a:spcBef>
+                <a:spcPts val="641"/>
+              </a:spcBef>
+              <a:buClr>
+                <a:srgbClr val="000000"/>
+              </a:buClr>
+              <a:buFont typeface="Arial"/>
+              <a:buChar char="•"/>
+              <a:defRPr lang="en-US" sz="3200" b="0" u="none" strike="noStrike">
+                <a:solidFill>
+                  <a:schemeClr val="dk1"/>
+                </a:solidFill>
+                <a:effectLst/>
+                <a:uFillTx/>
+                <a:latin typeface="Calibri"/>
+              </a:defRPr>
+            </a:lvl1pPr>
+            <a:lvl2pPr lvl="1" algn="l" defTabSz="457200">
+              <a:lnSpc>
+                <a:spcPct val="100000"/>
+              </a:lnSpc>
+              <a:spcBef>
+                <a:spcPts val="561"/>
+              </a:spcBef>
+              <a:buClr>
+                <a:srgbClr val="000000"/>
+              </a:buClr>
+              <a:buFont typeface="Arial"/>
+              <a:buChar char="–"/>
+              <a:defRPr lang="en-US" sz="2800" b="0" u="none" strike="noStrike">
+                <a:solidFill>
+                  <a:schemeClr val="dk1"/>
+                </a:solidFill>
+                <a:effectLst/>
+                <a:uFillTx/>
+                <a:latin typeface="Calibri"/>
+              </a:defRPr>
+            </a:lvl2pPr>
+            <a:lvl3pPr lvl="2" algn="l" defTabSz="457200">
+              <a:lnSpc>
+                <a:spcPct val="100000"/>
+              </a:lnSpc>
+              <a:spcBef>
+                <a:spcPts val="479"/>
+              </a:spcBef>
+              <a:buClr>
+                <a:srgbClr val="000000"/>
+              </a:buClr>
+              <a:buFont typeface="Arial"/>
+              <a:buChar char="•"/>
+              <a:defRPr lang="en-US" sz="2400" b="0" u="none" strike="noStrike">
+                <a:solidFill>
+                  <a:schemeClr val="dk1"/>
+                </a:solidFill>
+                <a:effectLst/>
+                <a:uFillTx/>
+                <a:latin typeface="Calibri"/>
+              </a:defRPr>
+            </a:lvl3pPr>
+            <a:lvl4pPr lvl="3" algn="l" defTabSz="457200">
               <a:lnSpc>
                 <a:spcPct val="100000"/>
               </a:lnSpc>
               <a:spcBef>
                 <a:spcPts val="400"/>
               </a:spcBef>
-              <a:buNone/>
-              <a:tabLst>
-                <a:tab pos="0" algn="l"/>
-              </a:tabLst>
+              <a:buClr>
+                <a:srgbClr val="000000"/>
+              </a:buClr>
+              <a:buFont typeface="Arial"/>
+              <a:buChar char="–"/>
               <a:defRPr lang="en-US" sz="2000" b="0" u="none" strike="noStrike">
                 <a:solidFill>
-                  <a:schemeClr val="dk1">
-                    <a:tint val="75000"/>
-                  </a:schemeClr>
+                  <a:schemeClr val="dk1"/>
                 </a:solidFill>
                 <a:effectLst/>
                 <a:uFillTx/>
                 <a:latin typeface="Calibri"/>
               </a:defRPr>
-            </a:lvl1pPr>
-          </a:lstStyle>
-          <a:p>
-            <a:pPr indent="0" algn="l" defTabSz="457200">
+            </a:lvl4pPr>
+            <a:lvl5pPr lvl="4" algn="l" defTabSz="457200">
               <a:lnSpc>
                 <a:spcPct val="100000"/>
               </a:lnSpc>
               <a:spcBef>
                 <a:spcPts val="400"/>
               </a:spcBef>
-              <a:buNone/>
-              <a:tabLst>
-                <a:tab pos="0" algn="l"/>
-              </a:tabLst>
+              <a:buClr>
+                <a:srgbClr val="000000"/>
+              </a:buClr>
+              <a:buFont typeface="Arial"/>
+              <a:buChar char="»"/>
+              <a:defRPr lang="en-US" sz="2000" b="0" u="none" strike="noStrike">
+                <a:solidFill>
+                  <a:schemeClr val="dk1"/>
+                </a:solidFill>
+                <a:effectLst/>
+                <a:uFillTx/>
+                <a:latin typeface="Calibri"/>
+              </a:defRPr>
+            </a:lvl5pPr>
+          </a:lstStyle>
+          <a:p>
+            <a:pPr marL="343080" indent="-343080" algn="l" defTabSz="457200">
+              <a:lnSpc>
+                <a:spcPct val="100000"/>
+              </a:lnSpc>
+              <a:spcBef>
+                <a:spcPts val="641"/>
+              </a:spcBef>
+              <a:buClr>
+                <a:srgbClr val="000000"/>
+              </a:buClr>
+              <a:buFont typeface="Arial"/>
+              <a:buChar char="•"/>
+            </a:pPr>
+            <a:r>
+              <a:rPr lang="en-US" sz="3200" b="0" u="none" strike="noStrike">
+                <a:solidFill>
+                  <a:schemeClr val="dk1"/>
+                </a:solidFill>
+                <a:effectLst/>
+                <a:uFillTx/>
+                <a:latin typeface="Calibri"/>
+              </a:rPr>
+              <a:t>Click to edit Master text styles</a:t>
+            </a:r>
+            <a:endParaRPr lang="en-US" sz="3200" b="0" u="none" strike="noStrike">
+              <a:solidFill>
+                <a:schemeClr val="dk1"/>
+              </a:solidFill>
+              <a:effectLst/>
+              <a:uFillTx/>
+              <a:latin typeface="Calibri"/>
+            </a:endParaRPr>
+          </a:p>
+          <a:p>
+            <a:pPr marL="743040" lvl="1" indent="-285840" algn="l" defTabSz="457200">
+              <a:lnSpc>
+                <a:spcPct val="100000"/>
+              </a:lnSpc>
+              <a:spcBef>
+                <a:spcPts val="561"/>
+              </a:spcBef>
+              <a:buClr>
+                <a:srgbClr val="000000"/>
+              </a:buClr>
+              <a:buFont typeface="Arial"/>
+              <a:buChar char="–"/>
+            </a:pPr>
+            <a:r>
+              <a:rPr lang="en-US" sz="2800" b="0" u="none" strike="noStrike">
+                <a:solidFill>
+                  <a:schemeClr val="dk1"/>
+                </a:solidFill>
+                <a:effectLst/>
+                <a:uFillTx/>
+                <a:latin typeface="Calibri"/>
+              </a:rPr>
+              <a:t>Second level</a:t>
+            </a:r>
+            <a:endParaRPr lang="en-US" sz="2800" b="0" u="none" strike="noStrike">
+              <a:solidFill>
+                <a:schemeClr val="dk1"/>
+              </a:solidFill>
+              <a:effectLst/>
+              <a:uFillTx/>
+              <a:latin typeface="Calibri"/>
+            </a:endParaRPr>
+          </a:p>
+          <a:p>
+            <a:pPr marL="1143000" lvl="2" indent="-228600" algn="l" defTabSz="457200">
+              <a:lnSpc>
+                <a:spcPct val="100000"/>
+              </a:lnSpc>
+              <a:spcBef>
+                <a:spcPts val="479"/>
+              </a:spcBef>
+              <a:buClr>
+                <a:srgbClr val="000000"/>
+              </a:buClr>
+              <a:buFont typeface="Arial"/>
+              <a:buChar char="•"/>
+            </a:pPr>
+            <a:r>
+              <a:rPr lang="en-US" sz="2400" b="0" u="none" strike="noStrike">
+                <a:solidFill>
+                  <a:schemeClr val="dk1"/>
+                </a:solidFill>
+                <a:effectLst/>
+                <a:uFillTx/>
+                <a:latin typeface="Calibri"/>
+              </a:rPr>
+              <a:t>Third level</a:t>
+            </a:r>
+            <a:endParaRPr lang="en-US" sz="2400" b="0" u="none" strike="noStrike">
+              <a:solidFill>
+                <a:schemeClr val="dk1"/>
+              </a:solidFill>
+              <a:effectLst/>
+              <a:uFillTx/>
+              <a:latin typeface="Calibri"/>
+            </a:endParaRPr>
+          </a:p>
+          <a:p>
+            <a:pPr marL="1600200" lvl="3" indent="-228600" algn="l" defTabSz="457200">
+              <a:lnSpc>
+                <a:spcPct val="100000"/>
+              </a:lnSpc>
+              <a:spcBef>
+                <a:spcPts val="400"/>
+              </a:spcBef>
+              <a:buClr>
+                <a:srgbClr val="000000"/>
+              </a:buClr>
+              <a:buFont typeface="Arial"/>
+              <a:buChar char="–"/>
             </a:pPr>
             <a:r>
               <a:rPr lang="en-US" sz="2000" b="0" u="none" strike="noStrike">
                 <a:solidFill>
-                  <a:schemeClr val="dk1">
-                    <a:tint val="75000"/>
-                  </a:schemeClr>
-                </a:solidFill>
-                <a:effectLst/>
-                <a:uFillTx/>
-                <a:latin typeface="Calibri"/>
-              </a:rPr>
-              <a:t>Click to edit Master text styles</a:t>
-            </a:r>
-            <a:endParaRPr lang="en-US" sz="2000" b="0" u="none" strike="noStrike">
-              <a:solidFill>
-                <a:schemeClr val="dk1">
-                  <a:tint val="75000"/>
-                </a:schemeClr>
+                  <a:schemeClr val="dk1"/>
+                </a:solidFill>
+                <a:effectLst/>
+                <a:uFillTx/>
+                <a:latin typeface="Calibri"/>
+              </a:rPr>
+              <a:t>Fourth level</a:t>
+            </a:r>
+            <a:endParaRPr lang="en-US" sz="2000" b="0" u="none" strike="noStrike">
+              <a:solidFill>
+                <a:schemeClr val="dk1"/>
+              </a:solidFill>
+              <a:effectLst/>
+              <a:uFillTx/>
+              <a:latin typeface="Calibri"/>
+            </a:endParaRPr>
+          </a:p>
+          <a:p>
+            <a:pPr marL="2057400" lvl="4" indent="-228600" algn="l" defTabSz="457200">
+              <a:lnSpc>
+                <a:spcPct val="100000"/>
+              </a:lnSpc>
+              <a:spcBef>
+                <a:spcPts val="400"/>
+              </a:spcBef>
+              <a:buClr>
+                <a:srgbClr val="000000"/>
+              </a:buClr>
+              <a:buFont typeface="Arial"/>
+              <a:buChar char="»"/>
+            </a:pPr>
+            <a:r>
+              <a:rPr lang="en-US" sz="2000" b="0" u="none" strike="noStrike">
+                <a:solidFill>
+                  <a:schemeClr val="dk1"/>
+                </a:solidFill>
+                <a:effectLst/>
+                <a:uFillTx/>
+                <a:latin typeface="Calibri"/>
+              </a:rPr>
+              <a:t>Fifth level</a:t>
+            </a:r>
+            <a:endParaRPr lang="en-US" sz="2000" b="0" u="none" strike="noStrike">
+              <a:solidFill>
+                <a:schemeClr val="dk1"/>
               </a:solidFill>
               <a:effectLst/>
               <a:uFillTx/>
@@ -4975,7 +5725,7 @@
         <p:spPr>
           <a:xfrm>
             <a:off x="457200" y="6356520"/>
-            <a:ext cx="2131920" cy="363240"/>
+            <a:ext cx="2131560" cy="362880"/>
           </a:xfrm>
           <a:prstGeom prst="rect">
             <a:avLst/>
@@ -5057,7 +5807,7 @@
         <p:spPr>
           <a:xfrm>
             <a:off x="3124080" y="6356520"/>
-            <a:ext cx="2893680" cy="363240"/>
+            <a:ext cx="2893320" cy="362880"/>
           </a:xfrm>
           <a:prstGeom prst="rect">
             <a:avLst/>
@@ -5135,7 +5885,7 @@
         <p:spPr>
           <a:xfrm>
             <a:off x="6553080" y="6356520"/>
-            <a:ext cx="2131920" cy="363240"/>
+            <a:ext cx="2131560" cy="362880"/>
           </a:xfrm>
           <a:prstGeom prst="rect">
             <a:avLst/>
@@ -5180,7 +5930,7 @@
                 <a:tab pos="0" algn="l"/>
               </a:tabLst>
             </a:pPr>
-            <a:fld id="{239A31F4-ADDF-422C-BF42-D5AC8B20250F}" type="slidenum">
+            <a:fld id="{4E0A0570-0BF0-4BB5-BDD2-1E31553CF8A0}" type="slidenum">
               <a:rPr lang="en-US" sz="1200" b="0" u="none" strike="noStrike">
                 <a:solidFill>
                   <a:schemeClr val="dk1">
@@ -5210,8 +5960,8 @@
 </file>
 
 <file path=ppt/slideLayouts/slideLayout7.xml><?xml version="1.0" encoding="utf-8"?>
-<p:sldLayout xmlns:a="http://schemas.openxmlformats.org/drawingml/2006/main" xmlns:p="http://schemas.openxmlformats.org/presentationml/2006/main" xmlns:r="http://schemas.openxmlformats.org/officeDocument/2006/relationships" xmlns:p14="http://schemas.microsoft.com/office/powerpoint/2010/main" xmlns:p15="http://schemas.microsoft.com/office/powerpoint/2012/main" xmlns:mc="http://schemas.openxmlformats.org/markup-compatibility/2006" type="twoObj" preserve="1">
-  <p:cSld name="Two Content">
+<p:sldLayout xmlns:a="http://schemas.openxmlformats.org/drawingml/2006/main" xmlns:p="http://schemas.openxmlformats.org/presentationml/2006/main" xmlns:r="http://schemas.openxmlformats.org/officeDocument/2006/relationships" xmlns:p14="http://schemas.microsoft.com/office/powerpoint/2010/main" xmlns:p15="http://schemas.microsoft.com/office/powerpoint/2012/main" xmlns:mc="http://schemas.openxmlformats.org/markup-compatibility/2006" type="vertTitleAndTx" preserve="1">
+  <p:cSld name="Vertical Title and Text">
     <p:bg>
       <p:bgPr>
         <a:solidFill>
@@ -5245,8 +5995,8 @@
         </p:nvSpPr>
         <p:spPr>
           <a:xfrm>
-            <a:off x="457200" y="274680"/>
-            <a:ext cx="8227800" cy="1141200"/>
+            <a:off x="6629400" y="274680"/>
+            <a:ext cx="2055240" cy="5849280"/>
           </a:xfrm>
           <a:prstGeom prst="rect">
             <a:avLst/>
@@ -5257,7 +6007,7 @@
           </a:ln>
         </p:spPr>
         <p:txBody>
-          <a:bodyPr lIns="91440" tIns="45720" rIns="91440" bIns="45720" anchor="ctr">
+          <a:bodyPr lIns="91440" tIns="45720" rIns="91440" bIns="45720" anchor="ctr" vert="eaVert">
             <a:noAutofit/>
           </a:bodyPr>
           <a:lstStyle>
@@ -5323,8 +6073,8 @@
         </p:nvSpPr>
         <p:spPr>
           <a:xfrm>
-            <a:off x="457200" y="1600200"/>
-            <a:ext cx="4036680" cy="4524120"/>
+            <a:off x="457200" y="274680"/>
+            <a:ext cx="6017760" cy="5849280"/>
           </a:xfrm>
           <a:prstGeom prst="rect">
             <a:avLst/>
@@ -5335,7 +6085,7 @@
           </a:ln>
         </p:spPr>
         <p:txBody>
-          <a:bodyPr lIns="91440" tIns="45720" rIns="91440" bIns="45720" anchor="t">
+          <a:bodyPr lIns="91440" tIns="45720" rIns="91440" bIns="45720" anchor="t" vert="eaVert">
             <a:noAutofit/>
           </a:bodyPr>
           <a:lstStyle>
@@ -5344,13 +6094,34 @@
                 <a:spcPct val="100000"/>
               </a:lnSpc>
               <a:spcBef>
+                <a:spcPts val="641"/>
+              </a:spcBef>
+              <a:buClr>
+                <a:srgbClr val="000000"/>
+              </a:buClr>
+              <a:buFont typeface="Arial"/>
+              <a:buChar char="•"/>
+              <a:defRPr lang="en-US" sz="3200" b="0" u="none" strike="noStrike">
+                <a:solidFill>
+                  <a:schemeClr val="dk1"/>
+                </a:solidFill>
+                <a:effectLst/>
+                <a:uFillTx/>
+                <a:latin typeface="Calibri"/>
+              </a:defRPr>
+            </a:lvl1pPr>
+            <a:lvl2pPr lvl="1" algn="l" defTabSz="457200">
+              <a:lnSpc>
+                <a:spcPct val="100000"/>
+              </a:lnSpc>
+              <a:spcBef>
                 <a:spcPts val="561"/>
               </a:spcBef>
               <a:buClr>
                 <a:srgbClr val="000000"/>
               </a:buClr>
               <a:buFont typeface="Arial"/>
-              <a:buChar char="•"/>
+              <a:buChar char="–"/>
               <a:defRPr lang="en-US" sz="2800" b="0" u="none" strike="noStrike">
                 <a:solidFill>
                   <a:schemeClr val="dk1"/>
@@ -5359,8 +6130,8 @@
                 <a:uFillTx/>
                 <a:latin typeface="Calibri"/>
               </a:defRPr>
-            </a:lvl1pPr>
-            <a:lvl2pPr lvl="1" algn="l" defTabSz="457200">
+            </a:lvl2pPr>
+            <a:lvl3pPr lvl="2" algn="l" defTabSz="457200">
               <a:lnSpc>
                 <a:spcPct val="100000"/>
               </a:lnSpc>
@@ -5371,7 +6142,7 @@
                 <a:srgbClr val="000000"/>
               </a:buClr>
               <a:buFont typeface="Arial"/>
-              <a:buChar char="–"/>
+              <a:buChar char="•"/>
               <a:defRPr lang="en-US" sz="2400" b="0" u="none" strike="noStrike">
                 <a:solidFill>
                   <a:schemeClr val="dk1"/>
@@ -5380,8 +6151,8 @@
                 <a:uFillTx/>
                 <a:latin typeface="Calibri"/>
               </a:defRPr>
-            </a:lvl2pPr>
-            <a:lvl3pPr lvl="2" algn="l" defTabSz="457200">
+            </a:lvl3pPr>
+            <a:lvl4pPr lvl="3" algn="l" defTabSz="457200">
               <a:lnSpc>
                 <a:spcPct val="100000"/>
               </a:lnSpc>
@@ -5392,29 +6163,8 @@
                 <a:srgbClr val="000000"/>
               </a:buClr>
               <a:buFont typeface="Arial"/>
-              <a:buChar char="•"/>
+              <a:buChar char="–"/>
               <a:defRPr lang="en-US" sz="2000" b="0" u="none" strike="noStrike">
-                <a:solidFill>
-                  <a:schemeClr val="dk1"/>
-                </a:solidFill>
-                <a:effectLst/>
-                <a:uFillTx/>
-                <a:latin typeface="Calibri"/>
-              </a:defRPr>
-            </a:lvl3pPr>
-            <a:lvl4pPr lvl="3" algn="l" defTabSz="457200">
-              <a:lnSpc>
-                <a:spcPct val="100000"/>
-              </a:lnSpc>
-              <a:spcBef>
-                <a:spcPts val="360"/>
-              </a:spcBef>
-              <a:buClr>
-                <a:srgbClr val="000000"/>
-              </a:buClr>
-              <a:buFont typeface="Arial"/>
-              <a:buChar char="–"/>
-              <a:defRPr lang="en-US" sz="1800" b="0" u="none" strike="noStrike">
                 <a:solidFill>
                   <a:schemeClr val="dk1"/>
                 </a:solidFill>
@@ -5428,14 +6178,14 @@
                 <a:spcPct val="100000"/>
               </a:lnSpc>
               <a:spcBef>
-                <a:spcPts val="360"/>
+                <a:spcPts val="400"/>
               </a:spcBef>
               <a:buClr>
                 <a:srgbClr val="000000"/>
               </a:buClr>
               <a:buFont typeface="Arial"/>
               <a:buChar char="»"/>
-              <a:defRPr lang="en-US" sz="1800" b="0" u="none" strike="noStrike">
+              <a:defRPr lang="en-US" sz="2000" b="0" u="none" strike="noStrike">
                 <a:solidFill>
                   <a:schemeClr val="dk1"/>
                 </a:solidFill>
@@ -5447,6 +6197,40 @@
           </a:lstStyle>
           <a:p>
             <a:pPr marL="343080" indent="-343080" algn="l" defTabSz="457200">
+              <a:lnSpc>
+                <a:spcPct val="100000"/>
+              </a:lnSpc>
+              <a:spcBef>
+                <a:spcPts val="641"/>
+              </a:spcBef>
+              <a:buClr>
+                <a:srgbClr val="000000"/>
+              </a:buClr>
+              <a:buFont typeface="Arial"/>
+              <a:buChar char="•"/>
+            </a:pPr>
+            <a:r>
+              <a:rPr lang="en-US" sz="3200" b="0" u="none" strike="noStrike">
+                <a:solidFill>
+                  <a:schemeClr val="dk1"/>
+                </a:solidFill>
+                <a:effectLst/>
+                <a:uFillTx/>
+                <a:latin typeface="Calibri"/>
+              </a:rPr>
+              <a:t>Click to edit Master text styles</a:t>
+            </a:r>
+            <a:endParaRPr lang="en-US" sz="3200" b="0" u="none" strike="noStrike">
+              <a:solidFill>
+                <a:schemeClr val="dk1"/>
+              </a:solidFill>
+              <a:effectLst/>
+              <a:uFillTx/>
+              <a:latin typeface="Calibri"/>
+            </a:endParaRPr>
+          </a:p>
+          <a:p>
+            <a:pPr marL="743040" lvl="1" indent="-285840" algn="l" defTabSz="457200">
               <a:lnSpc>
                 <a:spcPct val="100000"/>
               </a:lnSpc>
@@ -5457,7 +6241,7 @@
                 <a:srgbClr val="000000"/>
               </a:buClr>
               <a:buFont typeface="Arial"/>
-              <a:buChar char="•"/>
+              <a:buChar char="–"/>
             </a:pPr>
             <a:r>
               <a:rPr lang="en-US" sz="2800" b="0" u="none" strike="noStrike">
@@ -5468,7 +6252,7 @@
                 <a:uFillTx/>
                 <a:latin typeface="Calibri"/>
               </a:rPr>
-              <a:t>Click to edit Master text styles</a:t>
+              <a:t>Second level</a:t>
             </a:r>
             <a:endParaRPr lang="en-US" sz="2800" b="0" u="none" strike="noStrike">
               <a:solidFill>
@@ -5480,7 +6264,7 @@
             </a:endParaRPr>
           </a:p>
           <a:p>
-            <a:pPr marL="743040" lvl="1" indent="-285840" algn="l" defTabSz="457200">
+            <a:pPr marL="1143000" lvl="2" indent="-228600" algn="l" defTabSz="457200">
               <a:lnSpc>
                 <a:spcPct val="100000"/>
               </a:lnSpc>
@@ -5491,7 +6275,7 @@
                 <a:srgbClr val="000000"/>
               </a:buClr>
               <a:buFont typeface="Arial"/>
-              <a:buChar char="–"/>
+              <a:buChar char="•"/>
             </a:pPr>
             <a:r>
               <a:rPr lang="en-US" sz="2400" b="0" u="none" strike="noStrike">
@@ -5502,7 +6286,7 @@
                 <a:uFillTx/>
                 <a:latin typeface="Calibri"/>
               </a:rPr>
-              <a:t>Second level</a:t>
+              <a:t>Third level</a:t>
             </a:r>
             <a:endParaRPr lang="en-US" sz="2400" b="0" u="none" strike="noStrike">
               <a:solidFill>
@@ -5514,7 +6298,7 @@
             </a:endParaRPr>
           </a:p>
           <a:p>
-            <a:pPr marL="1143000" lvl="2" indent="-228600" algn="l" defTabSz="457200">
+            <a:pPr marL="1600200" lvl="3" indent="-228600" algn="l" defTabSz="457200">
               <a:lnSpc>
                 <a:spcPct val="100000"/>
               </a:lnSpc>
@@ -5525,7 +6309,7 @@
                 <a:srgbClr val="000000"/>
               </a:buClr>
               <a:buFont typeface="Arial"/>
-              <a:buChar char="•"/>
+              <a:buChar char="–"/>
             </a:pPr>
             <a:r>
               <a:rPr lang="en-US" sz="2000" b="0" u="none" strike="noStrike">
@@ -5536,7 +6320,7 @@
                 <a:uFillTx/>
                 <a:latin typeface="Calibri"/>
               </a:rPr>
-              <a:t>Third level</a:t>
+              <a:t>Fourth level</a:t>
             </a:r>
             <a:endParaRPr lang="en-US" sz="2000" b="0" u="none" strike="noStrike">
               <a:solidFill>
@@ -5548,46 +6332,12 @@
             </a:endParaRPr>
           </a:p>
           <a:p>
-            <a:pPr marL="1600200" lvl="3" indent="-228600" algn="l" defTabSz="457200">
+            <a:pPr marL="2057400" lvl="4" indent="-228600" algn="l" defTabSz="457200">
               <a:lnSpc>
                 <a:spcPct val="100000"/>
               </a:lnSpc>
               <a:spcBef>
-                <a:spcPts val="360"/>
-              </a:spcBef>
-              <a:buClr>
-                <a:srgbClr val="000000"/>
-              </a:buClr>
-              <a:buFont typeface="Arial"/>
-              <a:buChar char="–"/>
-            </a:pPr>
-            <a:r>
-              <a:rPr lang="en-US" sz="1800" b="0" u="none" strike="noStrike">
-                <a:solidFill>
-                  <a:schemeClr val="dk1"/>
-                </a:solidFill>
-                <a:effectLst/>
-                <a:uFillTx/>
-                <a:latin typeface="Calibri"/>
-              </a:rPr>
-              <a:t>Fourth level</a:t>
-            </a:r>
-            <a:endParaRPr lang="en-US" sz="1800" b="0" u="none" strike="noStrike">
-              <a:solidFill>
-                <a:schemeClr val="dk1"/>
-              </a:solidFill>
-              <a:effectLst/>
-              <a:uFillTx/>
-              <a:latin typeface="Calibri"/>
-            </a:endParaRPr>
-          </a:p>
-          <a:p>
-            <a:pPr marL="2057400" lvl="4" indent="-228600" algn="l" defTabSz="457200">
-              <a:lnSpc>
-                <a:spcPct val="100000"/>
-              </a:lnSpc>
-              <a:spcBef>
-                <a:spcPts val="360"/>
+                <a:spcPts val="400"/>
               </a:spcBef>
               <a:buClr>
                 <a:srgbClr val="000000"/>
@@ -5596,7 +6346,7 @@
               <a:buChar char="»"/>
             </a:pPr>
             <a:r>
-              <a:rPr lang="en-US" sz="1800" b="0" u="none" strike="noStrike">
+              <a:rPr lang="en-US" sz="2000" b="0" u="none" strike="noStrike">
                 <a:solidFill>
                   <a:schemeClr val="dk1"/>
                 </a:solidFill>
@@ -5606,7 +6356,7 @@
               </a:rPr>
               <a:t>Fifth level</a:t>
             </a:r>
-            <a:endParaRPr lang="en-US" sz="1800" b="0" u="none" strike="noStrike">
+            <a:endParaRPr lang="en-US" sz="2000" b="0" u="none" strike="noStrike">
               <a:solidFill>
                 <a:schemeClr val="dk1"/>
               </a:solidFill>
@@ -5620,312 +6370,6 @@
       <p:sp>
         <p:nvSpPr>
           <p:cNvPr id="34" name="PlaceHolder 3"/>
-          <p:cNvSpPr>
-            <a:spLocks noGrp="1"/>
-          </p:cNvSpPr>
-          <p:nvPr>
-            <p:ph type="body"/>
-          </p:nvPr>
-        </p:nvSpPr>
-        <p:spPr>
-          <a:xfrm>
-            <a:off x="4648320" y="1600200"/>
-            <a:ext cx="4036680" cy="4524120"/>
-          </a:xfrm>
-          <a:prstGeom prst="rect">
-            <a:avLst/>
-          </a:prstGeom>
-          <a:noFill/>
-          <a:ln w="0">
-            <a:noFill/>
-          </a:ln>
-        </p:spPr>
-        <p:txBody>
-          <a:bodyPr lIns="91440" tIns="45720" rIns="91440" bIns="45720" anchor="t">
-            <a:noAutofit/>
-          </a:bodyPr>
-          <a:lstStyle>
-            <a:lvl1pPr algn="l" defTabSz="457200">
-              <a:lnSpc>
-                <a:spcPct val="100000"/>
-              </a:lnSpc>
-              <a:spcBef>
-                <a:spcPts val="561"/>
-              </a:spcBef>
-              <a:buClr>
-                <a:srgbClr val="000000"/>
-              </a:buClr>
-              <a:buFont typeface="Arial"/>
-              <a:buChar char="•"/>
-              <a:defRPr lang="en-US" sz="2800" b="0" u="none" strike="noStrike">
-                <a:solidFill>
-                  <a:schemeClr val="dk1"/>
-                </a:solidFill>
-                <a:effectLst/>
-                <a:uFillTx/>
-                <a:latin typeface="Calibri"/>
-              </a:defRPr>
-            </a:lvl1pPr>
-            <a:lvl2pPr lvl="1" algn="l" defTabSz="457200">
-              <a:lnSpc>
-                <a:spcPct val="100000"/>
-              </a:lnSpc>
-              <a:spcBef>
-                <a:spcPts val="479"/>
-              </a:spcBef>
-              <a:buClr>
-                <a:srgbClr val="000000"/>
-              </a:buClr>
-              <a:buFont typeface="Arial"/>
-              <a:buChar char="–"/>
-              <a:defRPr lang="en-US" sz="2400" b="0" u="none" strike="noStrike">
-                <a:solidFill>
-                  <a:schemeClr val="dk1"/>
-                </a:solidFill>
-                <a:effectLst/>
-                <a:uFillTx/>
-                <a:latin typeface="Calibri"/>
-              </a:defRPr>
-            </a:lvl2pPr>
-            <a:lvl3pPr lvl="2" algn="l" defTabSz="457200">
-              <a:lnSpc>
-                <a:spcPct val="100000"/>
-              </a:lnSpc>
-              <a:spcBef>
-                <a:spcPts val="400"/>
-              </a:spcBef>
-              <a:buClr>
-                <a:srgbClr val="000000"/>
-              </a:buClr>
-              <a:buFont typeface="Arial"/>
-              <a:buChar char="•"/>
-              <a:defRPr lang="en-US" sz="2000" b="0" u="none" strike="noStrike">
-                <a:solidFill>
-                  <a:schemeClr val="dk1"/>
-                </a:solidFill>
-                <a:effectLst/>
-                <a:uFillTx/>
-                <a:latin typeface="Calibri"/>
-              </a:defRPr>
-            </a:lvl3pPr>
-            <a:lvl4pPr lvl="3" algn="l" defTabSz="457200">
-              <a:lnSpc>
-                <a:spcPct val="100000"/>
-              </a:lnSpc>
-              <a:spcBef>
-                <a:spcPts val="360"/>
-              </a:spcBef>
-              <a:buClr>
-                <a:srgbClr val="000000"/>
-              </a:buClr>
-              <a:buFont typeface="Arial"/>
-              <a:buChar char="–"/>
-              <a:defRPr lang="en-US" sz="1800" b="0" u="none" strike="noStrike">
-                <a:solidFill>
-                  <a:schemeClr val="dk1"/>
-                </a:solidFill>
-                <a:effectLst/>
-                <a:uFillTx/>
-                <a:latin typeface="Calibri"/>
-              </a:defRPr>
-            </a:lvl4pPr>
-            <a:lvl5pPr lvl="4" algn="l" defTabSz="457200">
-              <a:lnSpc>
-                <a:spcPct val="100000"/>
-              </a:lnSpc>
-              <a:spcBef>
-                <a:spcPts val="360"/>
-              </a:spcBef>
-              <a:buClr>
-                <a:srgbClr val="000000"/>
-              </a:buClr>
-              <a:buFont typeface="Arial"/>
-              <a:buChar char="»"/>
-              <a:defRPr lang="en-US" sz="1800" b="0" u="none" strike="noStrike">
-                <a:solidFill>
-                  <a:schemeClr val="dk1"/>
-                </a:solidFill>
-                <a:effectLst/>
-                <a:uFillTx/>
-                <a:latin typeface="Calibri"/>
-              </a:defRPr>
-            </a:lvl5pPr>
-          </a:lstStyle>
-          <a:p>
-            <a:pPr marL="343080" indent="-343080" algn="l" defTabSz="457200">
-              <a:lnSpc>
-                <a:spcPct val="100000"/>
-              </a:lnSpc>
-              <a:spcBef>
-                <a:spcPts val="561"/>
-              </a:spcBef>
-              <a:buClr>
-                <a:srgbClr val="000000"/>
-              </a:buClr>
-              <a:buFont typeface="Arial"/>
-              <a:buChar char="•"/>
-            </a:pPr>
-            <a:r>
-              <a:rPr lang="en-US" sz="2800" b="0" u="none" strike="noStrike">
-                <a:solidFill>
-                  <a:schemeClr val="dk1"/>
-                </a:solidFill>
-                <a:effectLst/>
-                <a:uFillTx/>
-                <a:latin typeface="Calibri"/>
-              </a:rPr>
-              <a:t>Click to edit Master text styles</a:t>
-            </a:r>
-            <a:endParaRPr lang="en-US" sz="2800" b="0" u="none" strike="noStrike">
-              <a:solidFill>
-                <a:schemeClr val="dk1"/>
-              </a:solidFill>
-              <a:effectLst/>
-              <a:uFillTx/>
-              <a:latin typeface="Calibri"/>
-            </a:endParaRPr>
-          </a:p>
-          <a:p>
-            <a:pPr marL="743040" lvl="1" indent="-285840" algn="l" defTabSz="457200">
-              <a:lnSpc>
-                <a:spcPct val="100000"/>
-              </a:lnSpc>
-              <a:spcBef>
-                <a:spcPts val="479"/>
-              </a:spcBef>
-              <a:buClr>
-                <a:srgbClr val="000000"/>
-              </a:buClr>
-              <a:buFont typeface="Arial"/>
-              <a:buChar char="–"/>
-            </a:pPr>
-            <a:r>
-              <a:rPr lang="en-US" sz="2400" b="0" u="none" strike="noStrike">
-                <a:solidFill>
-                  <a:schemeClr val="dk1"/>
-                </a:solidFill>
-                <a:effectLst/>
-                <a:uFillTx/>
-                <a:latin typeface="Calibri"/>
-              </a:rPr>
-              <a:t>Second level</a:t>
-            </a:r>
-            <a:endParaRPr lang="en-US" sz="2400" b="0" u="none" strike="noStrike">
-              <a:solidFill>
-                <a:schemeClr val="dk1"/>
-              </a:solidFill>
-              <a:effectLst/>
-              <a:uFillTx/>
-              <a:latin typeface="Calibri"/>
-            </a:endParaRPr>
-          </a:p>
-          <a:p>
-            <a:pPr marL="1143000" lvl="2" indent="-228600" algn="l" defTabSz="457200">
-              <a:lnSpc>
-                <a:spcPct val="100000"/>
-              </a:lnSpc>
-              <a:spcBef>
-                <a:spcPts val="400"/>
-              </a:spcBef>
-              <a:buClr>
-                <a:srgbClr val="000000"/>
-              </a:buClr>
-              <a:buFont typeface="Arial"/>
-              <a:buChar char="•"/>
-            </a:pPr>
-            <a:r>
-              <a:rPr lang="en-US" sz="2000" b="0" u="none" strike="noStrike">
-                <a:solidFill>
-                  <a:schemeClr val="dk1"/>
-                </a:solidFill>
-                <a:effectLst/>
-                <a:uFillTx/>
-                <a:latin typeface="Calibri"/>
-              </a:rPr>
-              <a:t>Third level</a:t>
-            </a:r>
-            <a:endParaRPr lang="en-US" sz="2000" b="0" u="none" strike="noStrike">
-              <a:solidFill>
-                <a:schemeClr val="dk1"/>
-              </a:solidFill>
-              <a:effectLst/>
-              <a:uFillTx/>
-              <a:latin typeface="Calibri"/>
-            </a:endParaRPr>
-          </a:p>
-          <a:p>
-            <a:pPr marL="1600200" lvl="3" indent="-228600" algn="l" defTabSz="457200">
-              <a:lnSpc>
-                <a:spcPct val="100000"/>
-              </a:lnSpc>
-              <a:spcBef>
-                <a:spcPts val="360"/>
-              </a:spcBef>
-              <a:buClr>
-                <a:srgbClr val="000000"/>
-              </a:buClr>
-              <a:buFont typeface="Arial"/>
-              <a:buChar char="–"/>
-            </a:pPr>
-            <a:r>
-              <a:rPr lang="en-US" sz="1800" b="0" u="none" strike="noStrike">
-                <a:solidFill>
-                  <a:schemeClr val="dk1"/>
-                </a:solidFill>
-                <a:effectLst/>
-                <a:uFillTx/>
-                <a:latin typeface="Calibri"/>
-              </a:rPr>
-              <a:t>Fourth level</a:t>
-            </a:r>
-            <a:endParaRPr lang="en-US" sz="1800" b="0" u="none" strike="noStrike">
-              <a:solidFill>
-                <a:schemeClr val="dk1"/>
-              </a:solidFill>
-              <a:effectLst/>
-              <a:uFillTx/>
-              <a:latin typeface="Calibri"/>
-            </a:endParaRPr>
-          </a:p>
-          <a:p>
-            <a:pPr marL="2057400" lvl="4" indent="-228600" algn="l" defTabSz="457200">
-              <a:lnSpc>
-                <a:spcPct val="100000"/>
-              </a:lnSpc>
-              <a:spcBef>
-                <a:spcPts val="360"/>
-              </a:spcBef>
-              <a:buClr>
-                <a:srgbClr val="000000"/>
-              </a:buClr>
-              <a:buFont typeface="Arial"/>
-              <a:buChar char="»"/>
-            </a:pPr>
-            <a:r>
-              <a:rPr lang="en-US" sz="1800" b="0" u="none" strike="noStrike">
-                <a:solidFill>
-                  <a:schemeClr val="dk1"/>
-                </a:solidFill>
-                <a:effectLst/>
-                <a:uFillTx/>
-                <a:latin typeface="Calibri"/>
-              </a:rPr>
-              <a:t>Fifth level</a:t>
-            </a:r>
-            <a:endParaRPr lang="en-US" sz="1800" b="0" u="none" strike="noStrike">
-              <a:solidFill>
-                <a:schemeClr val="dk1"/>
-              </a:solidFill>
-              <a:effectLst/>
-              <a:uFillTx/>
-              <a:latin typeface="Calibri"/>
-            </a:endParaRPr>
-          </a:p>
-        </p:txBody>
-      </p:sp>
-      <p:sp>
-        <p:nvSpPr>
-          <p:cNvPr id="35" name="PlaceHolder 4"/>
           <p:cNvSpPr>
             <a:spLocks noGrp="1"/>
           </p:cNvSpPr>
@@ -5936,7 +6380,7 @@
         <p:spPr>
           <a:xfrm>
             <a:off x="457200" y="6356520"/>
-            <a:ext cx="2131920" cy="363240"/>
+            <a:ext cx="2131560" cy="362880"/>
           </a:xfrm>
           <a:prstGeom prst="rect">
             <a:avLst/>
@@ -6007,7 +6451,7 @@
       </p:sp>
       <p:sp>
         <p:nvSpPr>
-          <p:cNvPr id="36" name="PlaceHolder 5"/>
+          <p:cNvPr id="35" name="PlaceHolder 4"/>
           <p:cNvSpPr>
             <a:spLocks noGrp="1"/>
           </p:cNvSpPr>
@@ -6018,7 +6462,7 @@
         <p:spPr>
           <a:xfrm>
             <a:off x="3124080" y="6356520"/>
-            <a:ext cx="2893680" cy="363240"/>
+            <a:ext cx="2893320" cy="362880"/>
           </a:xfrm>
           <a:prstGeom prst="rect">
             <a:avLst/>
@@ -6085,7 +6529,7 @@
       </p:sp>
       <p:sp>
         <p:nvSpPr>
-          <p:cNvPr id="37" name="PlaceHolder 6"/>
+          <p:cNvPr id="36" name="PlaceHolder 5"/>
           <p:cNvSpPr>
             <a:spLocks noGrp="1"/>
           </p:cNvSpPr>
@@ -6096,7 +6540,7 @@
         <p:spPr>
           <a:xfrm>
             <a:off x="6553080" y="6356520"/>
-            <a:ext cx="2131920" cy="363240"/>
+            <a:ext cx="2131560" cy="362880"/>
           </a:xfrm>
           <a:prstGeom prst="rect">
             <a:avLst/>
@@ -6141,7 +6585,7 @@
                 <a:tab pos="0" algn="l"/>
               </a:tabLst>
             </a:pPr>
-            <a:fld id="{E2A91DE2-A99A-450A-BA18-2FE539119CCE}" type="slidenum">
+            <a:fld id="{BD51F0F8-AD34-4018-A8ED-8AA25B263286}" type="slidenum">
               <a:rPr lang="en-US" sz="1200" b="0" u="none" strike="noStrike">
                 <a:solidFill>
                   <a:schemeClr val="dk1">
@@ -6171,8 +6615,8 @@
 </file>
 
 <file path=ppt/slideLayouts/slideLayout8.xml><?xml version="1.0" encoding="utf-8"?>
-<p:sldLayout xmlns:a="http://schemas.openxmlformats.org/drawingml/2006/main" xmlns:p="http://schemas.openxmlformats.org/presentationml/2006/main" xmlns:r="http://schemas.openxmlformats.org/officeDocument/2006/relationships" xmlns:p14="http://schemas.microsoft.com/office/powerpoint/2010/main" xmlns:p15="http://schemas.microsoft.com/office/powerpoint/2012/main" xmlns:mc="http://schemas.openxmlformats.org/markup-compatibility/2006" type="blank" preserve="1">
-  <p:cSld name="Comparison">
+<p:sldLayout xmlns:a="http://schemas.openxmlformats.org/drawingml/2006/main" xmlns:p="http://schemas.openxmlformats.org/presentationml/2006/main" xmlns:r="http://schemas.openxmlformats.org/officeDocument/2006/relationships" xmlns:p14="http://schemas.microsoft.com/office/powerpoint/2010/main" xmlns:p15="http://schemas.microsoft.com/office/powerpoint/2012/main" xmlns:mc="http://schemas.openxmlformats.org/markup-compatibility/2006" type="obj" preserve="1">
+  <p:cSld name="Title and Content">
     <p:bg>
       <p:bgPr>
         <a:solidFill>
@@ -6196,7 +6640,7 @@
       </p:grpSpPr>
       <p:sp>
         <p:nvSpPr>
-          <p:cNvPr id="38" name="PlaceHolder 1"/>
+          <p:cNvPr id="37" name="PlaceHolder 1"/>
           <p:cNvSpPr>
             <a:spLocks noGrp="1"/>
           </p:cNvSpPr>
@@ -6207,7 +6651,7 @@
         <p:spPr>
           <a:xfrm>
             <a:off x="457200" y="274680"/>
-            <a:ext cx="8227800" cy="1141200"/>
+            <a:ext cx="8227440" cy="1140840"/>
           </a:xfrm>
           <a:prstGeom prst="rect">
             <a:avLst/>
@@ -6274,7 +6718,7 @@
       </p:sp>
       <p:sp>
         <p:nvSpPr>
-          <p:cNvPr id="39" name="PlaceHolder 2"/>
+          <p:cNvPr id="38" name="PlaceHolder 2"/>
           <p:cNvSpPr>
             <a:spLocks noGrp="1"/>
           </p:cNvSpPr>
@@ -6284,92 +6728,8 @@
         </p:nvSpPr>
         <p:spPr>
           <a:xfrm>
-            <a:off x="457200" y="1535040"/>
-            <a:ext cx="4038480" cy="637920"/>
-          </a:xfrm>
-          <a:prstGeom prst="rect">
-            <a:avLst/>
-          </a:prstGeom>
-          <a:noFill/>
-          <a:ln w="0">
-            <a:noFill/>
-          </a:ln>
-        </p:spPr>
-        <p:txBody>
-          <a:bodyPr lIns="91440" tIns="45720" rIns="91440" bIns="45720" anchor="b">
-            <a:noAutofit/>
-          </a:bodyPr>
-          <a:lstStyle>
-            <a:lvl1pPr indent="0" algn="l" defTabSz="457200">
-              <a:lnSpc>
-                <a:spcPct val="100000"/>
-              </a:lnSpc>
-              <a:spcBef>
-                <a:spcPts val="479"/>
-              </a:spcBef>
-              <a:buNone/>
-              <a:tabLst>
-                <a:tab pos="0" algn="l"/>
-              </a:tabLst>
-              <a:defRPr lang="en-US" sz="2400" b="1" u="none" strike="noStrike">
-                <a:solidFill>
-                  <a:schemeClr val="dk1"/>
-                </a:solidFill>
-                <a:effectLst/>
-                <a:uFillTx/>
-                <a:latin typeface="Calibri"/>
-              </a:defRPr>
-            </a:lvl1pPr>
-          </a:lstStyle>
-          <a:p>
-            <a:pPr indent="0" algn="l" defTabSz="457200">
-              <a:lnSpc>
-                <a:spcPct val="100000"/>
-              </a:lnSpc>
-              <a:spcBef>
-                <a:spcPts val="479"/>
-              </a:spcBef>
-              <a:buNone/>
-              <a:tabLst>
-                <a:tab pos="0" algn="l"/>
-              </a:tabLst>
-            </a:pPr>
-            <a:r>
-              <a:rPr lang="en-US" sz="2400" b="1" u="none" strike="noStrike">
-                <a:solidFill>
-                  <a:schemeClr val="dk1"/>
-                </a:solidFill>
-                <a:effectLst/>
-                <a:uFillTx/>
-                <a:latin typeface="Calibri"/>
-              </a:rPr>
-              <a:t>Click to edit Master text styles</a:t>
-            </a:r>
-            <a:endParaRPr lang="en-US" sz="2400" b="0" u="none" strike="noStrike">
-              <a:solidFill>
-                <a:schemeClr val="dk1"/>
-              </a:solidFill>
-              <a:effectLst/>
-              <a:uFillTx/>
-              <a:latin typeface="Calibri"/>
-            </a:endParaRPr>
-          </a:p>
-        </p:txBody>
-      </p:sp>
-      <p:sp>
-        <p:nvSpPr>
-          <p:cNvPr id="40" name="PlaceHolder 3"/>
-          <p:cNvSpPr>
-            <a:spLocks noGrp="1"/>
-          </p:cNvSpPr>
-          <p:nvPr>
-            <p:ph type="body"/>
-          </p:nvPr>
-        </p:nvSpPr>
-        <p:spPr>
-          <a:xfrm>
-            <a:off x="457200" y="2174760"/>
-            <a:ext cx="4038480" cy="3949560"/>
+            <a:off x="457200" y="1600200"/>
+            <a:ext cx="8227440" cy="4523760"/>
           </a:xfrm>
           <a:prstGeom prst="rect">
             <a:avLst/>
@@ -6389,6 +6749,48 @@
                 <a:spcPct val="100000"/>
               </a:lnSpc>
               <a:spcBef>
+                <a:spcPts val="641"/>
+              </a:spcBef>
+              <a:buClr>
+                <a:srgbClr val="000000"/>
+              </a:buClr>
+              <a:buFont typeface="Arial"/>
+              <a:buChar char="•"/>
+              <a:defRPr lang="en-US" sz="3200" b="0" u="none" strike="noStrike">
+                <a:solidFill>
+                  <a:schemeClr val="dk1"/>
+                </a:solidFill>
+                <a:effectLst/>
+                <a:uFillTx/>
+                <a:latin typeface="Calibri"/>
+              </a:defRPr>
+            </a:lvl1pPr>
+            <a:lvl2pPr lvl="1" algn="l" defTabSz="457200">
+              <a:lnSpc>
+                <a:spcPct val="100000"/>
+              </a:lnSpc>
+              <a:spcBef>
+                <a:spcPts val="561"/>
+              </a:spcBef>
+              <a:buClr>
+                <a:srgbClr val="000000"/>
+              </a:buClr>
+              <a:buFont typeface="Arial"/>
+              <a:buChar char="–"/>
+              <a:defRPr lang="en-US" sz="2800" b="0" u="none" strike="noStrike">
+                <a:solidFill>
+                  <a:schemeClr val="dk1"/>
+                </a:solidFill>
+                <a:effectLst/>
+                <a:uFillTx/>
+                <a:latin typeface="Calibri"/>
+              </a:defRPr>
+            </a:lvl2pPr>
+            <a:lvl3pPr lvl="2" algn="l" defTabSz="457200">
+              <a:lnSpc>
+                <a:spcPct val="100000"/>
+              </a:lnSpc>
+              <a:spcBef>
                 <a:spcPts val="479"/>
               </a:spcBef>
               <a:buClr>
@@ -6396,9 +6798,6 @@
               </a:buClr>
               <a:buFont typeface="Arial"/>
               <a:buChar char="•"/>
-              <a:tabLst>
-                <a:tab pos="0" algn="l"/>
-              </a:tabLst>
               <a:defRPr lang="en-US" sz="2400" b="0" u="none" strike="noStrike">
                 <a:solidFill>
                   <a:schemeClr val="dk1"/>
@@ -6407,8 +6806,8 @@
                 <a:uFillTx/>
                 <a:latin typeface="Calibri"/>
               </a:defRPr>
-            </a:lvl1pPr>
-            <a:lvl2pPr lvl="1" algn="l" defTabSz="457200">
+            </a:lvl3pPr>
+            <a:lvl4pPr lvl="3" algn="l" defTabSz="457200">
               <a:lnSpc>
                 <a:spcPct val="100000"/>
               </a:lnSpc>
@@ -6420,9 +6819,6 @@
               </a:buClr>
               <a:buFont typeface="Arial"/>
               <a:buChar char="–"/>
-              <a:tabLst>
-                <a:tab pos="0" algn="l"/>
-              </a:tabLst>
               <a:defRPr lang="en-US" sz="2000" b="0" u="none" strike="noStrike">
                 <a:solidFill>
                   <a:schemeClr val="dk1"/>
@@ -6431,82 +6827,99 @@
                 <a:uFillTx/>
                 <a:latin typeface="Calibri"/>
               </a:defRPr>
-            </a:lvl2pPr>
-            <a:lvl3pPr lvl="2" algn="l" defTabSz="457200">
+            </a:lvl4pPr>
+            <a:lvl5pPr lvl="4" algn="l" defTabSz="457200">
               <a:lnSpc>
                 <a:spcPct val="100000"/>
               </a:lnSpc>
               <a:spcBef>
-                <a:spcPts val="360"/>
+                <a:spcPts val="400"/>
+              </a:spcBef>
+              <a:buClr>
+                <a:srgbClr val="000000"/>
+              </a:buClr>
+              <a:buFont typeface="Arial"/>
+              <a:buChar char="»"/>
+              <a:defRPr lang="en-US" sz="2000" b="0" u="none" strike="noStrike">
+                <a:solidFill>
+                  <a:schemeClr val="dk1"/>
+                </a:solidFill>
+                <a:effectLst/>
+                <a:uFillTx/>
+                <a:latin typeface="Calibri"/>
+              </a:defRPr>
+            </a:lvl5pPr>
+          </a:lstStyle>
+          <a:p>
+            <a:pPr marL="343080" indent="-343080" algn="l" defTabSz="457200">
+              <a:lnSpc>
+                <a:spcPct val="100000"/>
+              </a:lnSpc>
+              <a:spcBef>
+                <a:spcPts val="641"/>
               </a:spcBef>
               <a:buClr>
                 <a:srgbClr val="000000"/>
               </a:buClr>
               <a:buFont typeface="Arial"/>
               <a:buChar char="•"/>
-              <a:tabLst>
-                <a:tab pos="0" algn="l"/>
-              </a:tabLst>
-              <a:defRPr lang="en-US" sz="1800" b="0" u="none" strike="noStrike">
+            </a:pPr>
+            <a:r>
+              <a:rPr lang="en-US" sz="3200" b="0" u="none" strike="noStrike">
                 <a:solidFill>
                   <a:schemeClr val="dk1"/>
                 </a:solidFill>
                 <a:effectLst/>
                 <a:uFillTx/>
                 <a:latin typeface="Calibri"/>
-              </a:defRPr>
-            </a:lvl3pPr>
-            <a:lvl4pPr lvl="3" algn="l" defTabSz="457200">
+              </a:rPr>
+              <a:t>Click to edit Master text styles</a:t>
+            </a:r>
+            <a:endParaRPr lang="en-US" sz="3200" b="0" u="none" strike="noStrike">
+              <a:solidFill>
+                <a:schemeClr val="dk1"/>
+              </a:solidFill>
+              <a:effectLst/>
+              <a:uFillTx/>
+              <a:latin typeface="Calibri"/>
+            </a:endParaRPr>
+          </a:p>
+          <a:p>
+            <a:pPr marL="743040" lvl="1" indent="-285840" algn="l" defTabSz="457200">
               <a:lnSpc>
                 <a:spcPct val="100000"/>
               </a:lnSpc>
               <a:spcBef>
-                <a:spcPts val="320"/>
+                <a:spcPts val="561"/>
               </a:spcBef>
               <a:buClr>
                 <a:srgbClr val="000000"/>
               </a:buClr>
               <a:buFont typeface="Arial"/>
               <a:buChar char="–"/>
-              <a:tabLst>
-                <a:tab pos="0" algn="l"/>
-              </a:tabLst>
-              <a:defRPr lang="en-US" sz="1600" b="0" u="none" strike="noStrike">
+            </a:pPr>
+            <a:r>
+              <a:rPr lang="en-US" sz="2800" b="0" u="none" strike="noStrike">
                 <a:solidFill>
                   <a:schemeClr val="dk1"/>
                 </a:solidFill>
                 <a:effectLst/>
                 <a:uFillTx/>
                 <a:latin typeface="Calibri"/>
-              </a:defRPr>
-            </a:lvl4pPr>
-            <a:lvl5pPr lvl="4" algn="l" defTabSz="457200">
-              <a:lnSpc>
-                <a:spcPct val="100000"/>
-              </a:lnSpc>
-              <a:spcBef>
-                <a:spcPts val="320"/>
-              </a:spcBef>
-              <a:buClr>
-                <a:srgbClr val="000000"/>
-              </a:buClr>
-              <a:buFont typeface="Arial"/>
-              <a:buChar char="»"/>
-              <a:tabLst>
-                <a:tab pos="0" algn="l"/>
-              </a:tabLst>
-              <a:defRPr lang="en-US" sz="1600" b="0" u="none" strike="noStrike">
-                <a:solidFill>
-                  <a:schemeClr val="dk1"/>
-                </a:solidFill>
-                <a:effectLst/>
-                <a:uFillTx/>
-                <a:latin typeface="Calibri"/>
-              </a:defRPr>
-            </a:lvl5pPr>
-          </a:lstStyle>
-          <a:p>
-            <a:pPr marL="343080" indent="-343080" algn="l" defTabSz="457200">
+              </a:rPr>
+              <a:t>Second level</a:t>
+            </a:r>
+            <a:endParaRPr lang="en-US" sz="2800" b="0" u="none" strike="noStrike">
+              <a:solidFill>
+                <a:schemeClr val="dk1"/>
+              </a:solidFill>
+              <a:effectLst/>
+              <a:uFillTx/>
+              <a:latin typeface="Calibri"/>
+            </a:endParaRPr>
+          </a:p>
+          <a:p>
+            <a:pPr marL="1143000" lvl="2" indent="-228600" algn="l" defTabSz="457200">
               <a:lnSpc>
                 <a:spcPct val="100000"/>
               </a:lnSpc>
@@ -6518,9 +6931,6 @@
               </a:buClr>
               <a:buFont typeface="Arial"/>
               <a:buChar char="•"/>
-              <a:tabLst>
-                <a:tab pos="0" algn="l"/>
-              </a:tabLst>
             </a:pPr>
             <a:r>
               <a:rPr lang="en-US" sz="2400" b="0" u="none" strike="noStrike">
@@ -6531,7 +6941,7 @@
                 <a:uFillTx/>
                 <a:latin typeface="Calibri"/>
               </a:rPr>
-              <a:t>Click to edit Master text styles</a:t>
+              <a:t>Third level</a:t>
             </a:r>
             <a:endParaRPr lang="en-US" sz="2400" b="0" u="none" strike="noStrike">
               <a:solidFill>
@@ -6543,7 +6953,7 @@
             </a:endParaRPr>
           </a:p>
           <a:p>
-            <a:pPr marL="743040" lvl="1" indent="-285840" algn="l" defTabSz="457200">
+            <a:pPr marL="1600200" lvl="3" indent="-228600" algn="l" defTabSz="457200">
               <a:lnSpc>
                 <a:spcPct val="100000"/>
               </a:lnSpc>
@@ -6555,9 +6965,6 @@
               </a:buClr>
               <a:buFont typeface="Arial"/>
               <a:buChar char="–"/>
-              <a:tabLst>
-                <a:tab pos="0" algn="l"/>
-              </a:tabLst>
             </a:pPr>
             <a:r>
               <a:rPr lang="en-US" sz="2000" b="0" u="none" strike="noStrike">
@@ -6568,7 +6975,7 @@
                 <a:uFillTx/>
                 <a:latin typeface="Calibri"/>
               </a:rPr>
-              <a:t>Second level</a:t>
+              <a:t>Fourth level</a:t>
             </a:r>
             <a:endParaRPr lang="en-US" sz="2000" b="0" u="none" strike="noStrike">
               <a:solidFill>
@@ -6580,98 +6987,21 @@
             </a:endParaRPr>
           </a:p>
           <a:p>
-            <a:pPr marL="1143000" lvl="2" indent="-228600" algn="l" defTabSz="457200">
+            <a:pPr marL="2057400" lvl="4" indent="-228600" algn="l" defTabSz="457200">
               <a:lnSpc>
                 <a:spcPct val="100000"/>
               </a:lnSpc>
               <a:spcBef>
-                <a:spcPts val="360"/>
-              </a:spcBef>
-              <a:buClr>
-                <a:srgbClr val="000000"/>
-              </a:buClr>
-              <a:buFont typeface="Arial"/>
-              <a:buChar char="•"/>
-              <a:tabLst>
-                <a:tab pos="0" algn="l"/>
-              </a:tabLst>
-            </a:pPr>
-            <a:r>
-              <a:rPr lang="en-US" sz="1800" b="0" u="none" strike="noStrike">
-                <a:solidFill>
-                  <a:schemeClr val="dk1"/>
-                </a:solidFill>
-                <a:effectLst/>
-                <a:uFillTx/>
-                <a:latin typeface="Calibri"/>
-              </a:rPr>
-              <a:t>Third level</a:t>
-            </a:r>
-            <a:endParaRPr lang="en-US" sz="1800" b="0" u="none" strike="noStrike">
-              <a:solidFill>
-                <a:schemeClr val="dk1"/>
-              </a:solidFill>
-              <a:effectLst/>
-              <a:uFillTx/>
-              <a:latin typeface="Calibri"/>
-            </a:endParaRPr>
-          </a:p>
-          <a:p>
-            <a:pPr marL="1600200" lvl="3" indent="-228600" algn="l" defTabSz="457200">
-              <a:lnSpc>
-                <a:spcPct val="100000"/>
-              </a:lnSpc>
-              <a:spcBef>
-                <a:spcPts val="320"/>
-              </a:spcBef>
-              <a:buClr>
-                <a:srgbClr val="000000"/>
-              </a:buClr>
-              <a:buFont typeface="Arial"/>
-              <a:buChar char="–"/>
-              <a:tabLst>
-                <a:tab pos="0" algn="l"/>
-              </a:tabLst>
-            </a:pPr>
-            <a:r>
-              <a:rPr lang="en-US" sz="1600" b="0" u="none" strike="noStrike">
-                <a:solidFill>
-                  <a:schemeClr val="dk1"/>
-                </a:solidFill>
-                <a:effectLst/>
-                <a:uFillTx/>
-                <a:latin typeface="Calibri"/>
-              </a:rPr>
-              <a:t>Fourth level</a:t>
-            </a:r>
-            <a:endParaRPr lang="en-US" sz="1600" b="0" u="none" strike="noStrike">
-              <a:solidFill>
-                <a:schemeClr val="dk1"/>
-              </a:solidFill>
-              <a:effectLst/>
-              <a:uFillTx/>
-              <a:latin typeface="Calibri"/>
-            </a:endParaRPr>
-          </a:p>
-          <a:p>
-            <a:pPr marL="2057400" lvl="4" indent="-228600" algn="l" defTabSz="457200">
-              <a:lnSpc>
-                <a:spcPct val="100000"/>
-              </a:lnSpc>
-              <a:spcBef>
-                <a:spcPts val="320"/>
+                <a:spcPts val="400"/>
               </a:spcBef>
               <a:buClr>
                 <a:srgbClr val="000000"/>
               </a:buClr>
               <a:buFont typeface="Arial"/>
               <a:buChar char="»"/>
-              <a:tabLst>
-                <a:tab pos="0" algn="l"/>
-              </a:tabLst>
-            </a:pPr>
-            <a:r>
-              <a:rPr lang="en-US" sz="1600" b="0" u="none" strike="noStrike">
+            </a:pPr>
+            <a:r>
+              <a:rPr lang="en-US" sz="2000" b="0" u="none" strike="noStrike">
                 <a:solidFill>
                   <a:schemeClr val="dk1"/>
                 </a:solidFill>
@@ -6681,7 +7011,7 @@
               </a:rPr>
               <a:t>Fifth level</a:t>
             </a:r>
-            <a:endParaRPr lang="en-US" sz="1600" b="0" u="none" strike="noStrike">
+            <a:endParaRPr lang="en-US" sz="2000" b="0" u="none" strike="noStrike">
               <a:solidFill>
                 <a:schemeClr val="dk1"/>
               </a:solidFill>
@@ -6694,427 +7024,7 @@
       </p:sp>
       <p:sp>
         <p:nvSpPr>
-          <p:cNvPr id="41" name="PlaceHolder 4"/>
-          <p:cNvSpPr>
-            <a:spLocks noGrp="1"/>
-          </p:cNvSpPr>
-          <p:nvPr>
-            <p:ph type="body"/>
-          </p:nvPr>
-        </p:nvSpPr>
-        <p:spPr>
-          <a:xfrm>
-            <a:off x="4645080" y="1535040"/>
-            <a:ext cx="4039920" cy="637920"/>
-          </a:xfrm>
-          <a:prstGeom prst="rect">
-            <a:avLst/>
-          </a:prstGeom>
-          <a:noFill/>
-          <a:ln w="0">
-            <a:noFill/>
-          </a:ln>
-        </p:spPr>
-        <p:txBody>
-          <a:bodyPr lIns="91440" tIns="45720" rIns="91440" bIns="45720" anchor="b">
-            <a:noAutofit/>
-          </a:bodyPr>
-          <a:lstStyle>
-            <a:lvl1pPr indent="0" algn="l" defTabSz="457200">
-              <a:lnSpc>
-                <a:spcPct val="100000"/>
-              </a:lnSpc>
-              <a:spcBef>
-                <a:spcPts val="479"/>
-              </a:spcBef>
-              <a:buNone/>
-              <a:tabLst>
-                <a:tab pos="0" algn="l"/>
-              </a:tabLst>
-              <a:defRPr lang="en-US" sz="2400" b="1" u="none" strike="noStrike">
-                <a:solidFill>
-                  <a:schemeClr val="dk1"/>
-                </a:solidFill>
-                <a:effectLst/>
-                <a:uFillTx/>
-                <a:latin typeface="Calibri"/>
-              </a:defRPr>
-            </a:lvl1pPr>
-          </a:lstStyle>
-          <a:p>
-            <a:pPr indent="0" algn="l" defTabSz="457200">
-              <a:lnSpc>
-                <a:spcPct val="100000"/>
-              </a:lnSpc>
-              <a:spcBef>
-                <a:spcPts val="479"/>
-              </a:spcBef>
-              <a:buNone/>
-              <a:tabLst>
-                <a:tab pos="0" algn="l"/>
-              </a:tabLst>
-            </a:pPr>
-            <a:r>
-              <a:rPr lang="en-US" sz="2400" b="1" u="none" strike="noStrike">
-                <a:solidFill>
-                  <a:schemeClr val="dk1"/>
-                </a:solidFill>
-                <a:effectLst/>
-                <a:uFillTx/>
-                <a:latin typeface="Calibri"/>
-              </a:rPr>
-              <a:t>Click to edit Master text styles</a:t>
-            </a:r>
-            <a:endParaRPr lang="en-US" sz="2400" b="0" u="none" strike="noStrike">
-              <a:solidFill>
-                <a:schemeClr val="dk1"/>
-              </a:solidFill>
-              <a:effectLst/>
-              <a:uFillTx/>
-              <a:latin typeface="Calibri"/>
-            </a:endParaRPr>
-          </a:p>
-        </p:txBody>
-      </p:sp>
-      <p:sp>
-        <p:nvSpPr>
-          <p:cNvPr id="42" name="PlaceHolder 5"/>
-          <p:cNvSpPr>
-            <a:spLocks noGrp="1"/>
-          </p:cNvSpPr>
-          <p:nvPr>
-            <p:ph type="body"/>
-          </p:nvPr>
-        </p:nvSpPr>
-        <p:spPr>
-          <a:xfrm>
-            <a:off x="4645080" y="2174760"/>
-            <a:ext cx="4039920" cy="3949560"/>
-          </a:xfrm>
-          <a:prstGeom prst="rect">
-            <a:avLst/>
-          </a:prstGeom>
-          <a:noFill/>
-          <a:ln w="0">
-            <a:noFill/>
-          </a:ln>
-        </p:spPr>
-        <p:txBody>
-          <a:bodyPr lIns="91440" tIns="45720" rIns="91440" bIns="45720" anchor="t">
-            <a:noAutofit/>
-          </a:bodyPr>
-          <a:lstStyle>
-            <a:lvl1pPr algn="l" defTabSz="457200">
-              <a:lnSpc>
-                <a:spcPct val="100000"/>
-              </a:lnSpc>
-              <a:spcBef>
-                <a:spcPts val="479"/>
-              </a:spcBef>
-              <a:buClr>
-                <a:srgbClr val="000000"/>
-              </a:buClr>
-              <a:buFont typeface="Arial"/>
-              <a:buChar char="•"/>
-              <a:tabLst>
-                <a:tab pos="0" algn="l"/>
-              </a:tabLst>
-              <a:defRPr lang="en-US" sz="2400" b="0" u="none" strike="noStrike">
-                <a:solidFill>
-                  <a:schemeClr val="dk1"/>
-                </a:solidFill>
-                <a:effectLst/>
-                <a:uFillTx/>
-                <a:latin typeface="Calibri"/>
-              </a:defRPr>
-            </a:lvl1pPr>
-            <a:lvl2pPr lvl="1" algn="l" defTabSz="457200">
-              <a:lnSpc>
-                <a:spcPct val="100000"/>
-              </a:lnSpc>
-              <a:spcBef>
-                <a:spcPts val="400"/>
-              </a:spcBef>
-              <a:buClr>
-                <a:srgbClr val="000000"/>
-              </a:buClr>
-              <a:buFont typeface="Arial"/>
-              <a:buChar char="–"/>
-              <a:tabLst>
-                <a:tab pos="0" algn="l"/>
-              </a:tabLst>
-              <a:defRPr lang="en-US" sz="2000" b="0" u="none" strike="noStrike">
-                <a:solidFill>
-                  <a:schemeClr val="dk1"/>
-                </a:solidFill>
-                <a:effectLst/>
-                <a:uFillTx/>
-                <a:latin typeface="Calibri"/>
-              </a:defRPr>
-            </a:lvl2pPr>
-            <a:lvl3pPr lvl="2" algn="l" defTabSz="457200">
-              <a:lnSpc>
-                <a:spcPct val="100000"/>
-              </a:lnSpc>
-              <a:spcBef>
-                <a:spcPts val="360"/>
-              </a:spcBef>
-              <a:buClr>
-                <a:srgbClr val="000000"/>
-              </a:buClr>
-              <a:buFont typeface="Arial"/>
-              <a:buChar char="•"/>
-              <a:tabLst>
-                <a:tab pos="0" algn="l"/>
-              </a:tabLst>
-              <a:defRPr lang="en-US" sz="1800" b="0" u="none" strike="noStrike">
-                <a:solidFill>
-                  <a:schemeClr val="dk1"/>
-                </a:solidFill>
-                <a:effectLst/>
-                <a:uFillTx/>
-                <a:latin typeface="Calibri"/>
-              </a:defRPr>
-            </a:lvl3pPr>
-            <a:lvl4pPr lvl="3" algn="l" defTabSz="457200">
-              <a:lnSpc>
-                <a:spcPct val="100000"/>
-              </a:lnSpc>
-              <a:spcBef>
-                <a:spcPts val="320"/>
-              </a:spcBef>
-              <a:buClr>
-                <a:srgbClr val="000000"/>
-              </a:buClr>
-              <a:buFont typeface="Arial"/>
-              <a:buChar char="–"/>
-              <a:tabLst>
-                <a:tab pos="0" algn="l"/>
-              </a:tabLst>
-              <a:defRPr lang="en-US" sz="1600" b="0" u="none" strike="noStrike">
-                <a:solidFill>
-                  <a:schemeClr val="dk1"/>
-                </a:solidFill>
-                <a:effectLst/>
-                <a:uFillTx/>
-                <a:latin typeface="Calibri"/>
-              </a:defRPr>
-            </a:lvl4pPr>
-            <a:lvl5pPr lvl="4" algn="l" defTabSz="457200">
-              <a:lnSpc>
-                <a:spcPct val="100000"/>
-              </a:lnSpc>
-              <a:spcBef>
-                <a:spcPts val="320"/>
-              </a:spcBef>
-              <a:buClr>
-                <a:srgbClr val="000000"/>
-              </a:buClr>
-              <a:buFont typeface="Arial"/>
-              <a:buChar char="»"/>
-              <a:tabLst>
-                <a:tab pos="0" algn="l"/>
-              </a:tabLst>
-              <a:defRPr lang="en-US" sz="1600" b="0" u="none" strike="noStrike">
-                <a:solidFill>
-                  <a:schemeClr val="dk1"/>
-                </a:solidFill>
-                <a:effectLst/>
-                <a:uFillTx/>
-                <a:latin typeface="Calibri"/>
-              </a:defRPr>
-            </a:lvl5pPr>
-          </a:lstStyle>
-          <a:p>
-            <a:pPr marL="343080" indent="-343080" algn="l" defTabSz="457200">
-              <a:lnSpc>
-                <a:spcPct val="100000"/>
-              </a:lnSpc>
-              <a:spcBef>
-                <a:spcPts val="479"/>
-              </a:spcBef>
-              <a:buClr>
-                <a:srgbClr val="000000"/>
-              </a:buClr>
-              <a:buFont typeface="Arial"/>
-              <a:buChar char="•"/>
-              <a:tabLst>
-                <a:tab pos="0" algn="l"/>
-              </a:tabLst>
-            </a:pPr>
-            <a:r>
-              <a:rPr lang="en-US" sz="2400" b="0" u="none" strike="noStrike">
-                <a:solidFill>
-                  <a:schemeClr val="dk1"/>
-                </a:solidFill>
-                <a:effectLst/>
-                <a:uFillTx/>
-                <a:latin typeface="Calibri"/>
-              </a:rPr>
-              <a:t>Click to edit Master text styles</a:t>
-            </a:r>
-            <a:endParaRPr lang="en-US" sz="2400" b="0" u="none" strike="noStrike">
-              <a:solidFill>
-                <a:schemeClr val="dk1"/>
-              </a:solidFill>
-              <a:effectLst/>
-              <a:uFillTx/>
-              <a:latin typeface="Calibri"/>
-            </a:endParaRPr>
-          </a:p>
-          <a:p>
-            <a:pPr marL="743040" lvl="1" indent="-285840" algn="l" defTabSz="457200">
-              <a:lnSpc>
-                <a:spcPct val="100000"/>
-              </a:lnSpc>
-              <a:spcBef>
-                <a:spcPts val="400"/>
-              </a:spcBef>
-              <a:buClr>
-                <a:srgbClr val="000000"/>
-              </a:buClr>
-              <a:buFont typeface="Arial"/>
-              <a:buChar char="–"/>
-              <a:tabLst>
-                <a:tab pos="0" algn="l"/>
-              </a:tabLst>
-            </a:pPr>
-            <a:r>
-              <a:rPr lang="en-US" sz="2000" b="0" u="none" strike="noStrike">
-                <a:solidFill>
-                  <a:schemeClr val="dk1"/>
-                </a:solidFill>
-                <a:effectLst/>
-                <a:uFillTx/>
-                <a:latin typeface="Calibri"/>
-              </a:rPr>
-              <a:t>Second level</a:t>
-            </a:r>
-            <a:endParaRPr lang="en-US" sz="2000" b="0" u="none" strike="noStrike">
-              <a:solidFill>
-                <a:schemeClr val="dk1"/>
-              </a:solidFill>
-              <a:effectLst/>
-              <a:uFillTx/>
-              <a:latin typeface="Calibri"/>
-            </a:endParaRPr>
-          </a:p>
-          <a:p>
-            <a:pPr marL="1143000" lvl="2" indent="-228600" algn="l" defTabSz="457200">
-              <a:lnSpc>
-                <a:spcPct val="100000"/>
-              </a:lnSpc>
-              <a:spcBef>
-                <a:spcPts val="360"/>
-              </a:spcBef>
-              <a:buClr>
-                <a:srgbClr val="000000"/>
-              </a:buClr>
-              <a:buFont typeface="Arial"/>
-              <a:buChar char="•"/>
-              <a:tabLst>
-                <a:tab pos="0" algn="l"/>
-              </a:tabLst>
-            </a:pPr>
-            <a:r>
-              <a:rPr lang="en-US" sz="1800" b="0" u="none" strike="noStrike">
-                <a:solidFill>
-                  <a:schemeClr val="dk1"/>
-                </a:solidFill>
-                <a:effectLst/>
-                <a:uFillTx/>
-                <a:latin typeface="Calibri"/>
-              </a:rPr>
-              <a:t>Third level</a:t>
-            </a:r>
-            <a:endParaRPr lang="en-US" sz="1800" b="0" u="none" strike="noStrike">
-              <a:solidFill>
-                <a:schemeClr val="dk1"/>
-              </a:solidFill>
-              <a:effectLst/>
-              <a:uFillTx/>
-              <a:latin typeface="Calibri"/>
-            </a:endParaRPr>
-          </a:p>
-          <a:p>
-            <a:pPr marL="1600200" lvl="3" indent="-228600" algn="l" defTabSz="457200">
-              <a:lnSpc>
-                <a:spcPct val="100000"/>
-              </a:lnSpc>
-              <a:spcBef>
-                <a:spcPts val="320"/>
-              </a:spcBef>
-              <a:buClr>
-                <a:srgbClr val="000000"/>
-              </a:buClr>
-              <a:buFont typeface="Arial"/>
-              <a:buChar char="–"/>
-              <a:tabLst>
-                <a:tab pos="0" algn="l"/>
-              </a:tabLst>
-            </a:pPr>
-            <a:r>
-              <a:rPr lang="en-US" sz="1600" b="0" u="none" strike="noStrike">
-                <a:solidFill>
-                  <a:schemeClr val="dk1"/>
-                </a:solidFill>
-                <a:effectLst/>
-                <a:uFillTx/>
-                <a:latin typeface="Calibri"/>
-              </a:rPr>
-              <a:t>Fourth level</a:t>
-            </a:r>
-            <a:endParaRPr lang="en-US" sz="1600" b="0" u="none" strike="noStrike">
-              <a:solidFill>
-                <a:schemeClr val="dk1"/>
-              </a:solidFill>
-              <a:effectLst/>
-              <a:uFillTx/>
-              <a:latin typeface="Calibri"/>
-            </a:endParaRPr>
-          </a:p>
-          <a:p>
-            <a:pPr marL="2057400" lvl="4" indent="-228600" algn="l" defTabSz="457200">
-              <a:lnSpc>
-                <a:spcPct val="100000"/>
-              </a:lnSpc>
-              <a:spcBef>
-                <a:spcPts val="320"/>
-              </a:spcBef>
-              <a:buClr>
-                <a:srgbClr val="000000"/>
-              </a:buClr>
-              <a:buFont typeface="Arial"/>
-              <a:buChar char="»"/>
-              <a:tabLst>
-                <a:tab pos="0" algn="l"/>
-              </a:tabLst>
-            </a:pPr>
-            <a:r>
-              <a:rPr lang="en-US" sz="1600" b="0" u="none" strike="noStrike">
-                <a:solidFill>
-                  <a:schemeClr val="dk1"/>
-                </a:solidFill>
-                <a:effectLst/>
-                <a:uFillTx/>
-                <a:latin typeface="Calibri"/>
-              </a:rPr>
-              <a:t>Fifth level</a:t>
-            </a:r>
-            <a:endParaRPr lang="en-US" sz="1600" b="0" u="none" strike="noStrike">
-              <a:solidFill>
-                <a:schemeClr val="dk1"/>
-              </a:solidFill>
-              <a:effectLst/>
-              <a:uFillTx/>
-              <a:latin typeface="Calibri"/>
-            </a:endParaRPr>
-          </a:p>
-        </p:txBody>
-      </p:sp>
-      <p:sp>
-        <p:nvSpPr>
-          <p:cNvPr id="43" name="PlaceHolder 6"/>
+          <p:cNvPr id="39" name="PlaceHolder 3"/>
           <p:cNvSpPr>
             <a:spLocks noGrp="1"/>
           </p:cNvSpPr>
@@ -7125,7 +7035,7 @@
         <p:spPr>
           <a:xfrm>
             <a:off x="457200" y="6356520"/>
-            <a:ext cx="2131920" cy="363240"/>
+            <a:ext cx="2131560" cy="362880"/>
           </a:xfrm>
           <a:prstGeom prst="rect">
             <a:avLst/>
@@ -7196,7 +7106,7 @@
       </p:sp>
       <p:sp>
         <p:nvSpPr>
-          <p:cNvPr id="44" name="PlaceHolder 7"/>
+          <p:cNvPr id="40" name="PlaceHolder 4"/>
           <p:cNvSpPr>
             <a:spLocks noGrp="1"/>
           </p:cNvSpPr>
@@ -7207,7 +7117,7 @@
         <p:spPr>
           <a:xfrm>
             <a:off x="3124080" y="6356520"/>
-            <a:ext cx="2893680" cy="363240"/>
+            <a:ext cx="2893320" cy="362880"/>
           </a:xfrm>
           <a:prstGeom prst="rect">
             <a:avLst/>
@@ -7274,7 +7184,7 @@
       </p:sp>
       <p:sp>
         <p:nvSpPr>
-          <p:cNvPr id="45" name="PlaceHolder 8"/>
+          <p:cNvPr id="41" name="PlaceHolder 5"/>
           <p:cNvSpPr>
             <a:spLocks noGrp="1"/>
           </p:cNvSpPr>
@@ -7285,7 +7195,7 @@
         <p:spPr>
           <a:xfrm>
             <a:off x="6553080" y="6356520"/>
-            <a:ext cx="2131920" cy="363240"/>
+            <a:ext cx="2131560" cy="362880"/>
           </a:xfrm>
           <a:prstGeom prst="rect">
             <a:avLst/>
@@ -7330,7 +7240,7 @@
                 <a:tab pos="0" algn="l"/>
               </a:tabLst>
             </a:pPr>
-            <a:fld id="{FBFA9868-AD98-4903-AFF7-019E4E50BFF1}" type="slidenum">
+            <a:fld id="{A93CF2C6-378C-4D2F-8229-E68AC41BB36D}" type="slidenum">
               <a:rPr lang="en-US" sz="1200" b="0" u="none" strike="noStrike">
                 <a:solidFill>
                   <a:schemeClr val="dk1">
@@ -7360,8 +7270,8 @@
 </file>
 
 <file path=ppt/slideLayouts/slideLayout9.xml><?xml version="1.0" encoding="utf-8"?>
-<p:sldLayout xmlns:a="http://schemas.openxmlformats.org/drawingml/2006/main" xmlns:p="http://schemas.openxmlformats.org/presentationml/2006/main" xmlns:r="http://schemas.openxmlformats.org/officeDocument/2006/relationships" xmlns:p14="http://schemas.microsoft.com/office/powerpoint/2010/main" xmlns:p15="http://schemas.microsoft.com/office/powerpoint/2012/main" xmlns:mc="http://schemas.openxmlformats.org/markup-compatibility/2006" type="titleOnly" preserve="1">
-  <p:cSld name="Title Only">
+<p:sldLayout xmlns:a="http://schemas.openxmlformats.org/drawingml/2006/main" xmlns:p="http://schemas.openxmlformats.org/presentationml/2006/main" xmlns:r="http://schemas.openxmlformats.org/officeDocument/2006/relationships" xmlns:p14="http://schemas.microsoft.com/office/powerpoint/2010/main" xmlns:p15="http://schemas.microsoft.com/office/powerpoint/2012/main" xmlns:mc="http://schemas.openxmlformats.org/markup-compatibility/2006" type="blank" preserve="1">
+  <p:cSld name="Section Header">
     <p:bg>
       <p:bgPr>
         <a:solidFill>
@@ -7385,7 +7295,7 @@
       </p:grpSpPr>
       <p:sp>
         <p:nvSpPr>
-          <p:cNvPr id="46" name="PlaceHolder 1"/>
+          <p:cNvPr id="42" name="PlaceHolder 1"/>
           <p:cNvSpPr>
             <a:spLocks noGrp="1"/>
           </p:cNvSpPr>
@@ -7395,8 +7305,8 @@
         </p:nvSpPr>
         <p:spPr>
           <a:xfrm>
-            <a:off x="457200" y="274680"/>
-            <a:ext cx="8227800" cy="1141200"/>
+            <a:off x="722160" y="4406760"/>
+            <a:ext cx="7770240" cy="1360080"/>
           </a:xfrm>
           <a:prstGeom prst="rect">
             <a:avLst/>
@@ -7407,11 +7317,11 @@
           </a:ln>
         </p:spPr>
         <p:txBody>
-          <a:bodyPr lIns="91440" tIns="45720" rIns="91440" bIns="45720" anchor="ctr">
+          <a:bodyPr lIns="91440" tIns="45720" rIns="91440" bIns="45720" anchor="t">
             <a:noAutofit/>
           </a:bodyPr>
           <a:lstStyle>
-            <a:lvl1pPr indent="0" algn="ctr" defTabSz="457200">
+            <a:lvl1pPr indent="0" algn="l" defTabSz="457200">
               <a:lnSpc>
                 <a:spcPct val="100000"/>
               </a:lnSpc>
@@ -7419,7 +7329,7 @@
               <a:tabLst>
                 <a:tab pos="0" algn="l"/>
               </a:tabLst>
-              <a:defRPr lang="en-US" sz="4400" b="0" u="none" strike="noStrike">
+              <a:defRPr lang="en-US" sz="4000" b="1" u="none" strike="noStrike" cap="all">
                 <a:solidFill>
                   <a:schemeClr val="dk1"/>
                 </a:solidFill>
@@ -7430,7 +7340,7 @@
             </a:lvl1pPr>
           </a:lstStyle>
           <a:p>
-            <a:pPr indent="0" algn="ctr" defTabSz="457200">
+            <a:pPr indent="0" algn="l" defTabSz="457200">
               <a:lnSpc>
                 <a:spcPct val="100000"/>
               </a:lnSpc>
@@ -7440,7 +7350,7 @@
               </a:tabLst>
             </a:pPr>
             <a:r>
-              <a:rPr lang="en-US" sz="4400" b="0" u="none" strike="noStrike">
+              <a:rPr lang="en-US" sz="4000" b="1" u="none" strike="noStrike" cap="all">
                 <a:solidFill>
                   <a:schemeClr val="dk1"/>
                 </a:solidFill>
@@ -7450,7 +7360,7 @@
               </a:rPr>
               <a:t>Click to edit Master title style</a:t>
             </a:r>
-            <a:endParaRPr lang="en-US" sz="4400" b="0" u="none" strike="noStrike">
+            <a:endParaRPr lang="en-US" sz="4000" b="1" u="none" strike="noStrike" cap="all">
               <a:solidFill>
                 <a:schemeClr val="dk1"/>
               </a:solidFill>
@@ -7463,7 +7373,97 @@
       </p:sp>
       <p:sp>
         <p:nvSpPr>
-          <p:cNvPr id="47" name="PlaceHolder 2"/>
+          <p:cNvPr id="43" name="PlaceHolder 2"/>
+          <p:cNvSpPr>
+            <a:spLocks noGrp="1"/>
+          </p:cNvSpPr>
+          <p:nvPr>
+            <p:ph type="body"/>
+          </p:nvPr>
+        </p:nvSpPr>
+        <p:spPr>
+          <a:xfrm>
+            <a:off x="722160" y="2906640"/>
+            <a:ext cx="7770240" cy="1497960"/>
+          </a:xfrm>
+          <a:prstGeom prst="rect">
+            <a:avLst/>
+          </a:prstGeom>
+          <a:noFill/>
+          <a:ln w="0">
+            <a:noFill/>
+          </a:ln>
+        </p:spPr>
+        <p:txBody>
+          <a:bodyPr lIns="91440" tIns="45720" rIns="91440" bIns="45720" anchor="b">
+            <a:noAutofit/>
+          </a:bodyPr>
+          <a:lstStyle>
+            <a:lvl1pPr indent="0" algn="l" defTabSz="457200">
+              <a:lnSpc>
+                <a:spcPct val="100000"/>
+              </a:lnSpc>
+              <a:spcBef>
+                <a:spcPts val="400"/>
+              </a:spcBef>
+              <a:buNone/>
+              <a:tabLst>
+                <a:tab pos="0" algn="l"/>
+              </a:tabLst>
+              <a:defRPr lang="en-US" sz="2000" b="0" u="none" strike="noStrike">
+                <a:solidFill>
+                  <a:schemeClr val="dk1">
+                    <a:tint val="75000"/>
+                  </a:schemeClr>
+                </a:solidFill>
+                <a:effectLst/>
+                <a:uFillTx/>
+                <a:latin typeface="Calibri"/>
+              </a:defRPr>
+            </a:lvl1pPr>
+          </a:lstStyle>
+          <a:p>
+            <a:pPr indent="0" algn="l" defTabSz="457200">
+              <a:lnSpc>
+                <a:spcPct val="100000"/>
+              </a:lnSpc>
+              <a:spcBef>
+                <a:spcPts val="400"/>
+              </a:spcBef>
+              <a:buNone/>
+              <a:tabLst>
+                <a:tab pos="0" algn="l"/>
+              </a:tabLst>
+            </a:pPr>
+            <a:r>
+              <a:rPr lang="en-US" sz="2000" b="0" u="none" strike="noStrike">
+                <a:solidFill>
+                  <a:schemeClr val="dk1">
+                    <a:tint val="75000"/>
+                  </a:schemeClr>
+                </a:solidFill>
+                <a:effectLst/>
+                <a:uFillTx/>
+                <a:latin typeface="Calibri"/>
+              </a:rPr>
+              <a:t>Click to edit Master text styles</a:t>
+            </a:r>
+            <a:endParaRPr lang="en-US" sz="2000" b="0" u="none" strike="noStrike">
+              <a:solidFill>
+                <a:schemeClr val="dk1">
+                  <a:tint val="75000"/>
+                </a:schemeClr>
+              </a:solidFill>
+              <a:effectLst/>
+              <a:uFillTx/>
+              <a:latin typeface="Calibri"/>
+            </a:endParaRPr>
+          </a:p>
+        </p:txBody>
+      </p:sp>
+      <p:sp>
+        <p:nvSpPr>
+          <p:cNvPr id="44" name="PlaceHolder 3"/>
           <p:cNvSpPr>
             <a:spLocks noGrp="1"/>
           </p:cNvSpPr>
@@ -7474,7 +7474,7 @@
         <p:spPr>
           <a:xfrm>
             <a:off x="457200" y="6356520"/>
-            <a:ext cx="2131920" cy="363240"/>
+            <a:ext cx="2131560" cy="362880"/>
           </a:xfrm>
           <a:prstGeom prst="rect">
             <a:avLst/>
@@ -7545,7 +7545,7 @@
       </p:sp>
       <p:sp>
         <p:nvSpPr>
-          <p:cNvPr id="48" name="PlaceHolder 3"/>
+          <p:cNvPr id="45" name="PlaceHolder 4"/>
           <p:cNvSpPr>
             <a:spLocks noGrp="1"/>
           </p:cNvSpPr>
@@ -7556,7 +7556,7 @@
         <p:spPr>
           <a:xfrm>
             <a:off x="3124080" y="6356520"/>
-            <a:ext cx="2893680" cy="363240"/>
+            <a:ext cx="2893320" cy="362880"/>
           </a:xfrm>
           <a:prstGeom prst="rect">
             <a:avLst/>
@@ -7623,7 +7623,7 @@
       </p:sp>
       <p:sp>
         <p:nvSpPr>
-          <p:cNvPr id="49" name="PlaceHolder 4"/>
+          <p:cNvPr id="46" name="PlaceHolder 5"/>
           <p:cNvSpPr>
             <a:spLocks noGrp="1"/>
           </p:cNvSpPr>
@@ -7634,7 +7634,7 @@
         <p:spPr>
           <a:xfrm>
             <a:off x="6553080" y="6356520"/>
-            <a:ext cx="2131920" cy="363240"/>
+            <a:ext cx="2131560" cy="362880"/>
           </a:xfrm>
           <a:prstGeom prst="rect">
             <a:avLst/>
@@ -7679,7 +7679,7 @@
                 <a:tab pos="0" algn="l"/>
               </a:tabLst>
             </a:pPr>
-            <a:fld id="{97161A5E-570E-4BAE-9EEE-A10F8735C7E1}" type="slidenum">
+            <a:fld id="{96A6028F-EFE0-4565-966B-658F0CFCAAC5}" type="slidenum">
               <a:rPr lang="en-US" sz="1200" b="0" u="none" strike="noStrike">
                 <a:solidFill>
                   <a:schemeClr val="dk1">
@@ -7770,7 +7770,7 @@
         <p:spPr>
           <a:xfrm>
             <a:off x="685800" y="307080"/>
-            <a:ext cx="11169720" cy="1186920"/>
+            <a:ext cx="11169360" cy="1186920"/>
           </a:xfrm>
           <a:prstGeom prst="rect">
             <a:avLst/>
@@ -7858,7 +7858,7 @@
         <p:spPr>
           <a:xfrm>
             <a:off x="5029200" y="1494000"/>
-            <a:ext cx="7085880" cy="3189240"/>
+            <a:ext cx="7085520" cy="3188880"/>
           </a:xfrm>
           <a:prstGeom prst="rect">
             <a:avLst/>
@@ -7878,7 +7878,7 @@
         <p:spPr>
           <a:xfrm>
             <a:off x="592920" y="1857240"/>
-            <a:ext cx="2377800" cy="1113480"/>
+            <a:ext cx="2377440" cy="1113120"/>
           </a:xfrm>
           <a:prstGeom prst="rect">
             <a:avLst/>
@@ -8029,8 +8029,8 @@
         </p:nvSpPr>
         <p:spPr>
           <a:xfrm>
-            <a:off x="228600" y="3886200"/>
-            <a:ext cx="8457840" cy="2742840"/>
+            <a:off x="457200" y="4343400"/>
+            <a:ext cx="8457480" cy="1102680"/>
           </a:xfrm>
           <a:prstGeom prst="rect">
             <a:avLst/>
@@ -8053,73 +8053,6 @@
           <a:bodyPr lIns="108360" tIns="63360" rIns="108360" bIns="63360" anchor="t">
             <a:spAutoFit/>
           </a:bodyPr>
-          <a:p>
-            <a:pPr>
-              <a:lnSpc>
-                <a:spcPct val="100000"/>
-              </a:lnSpc>
-            </a:pPr>
-            <a:r>
-              <a:rPr lang="en-US" sz="3200" b="0" u="none" strike="noStrike">
-                <a:solidFill>
-                  <a:srgbClr val="000000"/>
-                </a:solidFill>
-                <a:effectLst/>
-                <a:uFillTx/>
-                <a:latin typeface="Arial"/>
-              </a:rPr>
-              <a:t>OnDemand for RStudio:</a:t>
-            </a:r>
-            <a:endParaRPr lang="en-US" sz="3200" b="0" u="none" strike="noStrike">
-              <a:solidFill>
-                <a:srgbClr val="000000"/>
-              </a:solidFill>
-              <a:effectLst/>
-              <a:uFillTx/>
-              <a:latin typeface="Arial"/>
-            </a:endParaRPr>
-          </a:p>
-          <a:p>
-            <a:pPr>
-              <a:lnSpc>
-                <a:spcPct val="100000"/>
-              </a:lnSpc>
-            </a:pPr>
-            <a:r>
-              <a:rPr lang="en-US" sz="3200" b="0" u="none" strike="noStrike">
-                <a:solidFill>
-                  <a:srgbClr val="000000"/>
-                </a:solidFill>
-                <a:effectLst/>
-                <a:uFillTx/>
-                <a:latin typeface="Arial"/>
-              </a:rPr>
-              <a:t>https://cgbs.cgu.edu.tw/</a:t>
-            </a:r>
-            <a:endParaRPr lang="en-US" sz="3200" b="0" u="none" strike="noStrike">
-              <a:solidFill>
-                <a:srgbClr val="000000"/>
-              </a:solidFill>
-              <a:effectLst/>
-              <a:uFillTx/>
-              <a:latin typeface="Arial"/>
-            </a:endParaRPr>
-          </a:p>
-          <a:p>
-            <a:pPr>
-              <a:lnSpc>
-                <a:spcPct val="100000"/>
-              </a:lnSpc>
-            </a:pPr>
-            <a:endParaRPr lang="en-US" sz="3200" b="0" u="none" strike="noStrike">
-              <a:solidFill>
-                <a:srgbClr val="000000"/>
-              </a:solidFill>
-              <a:effectLst/>
-              <a:uFillTx/>
-              <a:latin typeface="Arial"/>
-            </a:endParaRPr>
-          </a:p>
           <a:p>
             <a:pPr>
               <a:lnSpc>
@@ -8213,7 +8146,7 @@
         <p:spPr>
           <a:xfrm>
             <a:off x="961560" y="640080"/>
-            <a:ext cx="9556200" cy="498240"/>
+            <a:ext cx="9555840" cy="497880"/>
           </a:xfrm>
           <a:prstGeom prst="rect">
             <a:avLst/>
@@ -8270,7 +8203,7 @@
         <p:spPr>
           <a:xfrm>
             <a:off x="961560" y="1472760"/>
-            <a:ext cx="2748240" cy="4110480"/>
+            <a:ext cx="2747880" cy="4110120"/>
           </a:xfrm>
           <a:prstGeom prst="rect">
             <a:avLst/>
@@ -8561,7 +8494,7 @@
         <p:spPr>
           <a:xfrm>
             <a:off x="3711600" y="1472760"/>
-            <a:ext cx="3898080" cy="4110480"/>
+            <a:ext cx="3897720" cy="4110120"/>
           </a:xfrm>
           <a:prstGeom prst="rect">
             <a:avLst/>
@@ -8852,7 +8785,7 @@
         <p:spPr>
           <a:xfrm>
             <a:off x="7611480" y="1472760"/>
-            <a:ext cx="3898080" cy="4110480"/>
+            <a:ext cx="3897720" cy="4110120"/>
           </a:xfrm>
           <a:prstGeom prst="rect">
             <a:avLst/>
@@ -9173,7 +9106,7 @@
         <p:spPr>
           <a:xfrm>
             <a:off x="961560" y="1272600"/>
-            <a:ext cx="9556200" cy="3443760"/>
+            <a:ext cx="9555840" cy="3443760"/>
           </a:xfrm>
           <a:prstGeom prst="rect">
             <a:avLst/>
@@ -9413,7 +9346,7 @@
         <p:spPr>
           <a:xfrm>
             <a:off x="3637080" y="1771200"/>
-            <a:ext cx="10026000" cy="516600"/>
+            <a:ext cx="10025640" cy="516600"/>
           </a:xfrm>
           <a:prstGeom prst="rect">
             <a:avLst/>
@@ -9500,7 +9433,7 @@
         <p:spPr>
           <a:xfrm>
             <a:off x="961560" y="1272600"/>
-            <a:ext cx="9556200" cy="4110480"/>
+            <a:ext cx="9555840" cy="4110120"/>
           </a:xfrm>
           <a:prstGeom prst="rect">
             <a:avLst/>
@@ -9751,7 +9684,7 @@
         <p:spPr>
           <a:xfrm>
             <a:off x="961560" y="1272600"/>
-            <a:ext cx="9556200" cy="4110480"/>
+            <a:ext cx="9555840" cy="4110120"/>
           </a:xfrm>
           <a:prstGeom prst="rect">
             <a:avLst/>
@@ -10002,7 +9935,7 @@
         <p:spPr>
           <a:xfrm>
             <a:off x="961560" y="1272600"/>
-            <a:ext cx="9556200" cy="4110480"/>
+            <a:ext cx="9555840" cy="4110120"/>
           </a:xfrm>
           <a:prstGeom prst="rect">
             <a:avLst/>
@@ -10253,7 +10186,7 @@
         <p:spPr>
           <a:xfrm>
             <a:off x="961560" y="1272600"/>
-            <a:ext cx="9556200" cy="4110480"/>
+            <a:ext cx="9555840" cy="4110120"/>
           </a:xfrm>
           <a:prstGeom prst="rect">
             <a:avLst/>
@@ -10504,7 +10437,7 @@
         <p:spPr>
           <a:xfrm>
             <a:off x="961560" y="1272600"/>
-            <a:ext cx="9556200" cy="4110480"/>
+            <a:ext cx="9555840" cy="4110120"/>
           </a:xfrm>
           <a:prstGeom prst="rect">
             <a:avLst/>
@@ -10755,7 +10688,7 @@
         <p:spPr>
           <a:xfrm>
             <a:off x="961560" y="1272600"/>
-            <a:ext cx="9556200" cy="4110480"/>
+            <a:ext cx="9555840" cy="4110120"/>
           </a:xfrm>
           <a:prstGeom prst="rect">
             <a:avLst/>
@@ -11047,7 +10980,7 @@
         <p:spPr>
           <a:xfrm>
             <a:off x="961560" y="1272600"/>
-            <a:ext cx="9556200" cy="4110480"/>
+            <a:ext cx="9555840" cy="4110120"/>
           </a:xfrm>
           <a:prstGeom prst="rect">
             <a:avLst/>
@@ -11257,7 +11190,7 @@
         <p:spPr>
           <a:xfrm>
             <a:off x="961560" y="1272600"/>
-            <a:ext cx="9556200" cy="2100600"/>
+            <a:ext cx="9555840" cy="2100600"/>
           </a:xfrm>
           <a:prstGeom prst="rect">
             <a:avLst/>
@@ -11442,7 +11375,7 @@
         <p:spPr>
           <a:xfrm>
             <a:off x="961560" y="1272600"/>
-            <a:ext cx="9556200" cy="4110480"/>
+            <a:ext cx="9555840" cy="4110120"/>
           </a:xfrm>
           <a:prstGeom prst="rect">
             <a:avLst/>
@@ -11693,7 +11626,7 @@
         <p:spPr>
           <a:xfrm>
             <a:off x="961560" y="1272600"/>
-            <a:ext cx="9556200" cy="4110480"/>
+            <a:ext cx="9555840" cy="4110120"/>
           </a:xfrm>
           <a:prstGeom prst="rect">
             <a:avLst/>
@@ -11944,7 +11877,7 @@
         <p:spPr>
           <a:xfrm>
             <a:off x="961560" y="1272600"/>
-            <a:ext cx="9556200" cy="4110480"/>
+            <a:ext cx="9555840" cy="4110120"/>
           </a:xfrm>
           <a:prstGeom prst="rect">
             <a:avLst/>
@@ -12195,7 +12128,7 @@
         <p:spPr>
           <a:xfrm>
             <a:off x="961560" y="1272600"/>
-            <a:ext cx="9556200" cy="4110480"/>
+            <a:ext cx="9555840" cy="4110120"/>
           </a:xfrm>
           <a:prstGeom prst="rect">
             <a:avLst/>
@@ -12446,7 +12379,7 @@
         <p:spPr>
           <a:xfrm>
             <a:off x="961560" y="1272600"/>
-            <a:ext cx="9556200" cy="4144680"/>
+            <a:ext cx="9555840" cy="4144680"/>
           </a:xfrm>
           <a:prstGeom prst="rect">
             <a:avLst/>
@@ -12779,7 +12712,7 @@
         <p:spPr>
           <a:xfrm>
             <a:off x="961560" y="1272600"/>
-            <a:ext cx="9556200" cy="4110480"/>
+            <a:ext cx="9555840" cy="4110120"/>
           </a:xfrm>
           <a:prstGeom prst="rect">
             <a:avLst/>
@@ -12989,7 +12922,7 @@
         <p:spPr>
           <a:xfrm>
             <a:off x="961560" y="1272600"/>
-            <a:ext cx="9556200" cy="4110480"/>
+            <a:ext cx="9555840" cy="4110120"/>
           </a:xfrm>
           <a:prstGeom prst="rect">
             <a:avLst/>
@@ -13240,7 +13173,7 @@
         <p:spPr>
           <a:xfrm>
             <a:off x="961560" y="1272600"/>
-            <a:ext cx="9556200" cy="5787360"/>
+            <a:ext cx="9555840" cy="5787360"/>
           </a:xfrm>
           <a:prstGeom prst="rect">
             <a:avLst/>
@@ -13611,7 +13544,7 @@
         <p:spPr>
           <a:xfrm>
             <a:off x="3637080" y="1771200"/>
-            <a:ext cx="10026000" cy="3432960"/>
+            <a:ext cx="10025640" cy="3432600"/>
           </a:xfrm>
           <a:prstGeom prst="rect">
             <a:avLst/>
@@ -13698,7 +13631,7 @@
         <p:spPr>
           <a:xfrm>
             <a:off x="961560" y="1272600"/>
-            <a:ext cx="9556200" cy="4110480"/>
+            <a:ext cx="9555840" cy="4110120"/>
           </a:xfrm>
           <a:prstGeom prst="rect">
             <a:avLst/>
@@ -14031,7 +13964,7 @@
         <p:spPr>
           <a:xfrm>
             <a:off x="961560" y="1272600"/>
-            <a:ext cx="9556200" cy="4110480"/>
+            <a:ext cx="9555840" cy="4110120"/>
           </a:xfrm>
           <a:prstGeom prst="rect">
             <a:avLst/>
@@ -14282,7 +14215,7 @@
         <p:spPr>
           <a:xfrm>
             <a:off x="961560" y="1272600"/>
-            <a:ext cx="9556200" cy="4110480"/>
+            <a:ext cx="9555840" cy="4110120"/>
           </a:xfrm>
           <a:prstGeom prst="rect">
             <a:avLst/>
@@ -14574,7 +14507,7 @@
         <p:spPr>
           <a:xfrm>
             <a:off x="961560" y="1272600"/>
-            <a:ext cx="9556200" cy="4110480"/>
+            <a:ext cx="9555840" cy="4110120"/>
           </a:xfrm>
           <a:prstGeom prst="rect">
             <a:avLst/>
@@ -14825,7 +14758,7 @@
         <p:spPr>
           <a:xfrm>
             <a:off x="961560" y="1272600"/>
-            <a:ext cx="9556200" cy="4110480"/>
+            <a:ext cx="9555840" cy="4110120"/>
           </a:xfrm>
           <a:prstGeom prst="rect">
             <a:avLst/>
